--- a/SimLens_Proposal_2026-04-27.pptx
+++ b/SimLens_Proposal_2026-04-27.pptx
@@ -5,24 +5,25 @@
     <p:sldMasterId id="2147483648" r:id="rId1"/>
   </p:sldMasterIdLst>
   <p:sldIdLst>
-    <p:sldId id="256" r:id="rId2"/>
-    <p:sldId id="257" r:id="rId3"/>
-    <p:sldId id="258" r:id="rId4"/>
-    <p:sldId id="259" r:id="rId5"/>
-    <p:sldId id="260" r:id="rId6"/>
-    <p:sldId id="261" r:id="rId7"/>
-    <p:sldId id="262" r:id="rId8"/>
-    <p:sldId id="263" r:id="rId9"/>
-    <p:sldId id="264" r:id="rId10"/>
-    <p:sldId id="265" r:id="rId11"/>
-    <p:sldId id="266" r:id="rId12"/>
-    <p:sldId id="267" r:id="rId13"/>
-    <p:sldId id="268" r:id="rId14"/>
-    <p:sldId id="269" r:id="rId15"/>
-    <p:sldId id="270" r:id="rId16"/>
-    <p:sldId id="271" r:id="rId17"/>
+    <p:sldId id="256" r:id="rId7"/>
+    <p:sldId id="257" r:id="rId8"/>
+    <p:sldId id="258" r:id="rId9"/>
+    <p:sldId id="259" r:id="rId10"/>
+    <p:sldId id="260" r:id="rId11"/>
+    <p:sldId id="261" r:id="rId12"/>
+    <p:sldId id="262" r:id="rId13"/>
+    <p:sldId id="263" r:id="rId14"/>
+    <p:sldId id="264" r:id="rId15"/>
+    <p:sldId id="265" r:id="rId16"/>
+    <p:sldId id="266" r:id="rId17"/>
+    <p:sldId id="267" r:id="rId18"/>
+    <p:sldId id="268" r:id="rId19"/>
+    <p:sldId id="269" r:id="rId20"/>
+    <p:sldId id="270" r:id="rId21"/>
+    <p:sldId id="271" r:id="rId22"/>
+    <p:sldId id="272" r:id="rId23"/>
   </p:sldIdLst>
-  <p:sldSz cx="12192000" cy="6858000"/>
+  <p:sldSz cx="12191695" cy="6858000" type="screen4x3"/>
   <p:notesSz cx="6858000" cy="9144000"/>
   <p:defaultTextStyle>
     <a:defPPr>
@@ -119,22 +120,6 @@
       </a:defRPr>
     </a:lvl9pPr>
   </p:defaultTextStyle>
-  <p:extLst>
-    <p:ext uri="{EFAFB233-063F-42B5-8137-9DF3F51BA10A}">
-      <p15:sldGuideLst xmlns:p15="http://schemas.microsoft.com/office/powerpoint/2012/main">
-        <p15:guide id="1" orient="horz" pos="2160">
-          <p15:clr>
-            <a:srgbClr val="A4A3A4"/>
-          </p15:clr>
-        </p15:guide>
-        <p15:guide id="2" pos="2880">
-          <p15:clr>
-            <a:srgbClr val="A4A3A4"/>
-          </p15:clr>
-        </p15:guide>
-      </p15:sldGuideLst>
-    </p:ext>
-  </p:extLst>
 </p:presentation>
 </file>
 
@@ -176,9 +161,10 @@
           <a:lstStyle/>
           <a:p>
             <a:r>
-              <a:rPr lang="en-US"/>
+              <a:rPr lang="en-US" smtClean="0"/>
               <a:t>Click to edit Master title style</a:t>
             </a:r>
+            <a:endParaRPr lang="en-US"/>
           </a:p>
         </p:txBody>
       </p:sp>
@@ -294,9 +280,10 @@
           </a:lstStyle>
           <a:p>
             <a:r>
-              <a:rPr lang="en-US"/>
+              <a:rPr lang="en-US" smtClean="0"/>
               <a:t>Click to edit Master subtitle style</a:t>
             </a:r>
+            <a:endParaRPr lang="en-US"/>
           </a:p>
         </p:txBody>
       </p:sp>
@@ -317,7 +304,7 @@
           <a:p>
             <a:fld id="{5BCAD085-E8A6-8845-BD4E-CB4CCA059FC4}" type="datetimeFigureOut">
               <a:rPr lang="en-US" smtClean="0"/>
-              <a:t>4/27/2026</a:t>
+              <a:t>1/27/13</a:t>
             </a:fld>
             <a:endParaRPr lang="en-US"/>
           </a:p>
@@ -411,9 +398,10 @@
           <a:lstStyle/>
           <a:p>
             <a:r>
-              <a:rPr lang="en-US"/>
+              <a:rPr lang="en-US" smtClean="0"/>
               <a:t>Click to edit Master title style</a:t>
             </a:r>
+            <a:endParaRPr lang="en-US"/>
           </a:p>
         </p:txBody>
       </p:sp>
@@ -434,37 +422,38 @@
           <a:p>
             <a:pPr lvl="0"/>
             <a:r>
-              <a:rPr lang="en-US"/>
+              <a:rPr lang="en-US" smtClean="0"/>
               <a:t>Click to edit Master text styles</a:t>
             </a:r>
           </a:p>
           <a:p>
             <a:pPr lvl="1"/>
             <a:r>
-              <a:rPr lang="en-US"/>
+              <a:rPr lang="en-US" smtClean="0"/>
               <a:t>Second level</a:t>
             </a:r>
           </a:p>
           <a:p>
             <a:pPr lvl="2"/>
             <a:r>
-              <a:rPr lang="en-US"/>
+              <a:rPr lang="en-US" smtClean="0"/>
               <a:t>Third level</a:t>
             </a:r>
           </a:p>
           <a:p>
             <a:pPr lvl="3"/>
             <a:r>
-              <a:rPr lang="en-US"/>
+              <a:rPr lang="en-US" smtClean="0"/>
               <a:t>Fourth level</a:t>
             </a:r>
           </a:p>
           <a:p>
             <a:pPr lvl="4"/>
             <a:r>
-              <a:rPr lang="en-US"/>
+              <a:rPr lang="en-US" smtClean="0"/>
               <a:t>Fifth level</a:t>
             </a:r>
+            <a:endParaRPr lang="en-US"/>
           </a:p>
         </p:txBody>
       </p:sp>
@@ -485,7 +474,7 @@
           <a:p>
             <a:fld id="{5BCAD085-E8A6-8845-BD4E-CB4CCA059FC4}" type="datetimeFigureOut">
               <a:rPr lang="en-US" smtClean="0"/>
-              <a:t>4/27/2026</a:t>
+              <a:t>1/27/13</a:t>
             </a:fld>
             <a:endParaRPr lang="en-US"/>
           </a:p>
@@ -584,9 +573,10 @@
           <a:lstStyle/>
           <a:p>
             <a:r>
-              <a:rPr lang="en-US"/>
+              <a:rPr lang="en-US" smtClean="0"/>
               <a:t>Click to edit Master title style</a:t>
             </a:r>
+            <a:endParaRPr lang="en-US"/>
           </a:p>
         </p:txBody>
       </p:sp>
@@ -612,37 +602,38 @@
           <a:p>
             <a:pPr lvl="0"/>
             <a:r>
-              <a:rPr lang="en-US"/>
+              <a:rPr lang="en-US" smtClean="0"/>
               <a:t>Click to edit Master text styles</a:t>
             </a:r>
           </a:p>
           <a:p>
             <a:pPr lvl="1"/>
             <a:r>
-              <a:rPr lang="en-US"/>
+              <a:rPr lang="en-US" smtClean="0"/>
               <a:t>Second level</a:t>
             </a:r>
           </a:p>
           <a:p>
             <a:pPr lvl="2"/>
             <a:r>
-              <a:rPr lang="en-US"/>
+              <a:rPr lang="en-US" smtClean="0"/>
               <a:t>Third level</a:t>
             </a:r>
           </a:p>
           <a:p>
             <a:pPr lvl="3"/>
             <a:r>
-              <a:rPr lang="en-US"/>
+              <a:rPr lang="en-US" smtClean="0"/>
               <a:t>Fourth level</a:t>
             </a:r>
           </a:p>
           <a:p>
             <a:pPr lvl="4"/>
             <a:r>
-              <a:rPr lang="en-US"/>
+              <a:rPr lang="en-US" smtClean="0"/>
               <a:t>Fifth level</a:t>
             </a:r>
+            <a:endParaRPr lang="en-US"/>
           </a:p>
         </p:txBody>
       </p:sp>
@@ -663,7 +654,7 @@
           <a:p>
             <a:fld id="{5BCAD085-E8A6-8845-BD4E-CB4CCA059FC4}" type="datetimeFigureOut">
               <a:rPr lang="en-US" smtClean="0"/>
-              <a:t>4/27/2026</a:t>
+              <a:t>1/27/13</a:t>
             </a:fld>
             <a:endParaRPr lang="en-US"/>
           </a:p>
@@ -757,9 +748,10 @@
           <a:lstStyle/>
           <a:p>
             <a:r>
-              <a:rPr lang="en-US"/>
+              <a:rPr lang="en-US" smtClean="0"/>
               <a:t>Click to edit Master title style</a:t>
             </a:r>
+            <a:endParaRPr lang="en-US"/>
           </a:p>
         </p:txBody>
       </p:sp>
@@ -780,37 +772,38 @@
           <a:p>
             <a:pPr lvl="0"/>
             <a:r>
-              <a:rPr lang="en-US"/>
+              <a:rPr lang="en-US" smtClean="0"/>
               <a:t>Click to edit Master text styles</a:t>
             </a:r>
           </a:p>
           <a:p>
             <a:pPr lvl="1"/>
             <a:r>
-              <a:rPr lang="en-US"/>
+              <a:rPr lang="en-US" smtClean="0"/>
               <a:t>Second level</a:t>
             </a:r>
           </a:p>
           <a:p>
             <a:pPr lvl="2"/>
             <a:r>
-              <a:rPr lang="en-US"/>
+              <a:rPr lang="en-US" smtClean="0"/>
               <a:t>Third level</a:t>
             </a:r>
           </a:p>
           <a:p>
             <a:pPr lvl="3"/>
             <a:r>
-              <a:rPr lang="en-US"/>
+              <a:rPr lang="en-US" smtClean="0"/>
               <a:t>Fourth level</a:t>
             </a:r>
           </a:p>
           <a:p>
             <a:pPr lvl="4"/>
             <a:r>
-              <a:rPr lang="en-US"/>
+              <a:rPr lang="en-US" smtClean="0"/>
               <a:t>Fifth level</a:t>
             </a:r>
+            <a:endParaRPr lang="en-US"/>
           </a:p>
         </p:txBody>
       </p:sp>
@@ -831,7 +824,7 @@
           <a:p>
             <a:fld id="{5BCAD085-E8A6-8845-BD4E-CB4CCA059FC4}" type="datetimeFigureOut">
               <a:rPr lang="en-US" smtClean="0"/>
-              <a:t>4/27/2026</a:t>
+              <a:t>1/27/13</a:t>
             </a:fld>
             <a:endParaRPr lang="en-US"/>
           </a:p>
@@ -934,9 +927,10 @@
           </a:lstStyle>
           <a:p>
             <a:r>
-              <a:rPr lang="en-US"/>
+              <a:rPr lang="en-US" smtClean="0"/>
               <a:t>Click to edit Master title style</a:t>
             </a:r>
+            <a:endParaRPr lang="en-US"/>
           </a:p>
         </p:txBody>
       </p:sp>
@@ -1053,7 +1047,7 @@
           <a:p>
             <a:pPr lvl="0"/>
             <a:r>
-              <a:rPr lang="en-US"/>
+              <a:rPr lang="en-US" smtClean="0"/>
               <a:t>Click to edit Master text styles</a:t>
             </a:r>
           </a:p>
@@ -1076,7 +1070,7 @@
           <a:p>
             <a:fld id="{5BCAD085-E8A6-8845-BD4E-CB4CCA059FC4}" type="datetimeFigureOut">
               <a:rPr lang="en-US" smtClean="0"/>
-              <a:t>4/27/2026</a:t>
+              <a:t>1/27/13</a:t>
             </a:fld>
             <a:endParaRPr lang="en-US"/>
           </a:p>
@@ -1170,9 +1164,10 @@
           <a:lstStyle/>
           <a:p>
             <a:r>
-              <a:rPr lang="en-US"/>
+              <a:rPr lang="en-US" smtClean="0"/>
               <a:t>Click to edit Master title style</a:t>
             </a:r>
+            <a:endParaRPr lang="en-US"/>
           </a:p>
         </p:txBody>
       </p:sp>
@@ -1226,37 +1221,38 @@
           <a:p>
             <a:pPr lvl="0"/>
             <a:r>
-              <a:rPr lang="en-US"/>
+              <a:rPr lang="en-US" smtClean="0"/>
               <a:t>Click to edit Master text styles</a:t>
             </a:r>
           </a:p>
           <a:p>
             <a:pPr lvl="1"/>
             <a:r>
-              <a:rPr lang="en-US"/>
+              <a:rPr lang="en-US" smtClean="0"/>
               <a:t>Second level</a:t>
             </a:r>
           </a:p>
           <a:p>
             <a:pPr lvl="2"/>
             <a:r>
-              <a:rPr lang="en-US"/>
+              <a:rPr lang="en-US" smtClean="0"/>
               <a:t>Third level</a:t>
             </a:r>
           </a:p>
           <a:p>
             <a:pPr lvl="3"/>
             <a:r>
-              <a:rPr lang="en-US"/>
+              <a:rPr lang="en-US" smtClean="0"/>
               <a:t>Fourth level</a:t>
             </a:r>
           </a:p>
           <a:p>
             <a:pPr lvl="4"/>
             <a:r>
-              <a:rPr lang="en-US"/>
+              <a:rPr lang="en-US" smtClean="0"/>
               <a:t>Fifth level</a:t>
             </a:r>
+            <a:endParaRPr lang="en-US"/>
           </a:p>
         </p:txBody>
       </p:sp>
@@ -1310,37 +1306,38 @@
           <a:p>
             <a:pPr lvl="0"/>
             <a:r>
-              <a:rPr lang="en-US"/>
+              <a:rPr lang="en-US" smtClean="0"/>
               <a:t>Click to edit Master text styles</a:t>
             </a:r>
           </a:p>
           <a:p>
             <a:pPr lvl="1"/>
             <a:r>
-              <a:rPr lang="en-US"/>
+              <a:rPr lang="en-US" smtClean="0"/>
               <a:t>Second level</a:t>
             </a:r>
           </a:p>
           <a:p>
             <a:pPr lvl="2"/>
             <a:r>
-              <a:rPr lang="en-US"/>
+              <a:rPr lang="en-US" smtClean="0"/>
               <a:t>Third level</a:t>
             </a:r>
           </a:p>
           <a:p>
             <a:pPr lvl="3"/>
             <a:r>
-              <a:rPr lang="en-US"/>
+              <a:rPr lang="en-US" smtClean="0"/>
               <a:t>Fourth level</a:t>
             </a:r>
           </a:p>
           <a:p>
             <a:pPr lvl="4"/>
             <a:r>
-              <a:rPr lang="en-US"/>
+              <a:rPr lang="en-US" smtClean="0"/>
               <a:t>Fifth level</a:t>
             </a:r>
+            <a:endParaRPr lang="en-US"/>
           </a:p>
         </p:txBody>
       </p:sp>
@@ -1361,7 +1358,7 @@
           <a:p>
             <a:fld id="{5BCAD085-E8A6-8845-BD4E-CB4CCA059FC4}" type="datetimeFigureOut">
               <a:rPr lang="en-US" smtClean="0"/>
-              <a:t>4/27/2026</a:t>
+              <a:t>1/27/13</a:t>
             </a:fld>
             <a:endParaRPr lang="en-US"/>
           </a:p>
@@ -1459,9 +1456,10 @@
           </a:lstStyle>
           <a:p>
             <a:r>
-              <a:rPr lang="en-US"/>
+              <a:rPr lang="en-US" smtClean="0"/>
               <a:t>Click to edit Master title style</a:t>
             </a:r>
+            <a:endParaRPr lang="en-US"/>
           </a:p>
         </p:txBody>
       </p:sp>
@@ -1524,7 +1522,7 @@
           <a:p>
             <a:pPr lvl="0"/>
             <a:r>
-              <a:rPr lang="en-US"/>
+              <a:rPr lang="en-US" smtClean="0"/>
               <a:t>Click to edit Master text styles</a:t>
             </a:r>
           </a:p>
@@ -1580,37 +1578,38 @@
           <a:p>
             <a:pPr lvl="0"/>
             <a:r>
-              <a:rPr lang="en-US"/>
+              <a:rPr lang="en-US" smtClean="0"/>
               <a:t>Click to edit Master text styles</a:t>
             </a:r>
           </a:p>
           <a:p>
             <a:pPr lvl="1"/>
             <a:r>
-              <a:rPr lang="en-US"/>
+              <a:rPr lang="en-US" smtClean="0"/>
               <a:t>Second level</a:t>
             </a:r>
           </a:p>
           <a:p>
             <a:pPr lvl="2"/>
             <a:r>
-              <a:rPr lang="en-US"/>
+              <a:rPr lang="en-US" smtClean="0"/>
               <a:t>Third level</a:t>
             </a:r>
           </a:p>
           <a:p>
             <a:pPr lvl="3"/>
             <a:r>
-              <a:rPr lang="en-US"/>
+              <a:rPr lang="en-US" smtClean="0"/>
               <a:t>Fourth level</a:t>
             </a:r>
           </a:p>
           <a:p>
             <a:pPr lvl="4"/>
             <a:r>
-              <a:rPr lang="en-US"/>
+              <a:rPr lang="en-US" smtClean="0"/>
               <a:t>Fifth level</a:t>
             </a:r>
+            <a:endParaRPr lang="en-US"/>
           </a:p>
         </p:txBody>
       </p:sp>
@@ -1673,7 +1672,7 @@
           <a:p>
             <a:pPr lvl="0"/>
             <a:r>
-              <a:rPr lang="en-US"/>
+              <a:rPr lang="en-US" smtClean="0"/>
               <a:t>Click to edit Master text styles</a:t>
             </a:r>
           </a:p>
@@ -1729,37 +1728,38 @@
           <a:p>
             <a:pPr lvl="0"/>
             <a:r>
-              <a:rPr lang="en-US"/>
+              <a:rPr lang="en-US" smtClean="0"/>
               <a:t>Click to edit Master text styles</a:t>
             </a:r>
           </a:p>
           <a:p>
             <a:pPr lvl="1"/>
             <a:r>
-              <a:rPr lang="en-US"/>
+              <a:rPr lang="en-US" smtClean="0"/>
               <a:t>Second level</a:t>
             </a:r>
           </a:p>
           <a:p>
             <a:pPr lvl="2"/>
             <a:r>
-              <a:rPr lang="en-US"/>
+              <a:rPr lang="en-US" smtClean="0"/>
               <a:t>Third level</a:t>
             </a:r>
           </a:p>
           <a:p>
             <a:pPr lvl="3"/>
             <a:r>
-              <a:rPr lang="en-US"/>
+              <a:rPr lang="en-US" smtClean="0"/>
               <a:t>Fourth level</a:t>
             </a:r>
           </a:p>
           <a:p>
             <a:pPr lvl="4"/>
             <a:r>
-              <a:rPr lang="en-US"/>
+              <a:rPr lang="en-US" smtClean="0"/>
               <a:t>Fifth level</a:t>
             </a:r>
+            <a:endParaRPr lang="en-US"/>
           </a:p>
         </p:txBody>
       </p:sp>
@@ -1780,7 +1780,7 @@
           <a:p>
             <a:fld id="{5BCAD085-E8A6-8845-BD4E-CB4CCA059FC4}" type="datetimeFigureOut">
               <a:rPr lang="en-US" smtClean="0"/>
-              <a:t>4/27/2026</a:t>
+              <a:t>1/27/13</a:t>
             </a:fld>
             <a:endParaRPr lang="en-US"/>
           </a:p>
@@ -1874,9 +1874,10 @@
           <a:lstStyle/>
           <a:p>
             <a:r>
-              <a:rPr lang="en-US"/>
+              <a:rPr lang="en-US" smtClean="0"/>
               <a:t>Click to edit Master title style</a:t>
             </a:r>
+            <a:endParaRPr lang="en-US"/>
           </a:p>
         </p:txBody>
       </p:sp>
@@ -1897,7 +1898,7 @@
           <a:p>
             <a:fld id="{5BCAD085-E8A6-8845-BD4E-CB4CCA059FC4}" type="datetimeFigureOut">
               <a:rPr lang="en-US" smtClean="0"/>
-              <a:t>4/27/2026</a:t>
+              <a:t>1/27/13</a:t>
             </a:fld>
             <a:endParaRPr lang="en-US"/>
           </a:p>
@@ -1992,7 +1993,7 @@
           <a:p>
             <a:fld id="{5BCAD085-E8A6-8845-BD4E-CB4CCA059FC4}" type="datetimeFigureOut">
               <a:rPr lang="en-US" smtClean="0"/>
-              <a:t>4/27/2026</a:t>
+              <a:t>1/27/13</a:t>
             </a:fld>
             <a:endParaRPr lang="en-US"/>
           </a:p>
@@ -2095,9 +2096,10 @@
           </a:lstStyle>
           <a:p>
             <a:r>
-              <a:rPr lang="en-US"/>
+              <a:rPr lang="en-US" smtClean="0"/>
               <a:t>Click to edit Master title style</a:t>
             </a:r>
+            <a:endParaRPr lang="en-US"/>
           </a:p>
         </p:txBody>
       </p:sp>
@@ -2151,37 +2153,38 @@
           <a:p>
             <a:pPr lvl="0"/>
             <a:r>
-              <a:rPr lang="en-US"/>
+              <a:rPr lang="en-US" smtClean="0"/>
               <a:t>Click to edit Master text styles</a:t>
             </a:r>
           </a:p>
           <a:p>
             <a:pPr lvl="1"/>
             <a:r>
-              <a:rPr lang="en-US"/>
+              <a:rPr lang="en-US" smtClean="0"/>
               <a:t>Second level</a:t>
             </a:r>
           </a:p>
           <a:p>
             <a:pPr lvl="2"/>
             <a:r>
-              <a:rPr lang="en-US"/>
+              <a:rPr lang="en-US" smtClean="0"/>
               <a:t>Third level</a:t>
             </a:r>
           </a:p>
           <a:p>
             <a:pPr lvl="3"/>
             <a:r>
-              <a:rPr lang="en-US"/>
+              <a:rPr lang="en-US" smtClean="0"/>
               <a:t>Fourth level</a:t>
             </a:r>
           </a:p>
           <a:p>
             <a:pPr lvl="4"/>
             <a:r>
-              <a:rPr lang="en-US"/>
+              <a:rPr lang="en-US" smtClean="0"/>
               <a:t>Fifth level</a:t>
             </a:r>
+            <a:endParaRPr lang="en-US"/>
           </a:p>
         </p:txBody>
       </p:sp>
@@ -2244,7 +2247,7 @@
           <a:p>
             <a:pPr lvl="0"/>
             <a:r>
-              <a:rPr lang="en-US"/>
+              <a:rPr lang="en-US" smtClean="0"/>
               <a:t>Click to edit Master text styles</a:t>
             </a:r>
           </a:p>
@@ -2267,7 +2270,7 @@
           <a:p>
             <a:fld id="{5BCAD085-E8A6-8845-BD4E-CB4CCA059FC4}" type="datetimeFigureOut">
               <a:rPr lang="en-US" smtClean="0"/>
-              <a:t>4/27/2026</a:t>
+              <a:t>1/27/13</a:t>
             </a:fld>
             <a:endParaRPr lang="en-US"/>
           </a:p>
@@ -2370,9 +2373,10 @@
           </a:lstStyle>
           <a:p>
             <a:r>
-              <a:rPr lang="en-US"/>
+              <a:rPr lang="en-US" smtClean="0"/>
               <a:t>Click to edit Master title style</a:t>
             </a:r>
+            <a:endParaRPr lang="en-US"/>
           </a:p>
         </p:txBody>
       </p:sp>
@@ -2496,7 +2500,7 @@
           <a:p>
             <a:pPr lvl="0"/>
             <a:r>
-              <a:rPr lang="en-US"/>
+              <a:rPr lang="en-US" smtClean="0"/>
               <a:t>Click to edit Master text styles</a:t>
             </a:r>
           </a:p>
@@ -2519,7 +2523,7 @@
           <a:p>
             <a:fld id="{5BCAD085-E8A6-8845-BD4E-CB4CCA059FC4}" type="datetimeFigureOut">
               <a:rPr lang="en-US" smtClean="0"/>
-              <a:t>4/27/2026</a:t>
+              <a:t>1/27/13</a:t>
             </a:fld>
             <a:endParaRPr lang="en-US"/>
           </a:p>
@@ -2628,9 +2632,10 @@
           <a:lstStyle/>
           <a:p>
             <a:r>
-              <a:rPr lang="en-US"/>
+              <a:rPr lang="en-US" smtClean="0"/>
               <a:t>Click to edit Master title style</a:t>
             </a:r>
+            <a:endParaRPr lang="en-US"/>
           </a:p>
         </p:txBody>
       </p:sp>
@@ -2661,37 +2666,38 @@
           <a:p>
             <a:pPr lvl="0"/>
             <a:r>
-              <a:rPr lang="en-US"/>
+              <a:rPr lang="en-US" smtClean="0"/>
               <a:t>Click to edit Master text styles</a:t>
             </a:r>
           </a:p>
           <a:p>
             <a:pPr lvl="1"/>
             <a:r>
-              <a:rPr lang="en-US"/>
+              <a:rPr lang="en-US" smtClean="0"/>
               <a:t>Second level</a:t>
             </a:r>
           </a:p>
           <a:p>
             <a:pPr lvl="2"/>
             <a:r>
-              <a:rPr lang="en-US"/>
+              <a:rPr lang="en-US" smtClean="0"/>
               <a:t>Third level</a:t>
             </a:r>
           </a:p>
           <a:p>
             <a:pPr lvl="3"/>
             <a:r>
-              <a:rPr lang="en-US"/>
+              <a:rPr lang="en-US" smtClean="0"/>
               <a:t>Fourth level</a:t>
             </a:r>
           </a:p>
           <a:p>
             <a:pPr lvl="4"/>
             <a:r>
-              <a:rPr lang="en-US"/>
+              <a:rPr lang="en-US" smtClean="0"/>
               <a:t>Fifth level</a:t>
             </a:r>
+            <a:endParaRPr lang="en-US"/>
           </a:p>
         </p:txBody>
       </p:sp>
@@ -2730,7 +2736,7 @@
           <a:p>
             <a:fld id="{5BCAD085-E8A6-8845-BD4E-CB4CCA059FC4}" type="datetimeFigureOut">
               <a:rPr lang="en-US" smtClean="0"/>
-              <a:t>4/27/2026</a:t>
+              <a:t>1/27/13</a:t>
             </a:fld>
             <a:endParaRPr lang="en-US"/>
           </a:p>
@@ -3089,7 +3095,7 @@
 </file>
 
 <file path=ppt/slides/slide1.xml><?xml version="1.0" encoding="utf-8"?>
-<p:sld xmlns:a="http://schemas.openxmlformats.org/drawingml/2006/main" xmlns:r="http://schemas.openxmlformats.org/officeDocument/2006/relationships" xmlns:p="http://schemas.openxmlformats.org/presentationml/2006/main">
+<p:sld xmlns:a="http://schemas.openxmlformats.org/drawingml/2006/main" xmlns:p="http://schemas.openxmlformats.org/presentationml/2006/main" xmlns:r="http://schemas.openxmlformats.org/officeDocument/2006/relationships">
   <p:cSld>
     <p:spTree>
       <p:nvGrpSpPr>
@@ -3097,14 +3103,7 @@
         <p:cNvGrpSpPr/>
         <p:nvPr/>
       </p:nvGrpSpPr>
-      <p:grpSpPr>
-        <a:xfrm>
-          <a:off x="0" y="0"/>
-          <a:ext cx="0" cy="0"/>
-          <a:chOff x="0" y="0"/>
-          <a:chExt cx="0" cy="0"/>
-        </a:xfrm>
-      </p:grpSpPr>
+      <p:grpSpPr/>
       <p:sp>
         <p:nvSpPr>
           <p:cNvPr id="2" name="TextBox 1"/>
@@ -3129,7 +3128,7 @@
           <a:p>
             <a:pPr algn="ctr"/>
             <a:r>
-              <a:rPr sz="3600" b="1" dirty="0">
+              <a:rPr sz="3600" b="1">
                 <a:solidFill>
                   <a:srgbClr val="1F1F1F"/>
                 </a:solidFill>
@@ -3137,11 +3136,9 @@
               </a:rPr>
               <a:t>Distillation + RLAIH for Segment-Level</a:t>
             </a:r>
-            <a:br>
-              <a:rPr dirty="0"/>
-            </a:br>
-            <a:r>
-              <a:rPr sz="3600" b="1" dirty="0">
+            <a:br/>
+            <a:r>
+              <a:rPr sz="3600" b="1">
                 <a:solidFill>
                   <a:srgbClr val="1F1F1F"/>
                 </a:solidFill>
@@ -3160,8 +3157,8 @@
         </p:nvSpPr>
         <p:spPr>
           <a:xfrm>
-            <a:off x="4499333" y="4206240"/>
-            <a:ext cx="3162854" cy="800219"/>
+            <a:off x="457200" y="4206240"/>
+            <a:ext cx="11247120" cy="1097280"/>
           </a:xfrm>
           <a:prstGeom prst="rect">
             <a:avLst/>
@@ -3176,47 +3173,26 @@
           <a:p>
             <a:pPr algn="ctr"/>
             <a:r>
-              <a:rPr lang="en-US" altLang="zh-TW" sz="2400" dirty="0" err="1">
+              <a:rPr sz="2400">
                 <a:solidFill>
                   <a:srgbClr val="1F1F1F"/>
                 </a:solidFill>
                 <a:latin typeface="Times New Roman"/>
               </a:rPr>
-              <a:t>Simlens</a:t>
-            </a:r>
-            <a:endParaRPr lang="en-US" altLang="zh-TW" sz="2400" dirty="0">
-              <a:solidFill>
-                <a:srgbClr val="1F1F1F"/>
-              </a:solidFill>
-              <a:latin typeface="Times New Roman"/>
-            </a:endParaRPr>
+              <a:t>傅聖祐 (Sheng-You Fu)</a:t>
+            </a:r>
           </a:p>
           <a:p>
             <a:pPr algn="ctr"/>
             <a:r>
-              <a:rPr sz="2200" dirty="0">
+              <a:rPr sz="2200">
                 <a:solidFill>
                   <a:srgbClr val="1F1F1F"/>
                 </a:solidFill>
                 <a:latin typeface="Times New Roman"/>
               </a:rPr>
-              <a:t>Advisor: </a:t>
-            </a:r>
-            <a:r>
-              <a:rPr lang="en-US" sz="2200" dirty="0">
-                <a:solidFill>
-                  <a:srgbClr val="1F1F1F"/>
-                </a:solidFill>
-                <a:latin typeface="Times New Roman"/>
-              </a:rPr>
-              <a:t>Chen, Yen-Liang</a:t>
-            </a:r>
-            <a:endParaRPr sz="2200" dirty="0">
-              <a:solidFill>
-                <a:srgbClr val="1F1F1F"/>
-              </a:solidFill>
-              <a:latin typeface="Times New Roman"/>
-            </a:endParaRPr>
+              <a:t>Advisor: Prof. Chia-Yu Lin</a:t>
+            </a:r>
           </a:p>
         </p:txBody>
       </p:sp>
@@ -3262,7 +3238,7 @@
         <p:spPr>
           <a:xfrm>
             <a:off x="3200400" y="6446520"/>
-            <a:ext cx="6400800" cy="369332"/>
+            <a:ext cx="6400800" cy="457200"/>
           </a:xfrm>
           <a:prstGeom prst="rect">
             <a:avLst/>
@@ -3277,18 +3253,18 @@
           <a:p>
             <a:pPr algn="ctr"/>
             <a:r>
-              <a:rPr lang="en-US" altLang="zh-TW" sz="900" dirty="0">
+              <a:rPr sz="900">
                 <a:solidFill>
                   <a:srgbClr val="808080"/>
                 </a:solidFill>
               </a:rPr>
-              <a:t>Department of Information Management</a:t>
+              <a:t>Security and Artificial Intelligence Laboratory  (SAILY) Lab,</a:t>
             </a:r>
           </a:p>
           <a:p>
             <a:pPr algn="ctr"/>
             <a:r>
-              <a:rPr sz="900" dirty="0">
+              <a:rPr sz="900">
                 <a:solidFill>
                   <a:srgbClr val="808080"/>
                 </a:solidFill>
@@ -3341,7 +3317,7 @@
 </file>
 
 <file path=ppt/slides/slide10.xml><?xml version="1.0" encoding="utf-8"?>
-<p:sld xmlns:a="http://schemas.openxmlformats.org/drawingml/2006/main" xmlns:r="http://schemas.openxmlformats.org/officeDocument/2006/relationships" xmlns:p="http://schemas.openxmlformats.org/presentationml/2006/main">
+<p:sld xmlns:a="http://schemas.openxmlformats.org/drawingml/2006/main" xmlns:p="http://schemas.openxmlformats.org/presentationml/2006/main" xmlns:r="http://schemas.openxmlformats.org/officeDocument/2006/relationships">
   <p:cSld>
     <p:spTree>
       <p:nvGrpSpPr>
@@ -3349,14 +3325,182 @@
         <p:cNvGrpSpPr/>
         <p:nvPr/>
       </p:nvGrpSpPr>
-      <p:grpSpPr>
-        <a:xfrm>
-          <a:off x="0" y="0"/>
-          <a:ext cx="0" cy="0"/>
-          <a:chOff x="0" y="0"/>
-          <a:chExt cx="0" cy="0"/>
-        </a:xfrm>
-      </p:grpSpPr>
+      <p:grpSpPr/>
+      <p:sp>
+        <p:nvSpPr>
+          <p:cNvPr id="2" name="TextBox 1"/>
+          <p:cNvSpPr txBox="1"/>
+          <p:nvPr/>
+        </p:nvSpPr>
+        <p:spPr>
+          <a:xfrm>
+            <a:off x="457200" y="2560320"/>
+            <a:ext cx="11247120" cy="1828800"/>
+          </a:xfrm>
+          <a:prstGeom prst="rect">
+            <a:avLst/>
+          </a:prstGeom>
+          <a:noFill/>
+        </p:spPr>
+        <p:txBody>
+          <a:bodyPr wrap="square">
+            <a:spAutoFit/>
+          </a:bodyPr>
+          <a:lstStyle/>
+          <a:p>
+            <a:pPr algn="ctr"/>
+            <a:r>
+              <a:rPr sz="3200" b="1">
+                <a:solidFill>
+                  <a:srgbClr val="1F1F1F"/>
+                </a:solidFill>
+                <a:latin typeface="Times New Roman"/>
+              </a:rPr>
+              <a:t>SimLens: Distillation + RLAIH for</a:t>
+            </a:r>
+            <a:br/>
+            <a:r>
+              <a:rPr sz="3200" b="1">
+                <a:solidFill>
+                  <a:srgbClr val="1F1F1F"/>
+                </a:solidFill>
+                <a:latin typeface="Times New Roman"/>
+              </a:rPr>
+              <a:t>Segment-Level Persona Reaction Generation</a:t>
+            </a:r>
+          </a:p>
+        </p:txBody>
+      </p:sp>
+      <p:sp>
+        <p:nvSpPr>
+          <p:cNvPr id="3" name="TextBox 2"/>
+          <p:cNvSpPr txBox="1"/>
+          <p:nvPr/>
+        </p:nvSpPr>
+        <p:spPr>
+          <a:xfrm>
+            <a:off x="274320" y="6446520"/>
+            <a:ext cx="1828800" cy="365760"/>
+          </a:xfrm>
+          <a:prstGeom prst="rect">
+            <a:avLst/>
+          </a:prstGeom>
+          <a:noFill/>
+        </p:spPr>
+        <p:txBody>
+          <a:bodyPr wrap="none">
+            <a:spAutoFit/>
+          </a:bodyPr>
+          <a:lstStyle/>
+          <a:p>
+            <a:r>
+              <a:rPr sz="1000">
+                <a:solidFill>
+                  <a:srgbClr val="808080"/>
+                </a:solidFill>
+              </a:rPr>
+              <a:t>2026/4/27</a:t>
+            </a:r>
+          </a:p>
+        </p:txBody>
+      </p:sp>
+      <p:sp>
+        <p:nvSpPr>
+          <p:cNvPr id="4" name="TextBox 3"/>
+          <p:cNvSpPr txBox="1"/>
+          <p:nvPr/>
+        </p:nvSpPr>
+        <p:spPr>
+          <a:xfrm>
+            <a:off x="3200400" y="6446520"/>
+            <a:ext cx="6400800" cy="457200"/>
+          </a:xfrm>
+          <a:prstGeom prst="rect">
+            <a:avLst/>
+          </a:prstGeom>
+          <a:noFill/>
+        </p:spPr>
+        <p:txBody>
+          <a:bodyPr wrap="square">
+            <a:spAutoFit/>
+          </a:bodyPr>
+          <a:lstStyle/>
+          <a:p>
+            <a:pPr algn="ctr"/>
+            <a:r>
+              <a:rPr sz="900">
+                <a:solidFill>
+                  <a:srgbClr val="808080"/>
+                </a:solidFill>
+              </a:rPr>
+              <a:t>Security and Artificial Intelligence Laboratory  (SAILY) Lab,</a:t>
+            </a:r>
+          </a:p>
+          <a:p>
+            <a:pPr algn="ctr"/>
+            <a:r>
+              <a:rPr sz="900">
+                <a:solidFill>
+                  <a:srgbClr val="808080"/>
+                </a:solidFill>
+              </a:rPr>
+              <a:t>National Central University, Taoyuan, Taiwan</a:t>
+            </a:r>
+          </a:p>
+        </p:txBody>
+      </p:sp>
+      <p:sp>
+        <p:nvSpPr>
+          <p:cNvPr id="5" name="TextBox 4"/>
+          <p:cNvSpPr txBox="1"/>
+          <p:nvPr/>
+        </p:nvSpPr>
+        <p:spPr>
+          <a:xfrm>
+            <a:off x="11612880" y="6446520"/>
+            <a:ext cx="457200" cy="365760"/>
+          </a:xfrm>
+          <a:prstGeom prst="rect">
+            <a:avLst/>
+          </a:prstGeom>
+          <a:noFill/>
+        </p:spPr>
+        <p:txBody>
+          <a:bodyPr wrap="none">
+            <a:spAutoFit/>
+          </a:bodyPr>
+          <a:lstStyle/>
+          <a:p>
+            <a:pPr algn="r"/>
+            <a:r>
+              <a:rPr sz="1000">
+                <a:solidFill>
+                  <a:srgbClr val="808080"/>
+                </a:solidFill>
+              </a:rPr>
+              <a:t>10</a:t>
+            </a:r>
+          </a:p>
+        </p:txBody>
+      </p:sp>
+    </p:spTree>
+  </p:cSld>
+  <p:clrMapOvr>
+    <a:masterClrMapping/>
+  </p:clrMapOvr>
+</p:sld>
+</file>
+
+<file path=ppt/slides/slide11.xml><?xml version="1.0" encoding="utf-8"?>
+<p:sld xmlns:a="http://schemas.openxmlformats.org/drawingml/2006/main" xmlns:p="http://schemas.openxmlformats.org/presentationml/2006/main" xmlns:r="http://schemas.openxmlformats.org/officeDocument/2006/relationships">
+  <p:cSld>
+    <p:spTree>
+      <p:nvGrpSpPr>
+        <p:cNvPr id="1" name=""/>
+        <p:cNvGrpSpPr/>
+        <p:nvPr/>
+      </p:nvGrpSpPr>
+      <p:grpSpPr/>
       <p:sp>
         <p:nvSpPr>
           <p:cNvPr id="2" name="TextBox 1"/>
@@ -3431,7 +3575,6 @@
           <a:lstStyle/>
           <a:p>
             <a:pPr algn="ctr"/>
-            <a:endParaRPr/>
           </a:p>
         </p:txBody>
       </p:sp>
@@ -3473,7 +3616,7 @@
           </a:fontRef>
         </p:style>
         <p:txBody>
-          <a:bodyPr wrap="square" rtlCol="0" anchor="ctr"/>
+          <a:bodyPr rtlCol="0" anchor="ctr" wrap="square"/>
           <a:lstStyle/>
           <a:p>
             <a:pPr algn="ctr"/>
@@ -3579,6 +3722,51 @@
       </p:sp>
       <p:sp>
         <p:nvSpPr>
+          <p:cNvPr id="7" name="TextBox 6"/>
+          <p:cNvSpPr txBox="1"/>
+          <p:nvPr/>
+        </p:nvSpPr>
+        <p:spPr>
+          <a:xfrm>
+            <a:off x="3200400" y="6446520"/>
+            <a:ext cx="6400800" cy="457200"/>
+          </a:xfrm>
+          <a:prstGeom prst="rect">
+            <a:avLst/>
+          </a:prstGeom>
+          <a:noFill/>
+        </p:spPr>
+        <p:txBody>
+          <a:bodyPr wrap="square">
+            <a:spAutoFit/>
+          </a:bodyPr>
+          <a:lstStyle/>
+          <a:p>
+            <a:pPr algn="ctr"/>
+            <a:r>
+              <a:rPr sz="900">
+                <a:solidFill>
+                  <a:srgbClr val="808080"/>
+                </a:solidFill>
+              </a:rPr>
+              <a:t>Security and Artificial Intelligence Laboratory  (SAILY) Lab,</a:t>
+            </a:r>
+          </a:p>
+          <a:p>
+            <a:pPr algn="ctr"/>
+            <a:r>
+              <a:rPr sz="900">
+                <a:solidFill>
+                  <a:srgbClr val="808080"/>
+                </a:solidFill>
+              </a:rPr>
+              <a:t>National Central University, Taoyuan, Taiwan</a:t>
+            </a:r>
+          </a:p>
+        </p:txBody>
+      </p:sp>
+      <p:sp>
+        <p:nvSpPr>
           <p:cNvPr id="8" name="TextBox 7"/>
           <p:cNvSpPr txBox="1"/>
           <p:nvPr/>
@@ -3606,58 +3794,7 @@
                   <a:srgbClr val="808080"/>
                 </a:solidFill>
               </a:rPr>
-              <a:t>10</a:t>
-            </a:r>
-          </a:p>
-        </p:txBody>
-      </p:sp>
-      <p:sp>
-        <p:nvSpPr>
-          <p:cNvPr id="9" name="TextBox 5">
-            <a:extLst>
-              <a:ext uri="{FF2B5EF4-FFF2-40B4-BE49-F238E27FC236}">
-                <a16:creationId xmlns:a16="http://schemas.microsoft.com/office/drawing/2014/main" id="{AC802F11-3E2B-583C-8779-DACE0247B9D3}"/>
-              </a:ext>
-            </a:extLst>
-          </p:cNvPr>
-          <p:cNvSpPr txBox="1"/>
-          <p:nvPr/>
-        </p:nvSpPr>
-        <p:spPr>
-          <a:xfrm>
-            <a:off x="3200400" y="6446520"/>
-            <a:ext cx="6400800" cy="369332"/>
-          </a:xfrm>
-          <a:prstGeom prst="rect">
-            <a:avLst/>
-          </a:prstGeom>
-          <a:noFill/>
-        </p:spPr>
-        <p:txBody>
-          <a:bodyPr wrap="square">
-            <a:spAutoFit/>
-          </a:bodyPr>
-          <a:lstStyle/>
-          <a:p>
-            <a:pPr algn="ctr"/>
-            <a:r>
-              <a:rPr lang="en-US" altLang="zh-TW" sz="900" dirty="0">
-                <a:solidFill>
-                  <a:srgbClr val="808080"/>
-                </a:solidFill>
-              </a:rPr>
-              <a:t>Department of Information Management,</a:t>
-            </a:r>
-          </a:p>
-          <a:p>
-            <a:pPr algn="ctr"/>
-            <a:r>
-              <a:rPr sz="900" dirty="0">
-                <a:solidFill>
-                  <a:srgbClr val="808080"/>
-                </a:solidFill>
-              </a:rPr>
-              <a:t>National Central University, Taoyuan, Taiwan</a:t>
+              <a:t>11</a:t>
             </a:r>
           </a:p>
         </p:txBody>
@@ -3670,8 +3807,8 @@
 </p:sld>
 </file>
 
-<file path=ppt/slides/slide11.xml><?xml version="1.0" encoding="utf-8"?>
-<p:sld xmlns:a="http://schemas.openxmlformats.org/drawingml/2006/main" xmlns:r="http://schemas.openxmlformats.org/officeDocument/2006/relationships" xmlns:p="http://schemas.openxmlformats.org/presentationml/2006/main">
+<file path=ppt/slides/slide12.xml><?xml version="1.0" encoding="utf-8"?>
+<p:sld xmlns:a="http://schemas.openxmlformats.org/drawingml/2006/main" xmlns:p="http://schemas.openxmlformats.org/presentationml/2006/main" xmlns:r="http://schemas.openxmlformats.org/officeDocument/2006/relationships">
   <p:cSld>
     <p:spTree>
       <p:nvGrpSpPr>
@@ -3679,14 +3816,7 @@
         <p:cNvGrpSpPr/>
         <p:nvPr/>
       </p:nvGrpSpPr>
-      <p:grpSpPr>
-        <a:xfrm>
-          <a:off x="0" y="0"/>
-          <a:ext cx="0" cy="0"/>
-          <a:chOff x="0" y="0"/>
-          <a:chExt cx="0" cy="0"/>
-        </a:xfrm>
-      </p:grpSpPr>
+      <p:grpSpPr/>
       <p:sp>
         <p:nvSpPr>
           <p:cNvPr id="2" name="TextBox 1"/>
@@ -3761,7 +3891,6 @@
           <a:lstStyle/>
           <a:p>
             <a:pPr algn="ctr"/>
-            <a:endParaRPr/>
           </a:p>
         </p:txBody>
       </p:sp>
@@ -3773,7 +3902,7 @@
         </p:nvSpPr>
         <p:spPr>
           <a:xfrm>
-            <a:off x="548640" y="1097280"/>
+            <a:off x="548640" y="1005840"/>
             <a:ext cx="10972800" cy="4937760"/>
           </a:xfrm>
           <a:prstGeom prst="rect">
@@ -3793,7 +3922,7 @@
               </a:spcAft>
             </a:pPr>
             <a:r>
-              <a:rPr sz="1600">
+              <a:rPr sz="1500">
                 <a:solidFill>
                   <a:srgbClr val="1F1F1F"/>
                 </a:solidFill>
@@ -3809,7 +3938,7 @@
               </a:spcAft>
             </a:pPr>
             <a:r>
-              <a:rPr sz="1600">
+              <a:rPr sz="1500">
                 <a:solidFill>
                   <a:srgbClr val="1F1F1F"/>
                 </a:solidFill>
@@ -3825,7 +3954,7 @@
               </a:spcAft>
             </a:pPr>
             <a:r>
-              <a:rPr sz="1600">
+              <a:rPr sz="1500">
                 <a:solidFill>
                   <a:srgbClr val="1F1F1F"/>
                 </a:solidFill>
@@ -3841,7 +3970,7 @@
               </a:spcAft>
             </a:pPr>
             <a:r>
-              <a:rPr sz="1400">
+              <a:rPr sz="1200">
                 <a:solidFill>
                   <a:srgbClr val="404040"/>
                 </a:solidFill>
@@ -3857,7 +3986,7 @@
               </a:spcAft>
             </a:pPr>
             <a:r>
-              <a:rPr sz="1400">
+              <a:rPr sz="1200">
                 <a:solidFill>
                   <a:srgbClr val="404040"/>
                 </a:solidFill>
@@ -3873,7 +4002,7 @@
               </a:spcAft>
             </a:pPr>
             <a:r>
-              <a:rPr sz="1400">
+              <a:rPr sz="1200">
                 <a:solidFill>
                   <a:srgbClr val="404040"/>
                 </a:solidFill>
@@ -3889,7 +4018,7 @@
               </a:spcAft>
             </a:pPr>
             <a:r>
-              <a:rPr sz="1400">
+              <a:rPr sz="1200">
                 <a:solidFill>
                   <a:srgbClr val="404040"/>
                 </a:solidFill>
@@ -3905,13 +4034,45 @@
               </a:spcAft>
             </a:pPr>
             <a:r>
-              <a:rPr sz="1600">
+              <a:rPr sz="1500">
                 <a:solidFill>
                   <a:srgbClr val="1F1F1F"/>
                 </a:solidFill>
                 <a:latin typeface="Times New Roman"/>
               </a:rPr>
-              <a:t>• SFT training: 8 independent LoRA adapters (rank=8) on 4-bit GPTQ Llama-3.2-3B-Instruct.</a:t>
+              <a:t>• SFT training: 8 independent LoRA adapters (rank=8) on a shared 4-bit GPTQ Llama-3.2-3B base — one adapter per persona.</a:t>
+            </a:r>
+          </a:p>
+          <a:p>
+            <a:pPr lvl="1">
+              <a:spcAft>
+                <a:spcPts val="600"/>
+              </a:spcAft>
+            </a:pPr>
+            <a:r>
+              <a:rPr sz="1200">
+                <a:solidFill>
+                  <a:srgbClr val="C00000"/>
+                </a:solidFill>
+                <a:latin typeface="Times New Roman"/>
+              </a:rPr>
+              <a:t>– Why per-persona LoRA (not single LoRA + persona prompt)?  Hard separation prevents persona leakage; each adapter specializes on one viewer's distribution.</a:t>
+            </a:r>
+          </a:p>
+          <a:p>
+            <a:pPr lvl="1">
+              <a:spcAft>
+                <a:spcPts val="600"/>
+              </a:spcAft>
+            </a:pPr>
+            <a:r>
+              <a:rPr sz="1200">
+                <a:solidFill>
+                  <a:srgbClr val="404040"/>
+                </a:solidFill>
+                <a:latin typeface="Times New Roman"/>
+              </a:rPr>
+              <a:t>– Each adapter ~25 MB; 8 adapters total ~200 MB. Swapped at inference time on the same frozen base.</a:t>
             </a:r>
           </a:p>
           <a:p>
@@ -3921,7 +4082,7 @@
               </a:spcAft>
             </a:pPr>
             <a:r>
-              <a:rPr sz="1600">
+              <a:rPr sz="1500">
                 <a:solidFill>
                   <a:srgbClr val="1F1F1F"/>
                 </a:solidFill>
@@ -3967,6 +4128,51 @@
       </p:sp>
       <p:sp>
         <p:nvSpPr>
+          <p:cNvPr id="6" name="TextBox 5"/>
+          <p:cNvSpPr txBox="1"/>
+          <p:nvPr/>
+        </p:nvSpPr>
+        <p:spPr>
+          <a:xfrm>
+            <a:off x="3200400" y="6446520"/>
+            <a:ext cx="6400800" cy="457200"/>
+          </a:xfrm>
+          <a:prstGeom prst="rect">
+            <a:avLst/>
+          </a:prstGeom>
+          <a:noFill/>
+        </p:spPr>
+        <p:txBody>
+          <a:bodyPr wrap="square">
+            <a:spAutoFit/>
+          </a:bodyPr>
+          <a:lstStyle/>
+          <a:p>
+            <a:pPr algn="ctr"/>
+            <a:r>
+              <a:rPr sz="900">
+                <a:solidFill>
+                  <a:srgbClr val="808080"/>
+                </a:solidFill>
+              </a:rPr>
+              <a:t>Security and Artificial Intelligence Laboratory  (SAILY) Lab,</a:t>
+            </a:r>
+          </a:p>
+          <a:p>
+            <a:pPr algn="ctr"/>
+            <a:r>
+              <a:rPr sz="900">
+                <a:solidFill>
+                  <a:srgbClr val="808080"/>
+                </a:solidFill>
+              </a:rPr>
+              <a:t>National Central University, Taoyuan, Taiwan</a:t>
+            </a:r>
+          </a:p>
+        </p:txBody>
+      </p:sp>
+      <p:sp>
+        <p:nvSpPr>
           <p:cNvPr id="7" name="TextBox 6"/>
           <p:cNvSpPr txBox="1"/>
           <p:nvPr/>
@@ -3994,58 +4200,7 @@
                   <a:srgbClr val="808080"/>
                 </a:solidFill>
               </a:rPr>
-              <a:t>11</a:t>
-            </a:r>
-          </a:p>
-        </p:txBody>
-      </p:sp>
-      <p:sp>
-        <p:nvSpPr>
-          <p:cNvPr id="8" name="TextBox 5">
-            <a:extLst>
-              <a:ext uri="{FF2B5EF4-FFF2-40B4-BE49-F238E27FC236}">
-                <a16:creationId xmlns:a16="http://schemas.microsoft.com/office/drawing/2014/main" id="{A7724214-7697-3C88-5DAE-6B096DEA6B46}"/>
-              </a:ext>
-            </a:extLst>
-          </p:cNvPr>
-          <p:cNvSpPr txBox="1"/>
-          <p:nvPr/>
-        </p:nvSpPr>
-        <p:spPr>
-          <a:xfrm>
-            <a:off x="3200400" y="6446520"/>
-            <a:ext cx="6400800" cy="369332"/>
-          </a:xfrm>
-          <a:prstGeom prst="rect">
-            <a:avLst/>
-          </a:prstGeom>
-          <a:noFill/>
-        </p:spPr>
-        <p:txBody>
-          <a:bodyPr wrap="square">
-            <a:spAutoFit/>
-          </a:bodyPr>
-          <a:lstStyle/>
-          <a:p>
-            <a:pPr algn="ctr"/>
-            <a:r>
-              <a:rPr lang="en-US" altLang="zh-TW" sz="900" dirty="0">
-                <a:solidFill>
-                  <a:srgbClr val="808080"/>
-                </a:solidFill>
-              </a:rPr>
-              <a:t>Department of Information Management,</a:t>
-            </a:r>
-          </a:p>
-          <a:p>
-            <a:pPr algn="ctr"/>
-            <a:r>
-              <a:rPr sz="900" dirty="0">
-                <a:solidFill>
-                  <a:srgbClr val="808080"/>
-                </a:solidFill>
-              </a:rPr>
-              <a:t>National Central University, Taoyuan, Taiwan</a:t>
+              <a:t>12</a:t>
             </a:r>
           </a:p>
         </p:txBody>
@@ -4058,8 +4213,8 @@
 </p:sld>
 </file>
 
-<file path=ppt/slides/slide12.xml><?xml version="1.0" encoding="utf-8"?>
-<p:sld xmlns:a="http://schemas.openxmlformats.org/drawingml/2006/main" xmlns:r="http://schemas.openxmlformats.org/officeDocument/2006/relationships" xmlns:p="http://schemas.openxmlformats.org/presentationml/2006/main">
+<file path=ppt/slides/slide13.xml><?xml version="1.0" encoding="utf-8"?>
+<p:sld xmlns:a="http://schemas.openxmlformats.org/drawingml/2006/main" xmlns:p="http://schemas.openxmlformats.org/presentationml/2006/main" xmlns:r="http://schemas.openxmlformats.org/officeDocument/2006/relationships">
   <p:cSld>
     <p:spTree>
       <p:nvGrpSpPr>
@@ -4067,14 +4222,7 @@
         <p:cNvGrpSpPr/>
         <p:nvPr/>
       </p:nvGrpSpPr>
-      <p:grpSpPr>
-        <a:xfrm>
-          <a:off x="0" y="0"/>
-          <a:ext cx="0" cy="0"/>
-          <a:chOff x="0" y="0"/>
-          <a:chExt cx="0" cy="0"/>
-        </a:xfrm>
-      </p:grpSpPr>
+      <p:grpSpPr/>
       <p:sp>
         <p:nvSpPr>
           <p:cNvPr id="2" name="TextBox 1"/>
@@ -4149,7 +4297,6 @@
           <a:lstStyle/>
           <a:p>
             <a:pPr algn="ctr"/>
-            <a:endParaRPr/>
           </a:p>
         </p:txBody>
       </p:sp>
@@ -4161,7 +4308,7 @@
         </p:nvSpPr>
         <p:spPr>
           <a:xfrm>
-            <a:off x="548640" y="1097280"/>
+            <a:off x="548640" y="1005840"/>
             <a:ext cx="10972800" cy="4937760"/>
           </a:xfrm>
           <a:prstGeom prst="rect">
@@ -4181,7 +4328,7 @@
               </a:spcAft>
             </a:pPr>
             <a:r>
-              <a:rPr sz="1500">
+              <a:rPr sz="1400">
                 <a:solidFill>
                   <a:srgbClr val="1F1F1F"/>
                 </a:solidFill>
@@ -4197,13 +4344,13 @@
               </a:spcAft>
             </a:pPr>
             <a:r>
-              <a:rPr sz="1500">
+              <a:rPr sz="1400">
                 <a:solidFill>
                   <a:srgbClr val="1F1F1F"/>
                 </a:solidFill>
                 <a:latin typeface="Times New Roman"/>
               </a:rPr>
-              <a:t>• Pipeline (per LoRA, iterated 2 rounds):</a:t>
+              <a:t>• Pipeline (per LoRA, iterated 2 rounds — following Self-Rewarding LM [Yuan et al., 2024]):</a:t>
             </a:r>
           </a:p>
           <a:p>
@@ -4213,7 +4360,7 @@
               </a:spcAft>
             </a:pPr>
             <a:r>
-              <a:rPr sz="1300">
+              <a:rPr sz="1200">
                 <a:solidFill>
                   <a:srgbClr val="404040"/>
                 </a:solidFill>
@@ -4229,7 +4376,7 @@
               </a:spcAft>
             </a:pPr>
             <a:r>
-              <a:rPr sz="1300">
+              <a:rPr sz="1200">
                 <a:solidFill>
                   <a:srgbClr val="404040"/>
                 </a:solidFill>
@@ -4245,7 +4392,7 @@
               </a:spcAft>
             </a:pPr>
             <a:r>
-              <a:rPr sz="1500">
+              <a:rPr sz="1400">
                 <a:solidFill>
                   <a:srgbClr val="1F1F1F"/>
                 </a:solidFill>
@@ -4261,7 +4408,7 @@
               </a:spcAft>
             </a:pPr>
             <a:r>
-              <a:rPr sz="1300">
+              <a:rPr sz="1200">
                 <a:solidFill>
                   <a:srgbClr val="404040"/>
                 </a:solidFill>
@@ -4277,7 +4424,7 @@
               </a:spcAft>
             </a:pPr>
             <a:r>
-              <a:rPr sz="1300">
+              <a:rPr sz="1200">
                 <a:solidFill>
                   <a:srgbClr val="404040"/>
                 </a:solidFill>
@@ -4293,7 +4440,7 @@
               </a:spcAft>
             </a:pPr>
             <a:r>
-              <a:rPr sz="1300">
+              <a:rPr sz="1200">
                 <a:solidFill>
                   <a:srgbClr val="404040"/>
                 </a:solidFill>
@@ -4309,7 +4456,7 @@
               </a:spcAft>
             </a:pPr>
             <a:r>
-              <a:rPr sz="1300">
+              <a:rPr sz="1200">
                 <a:solidFill>
                   <a:srgbClr val="404040"/>
                 </a:solidFill>
@@ -4325,7 +4472,7 @@
               </a:spcAft>
             </a:pPr>
             <a:r>
-              <a:rPr sz="1300">
+              <a:rPr sz="1200">
                 <a:solidFill>
                   <a:srgbClr val="404040"/>
                 </a:solidFill>
@@ -4341,7 +4488,7 @@
               </a:spcAft>
             </a:pPr>
             <a:r>
-              <a:rPr sz="1300">
+              <a:rPr sz="1200">
                 <a:solidFill>
                   <a:srgbClr val="404040"/>
                 </a:solidFill>
@@ -4357,7 +4504,7 @@
               </a:spcAft>
             </a:pPr>
             <a:r>
-              <a:rPr sz="1500">
+              <a:rPr sz="1400">
                 <a:solidFill>
                   <a:srgbClr val="1F1F1F"/>
                 </a:solidFill>
@@ -4403,6 +4550,51 @@
       </p:sp>
       <p:sp>
         <p:nvSpPr>
+          <p:cNvPr id="6" name="TextBox 5"/>
+          <p:cNvSpPr txBox="1"/>
+          <p:nvPr/>
+        </p:nvSpPr>
+        <p:spPr>
+          <a:xfrm>
+            <a:off x="3200400" y="6446520"/>
+            <a:ext cx="6400800" cy="457200"/>
+          </a:xfrm>
+          <a:prstGeom prst="rect">
+            <a:avLst/>
+          </a:prstGeom>
+          <a:noFill/>
+        </p:spPr>
+        <p:txBody>
+          <a:bodyPr wrap="square">
+            <a:spAutoFit/>
+          </a:bodyPr>
+          <a:lstStyle/>
+          <a:p>
+            <a:pPr algn="ctr"/>
+            <a:r>
+              <a:rPr sz="900">
+                <a:solidFill>
+                  <a:srgbClr val="808080"/>
+                </a:solidFill>
+              </a:rPr>
+              <a:t>Security and Artificial Intelligence Laboratory  (SAILY) Lab,</a:t>
+            </a:r>
+          </a:p>
+          <a:p>
+            <a:pPr algn="ctr"/>
+            <a:r>
+              <a:rPr sz="900">
+                <a:solidFill>
+                  <a:srgbClr val="808080"/>
+                </a:solidFill>
+              </a:rPr>
+              <a:t>National Central University, Taoyuan, Taiwan</a:t>
+            </a:r>
+          </a:p>
+        </p:txBody>
+      </p:sp>
+      <p:sp>
+        <p:nvSpPr>
           <p:cNvPr id="7" name="TextBox 6"/>
           <p:cNvSpPr txBox="1"/>
           <p:nvPr/>
@@ -4430,58 +4622,7 @@
                   <a:srgbClr val="808080"/>
                 </a:solidFill>
               </a:rPr>
-              <a:t>12</a:t>
-            </a:r>
-          </a:p>
-        </p:txBody>
-      </p:sp>
-      <p:sp>
-        <p:nvSpPr>
-          <p:cNvPr id="8" name="TextBox 5">
-            <a:extLst>
-              <a:ext uri="{FF2B5EF4-FFF2-40B4-BE49-F238E27FC236}">
-                <a16:creationId xmlns:a16="http://schemas.microsoft.com/office/drawing/2014/main" id="{63A208C7-BB16-0012-1C2E-C34FB52CEB27}"/>
-              </a:ext>
-            </a:extLst>
-          </p:cNvPr>
-          <p:cNvSpPr txBox="1"/>
-          <p:nvPr/>
-        </p:nvSpPr>
-        <p:spPr>
-          <a:xfrm>
-            <a:off x="3200400" y="6446520"/>
-            <a:ext cx="6400800" cy="369332"/>
-          </a:xfrm>
-          <a:prstGeom prst="rect">
-            <a:avLst/>
-          </a:prstGeom>
-          <a:noFill/>
-        </p:spPr>
-        <p:txBody>
-          <a:bodyPr wrap="square">
-            <a:spAutoFit/>
-          </a:bodyPr>
-          <a:lstStyle/>
-          <a:p>
-            <a:pPr algn="ctr"/>
-            <a:r>
-              <a:rPr lang="en-US" altLang="zh-TW" sz="900" dirty="0">
-                <a:solidFill>
-                  <a:srgbClr val="808080"/>
-                </a:solidFill>
-              </a:rPr>
-              <a:t>Department of Information Management,</a:t>
-            </a:r>
-          </a:p>
-          <a:p>
-            <a:pPr algn="ctr"/>
-            <a:r>
-              <a:rPr sz="900" dirty="0">
-                <a:solidFill>
-                  <a:srgbClr val="808080"/>
-                </a:solidFill>
-              </a:rPr>
-              <a:t>National Central University, Taoyuan, Taiwan</a:t>
+              <a:t>13</a:t>
             </a:r>
           </a:p>
         </p:txBody>
@@ -4494,8 +4635,8 @@
 </p:sld>
 </file>
 
-<file path=ppt/slides/slide13.xml><?xml version="1.0" encoding="utf-8"?>
-<p:sld xmlns:a="http://schemas.openxmlformats.org/drawingml/2006/main" xmlns:r="http://schemas.openxmlformats.org/officeDocument/2006/relationships" xmlns:p="http://schemas.openxmlformats.org/presentationml/2006/main">
+<file path=ppt/slides/slide14.xml><?xml version="1.0" encoding="utf-8"?>
+<p:sld xmlns:a="http://schemas.openxmlformats.org/drawingml/2006/main" xmlns:p="http://schemas.openxmlformats.org/presentationml/2006/main" xmlns:r="http://schemas.openxmlformats.org/officeDocument/2006/relationships">
   <p:cSld>
     <p:spTree>
       <p:nvGrpSpPr>
@@ -4503,14 +4644,7 @@
         <p:cNvGrpSpPr/>
         <p:nvPr/>
       </p:nvGrpSpPr>
-      <p:grpSpPr>
-        <a:xfrm>
-          <a:off x="0" y="0"/>
-          <a:ext cx="0" cy="0"/>
-          <a:chOff x="0" y="0"/>
-          <a:chExt cx="0" cy="0"/>
-        </a:xfrm>
-      </p:grpSpPr>
+      <p:grpSpPr/>
       <p:sp>
         <p:nvSpPr>
           <p:cNvPr id="2" name="TextBox 1"/>
@@ -4585,7 +4719,6 @@
           <a:lstStyle/>
           <a:p>
             <a:pPr algn="ctr"/>
-            <a:endParaRPr/>
           </a:p>
         </p:txBody>
       </p:sp>
@@ -4823,6 +4956,51 @@
       </p:sp>
       <p:sp>
         <p:nvSpPr>
+          <p:cNvPr id="6" name="TextBox 5"/>
+          <p:cNvSpPr txBox="1"/>
+          <p:nvPr/>
+        </p:nvSpPr>
+        <p:spPr>
+          <a:xfrm>
+            <a:off x="3200400" y="6446520"/>
+            <a:ext cx="6400800" cy="457200"/>
+          </a:xfrm>
+          <a:prstGeom prst="rect">
+            <a:avLst/>
+          </a:prstGeom>
+          <a:noFill/>
+        </p:spPr>
+        <p:txBody>
+          <a:bodyPr wrap="square">
+            <a:spAutoFit/>
+          </a:bodyPr>
+          <a:lstStyle/>
+          <a:p>
+            <a:pPr algn="ctr"/>
+            <a:r>
+              <a:rPr sz="900">
+                <a:solidFill>
+                  <a:srgbClr val="808080"/>
+                </a:solidFill>
+              </a:rPr>
+              <a:t>Security and Artificial Intelligence Laboratory  (SAILY) Lab,</a:t>
+            </a:r>
+          </a:p>
+          <a:p>
+            <a:pPr algn="ctr"/>
+            <a:r>
+              <a:rPr sz="900">
+                <a:solidFill>
+                  <a:srgbClr val="808080"/>
+                </a:solidFill>
+              </a:rPr>
+              <a:t>National Central University, Taoyuan, Taiwan</a:t>
+            </a:r>
+          </a:p>
+        </p:txBody>
+      </p:sp>
+      <p:sp>
+        <p:nvSpPr>
           <p:cNvPr id="7" name="TextBox 6"/>
           <p:cNvSpPr txBox="1"/>
           <p:nvPr/>
@@ -4850,58 +5028,7 @@
                   <a:srgbClr val="808080"/>
                 </a:solidFill>
               </a:rPr>
-              <a:t>13</a:t>
-            </a:r>
-          </a:p>
-        </p:txBody>
-      </p:sp>
-      <p:sp>
-        <p:nvSpPr>
-          <p:cNvPr id="8" name="TextBox 5">
-            <a:extLst>
-              <a:ext uri="{FF2B5EF4-FFF2-40B4-BE49-F238E27FC236}">
-                <a16:creationId xmlns:a16="http://schemas.microsoft.com/office/drawing/2014/main" id="{7A7D2193-0B00-D1FF-63D5-A31ED79AA4F4}"/>
-              </a:ext>
-            </a:extLst>
-          </p:cNvPr>
-          <p:cNvSpPr txBox="1"/>
-          <p:nvPr/>
-        </p:nvSpPr>
-        <p:spPr>
-          <a:xfrm>
-            <a:off x="3200400" y="6446520"/>
-            <a:ext cx="6400800" cy="369332"/>
-          </a:xfrm>
-          <a:prstGeom prst="rect">
-            <a:avLst/>
-          </a:prstGeom>
-          <a:noFill/>
-        </p:spPr>
-        <p:txBody>
-          <a:bodyPr wrap="square">
-            <a:spAutoFit/>
-          </a:bodyPr>
-          <a:lstStyle/>
-          <a:p>
-            <a:pPr algn="ctr"/>
-            <a:r>
-              <a:rPr lang="en-US" altLang="zh-TW" sz="900" dirty="0">
-                <a:solidFill>
-                  <a:srgbClr val="808080"/>
-                </a:solidFill>
-              </a:rPr>
-              <a:t>Department of Information Management,</a:t>
-            </a:r>
-          </a:p>
-          <a:p>
-            <a:pPr algn="ctr"/>
-            <a:r>
-              <a:rPr sz="900" dirty="0">
-                <a:solidFill>
-                  <a:srgbClr val="808080"/>
-                </a:solidFill>
-              </a:rPr>
-              <a:t>National Central University, Taoyuan, Taiwan</a:t>
+              <a:t>14</a:t>
             </a:r>
           </a:p>
         </p:txBody>
@@ -4914,8 +5041,8 @@
 </p:sld>
 </file>
 
-<file path=ppt/slides/slide14.xml><?xml version="1.0" encoding="utf-8"?>
-<p:sld xmlns:a="http://schemas.openxmlformats.org/drawingml/2006/main" xmlns:r="http://schemas.openxmlformats.org/officeDocument/2006/relationships" xmlns:p="http://schemas.openxmlformats.org/presentationml/2006/main">
+<file path=ppt/slides/slide15.xml><?xml version="1.0" encoding="utf-8"?>
+<p:sld xmlns:a="http://schemas.openxmlformats.org/drawingml/2006/main" xmlns:p="http://schemas.openxmlformats.org/presentationml/2006/main" xmlns:r="http://schemas.openxmlformats.org/officeDocument/2006/relationships">
   <p:cSld>
     <p:spTree>
       <p:nvGrpSpPr>
@@ -4923,14 +5050,7 @@
         <p:cNvGrpSpPr/>
         <p:nvPr/>
       </p:nvGrpSpPr>
-      <p:grpSpPr>
-        <a:xfrm>
-          <a:off x="0" y="0"/>
-          <a:ext cx="0" cy="0"/>
-          <a:chOff x="0" y="0"/>
-          <a:chExt cx="0" cy="0"/>
-        </a:xfrm>
-      </p:grpSpPr>
+      <p:grpSpPr/>
       <p:sp>
         <p:nvSpPr>
           <p:cNvPr id="2" name="TextBox 1"/>
@@ -5005,7 +5125,6 @@
           <a:lstStyle/>
           <a:p>
             <a:pPr algn="ctr"/>
-            <a:endParaRPr/>
           </a:p>
         </p:txBody>
       </p:sp>
@@ -5062,41 +5181,11 @@
                 <a:tableStyleId>{5C22544A-7EE6-4342-B048-85BDC9FD1C3A}</a:tableStyleId>
               </a:tblPr>
               <a:tblGrid>
-                <a:gridCol w="2468880">
-                  <a:extLst>
-                    <a:ext uri="{9D8B030D-6E8A-4147-A177-3AD203B41FA5}">
-                      <a16:colId xmlns:a16="http://schemas.microsoft.com/office/drawing/2014/main" val="20000"/>
-                    </a:ext>
-                  </a:extLst>
-                </a:gridCol>
-                <a:gridCol w="1371600">
-                  <a:extLst>
-                    <a:ext uri="{9D8B030D-6E8A-4147-A177-3AD203B41FA5}">
-                      <a16:colId xmlns:a16="http://schemas.microsoft.com/office/drawing/2014/main" val="20001"/>
-                    </a:ext>
-                  </a:extLst>
-                </a:gridCol>
-                <a:gridCol w="1280160">
-                  <a:extLst>
-                    <a:ext uri="{9D8B030D-6E8A-4147-A177-3AD203B41FA5}">
-                      <a16:colId xmlns:a16="http://schemas.microsoft.com/office/drawing/2014/main" val="20002"/>
-                    </a:ext>
-                  </a:extLst>
-                </a:gridCol>
-                <a:gridCol w="1371600">
-                  <a:extLst>
-                    <a:ext uri="{9D8B030D-6E8A-4147-A177-3AD203B41FA5}">
-                      <a16:colId xmlns:a16="http://schemas.microsoft.com/office/drawing/2014/main" val="20003"/>
-                    </a:ext>
-                  </a:extLst>
-                </a:gridCol>
-                <a:gridCol w="1280160">
-                  <a:extLst>
-                    <a:ext uri="{9D8B030D-6E8A-4147-A177-3AD203B41FA5}">
-                      <a16:colId xmlns:a16="http://schemas.microsoft.com/office/drawing/2014/main" val="20004"/>
-                    </a:ext>
-                  </a:extLst>
-                </a:gridCol>
+                <a:gridCol w="2468880"/>
+                <a:gridCol w="1371600"/>
+                <a:gridCol w="1280160"/>
+                <a:gridCol w="1371600"/>
+                <a:gridCol w="1280160"/>
               </a:tblGrid>
               <a:tr h="457200">
                 <a:tc>
@@ -5214,11 +5303,6 @@
                     </a:solidFill>
                   </a:tcPr>
                 </a:tc>
-                <a:extLst>
-                  <a:ext uri="{0D108BD9-81ED-4DB2-BD59-A6C34878D82A}">
-                    <a16:rowId xmlns:a16="http://schemas.microsoft.com/office/drawing/2014/main" val="10000"/>
-                  </a:ext>
-                </a:extLst>
               </a:tr>
               <a:tr h="457200">
                 <a:tc>
@@ -5321,11 +5405,6 @@
                     </a:solidFill>
                   </a:tcPr>
                 </a:tc>
-                <a:extLst>
-                  <a:ext uri="{0D108BD9-81ED-4DB2-BD59-A6C34878D82A}">
-                    <a16:rowId xmlns:a16="http://schemas.microsoft.com/office/drawing/2014/main" val="10001"/>
-                  </a:ext>
-                </a:extLst>
               </a:tr>
               <a:tr h="457200">
                 <a:tc>
@@ -5428,11 +5507,6 @@
                     </a:solidFill>
                   </a:tcPr>
                 </a:tc>
-                <a:extLst>
-                  <a:ext uri="{0D108BD9-81ED-4DB2-BD59-A6C34878D82A}">
-                    <a16:rowId xmlns:a16="http://schemas.microsoft.com/office/drawing/2014/main" val="10002"/>
-                  </a:ext>
-                </a:extLst>
               </a:tr>
               <a:tr h="457200">
                 <a:tc>
@@ -5535,11 +5609,6 @@
                     </a:solidFill>
                   </a:tcPr>
                 </a:tc>
-                <a:extLst>
-                  <a:ext uri="{0D108BD9-81ED-4DB2-BD59-A6C34878D82A}">
-                    <a16:rowId xmlns:a16="http://schemas.microsoft.com/office/drawing/2014/main" val="10003"/>
-                  </a:ext>
-                </a:extLst>
               </a:tr>
               <a:tr h="457200">
                 <a:tc>
@@ -5642,11 +5711,6 @@
                     </a:solidFill>
                   </a:tcPr>
                 </a:tc>
-                <a:extLst>
-                  <a:ext uri="{0D108BD9-81ED-4DB2-BD59-A6C34878D82A}">
-                    <a16:rowId xmlns:a16="http://schemas.microsoft.com/office/drawing/2014/main" val="10004"/>
-                  </a:ext>
-                </a:extLst>
               </a:tr>
               <a:tr h="457200">
                 <a:tc>
@@ -5749,11 +5813,6 @@
                     </a:solidFill>
                   </a:tcPr>
                 </a:tc>
-                <a:extLst>
-                  <a:ext uri="{0D108BD9-81ED-4DB2-BD59-A6C34878D82A}">
-                    <a16:rowId xmlns:a16="http://schemas.microsoft.com/office/drawing/2014/main" val="10005"/>
-                  </a:ext>
-                </a:extLst>
               </a:tr>
             </a:tbl>
           </a:graphicData>
@@ -6022,6 +6081,51 @@
       </p:sp>
       <p:sp>
         <p:nvSpPr>
+          <p:cNvPr id="9" name="TextBox 8"/>
+          <p:cNvSpPr txBox="1"/>
+          <p:nvPr/>
+        </p:nvSpPr>
+        <p:spPr>
+          <a:xfrm>
+            <a:off x="3200400" y="6446520"/>
+            <a:ext cx="6400800" cy="457200"/>
+          </a:xfrm>
+          <a:prstGeom prst="rect">
+            <a:avLst/>
+          </a:prstGeom>
+          <a:noFill/>
+        </p:spPr>
+        <p:txBody>
+          <a:bodyPr wrap="square">
+            <a:spAutoFit/>
+          </a:bodyPr>
+          <a:lstStyle/>
+          <a:p>
+            <a:pPr algn="ctr"/>
+            <a:r>
+              <a:rPr sz="900">
+                <a:solidFill>
+                  <a:srgbClr val="808080"/>
+                </a:solidFill>
+              </a:rPr>
+              <a:t>Security and Artificial Intelligence Laboratory  (SAILY) Lab,</a:t>
+            </a:r>
+          </a:p>
+          <a:p>
+            <a:pPr algn="ctr"/>
+            <a:r>
+              <a:rPr sz="900">
+                <a:solidFill>
+                  <a:srgbClr val="808080"/>
+                </a:solidFill>
+              </a:rPr>
+              <a:t>National Central University, Taoyuan, Taiwan</a:t>
+            </a:r>
+          </a:p>
+        </p:txBody>
+      </p:sp>
+      <p:sp>
+        <p:nvSpPr>
           <p:cNvPr id="10" name="TextBox 9"/>
           <p:cNvSpPr txBox="1"/>
           <p:nvPr/>
@@ -6049,58 +6153,7 @@
                   <a:srgbClr val="808080"/>
                 </a:solidFill>
               </a:rPr>
-              <a:t>14</a:t>
-            </a:r>
-          </a:p>
-        </p:txBody>
-      </p:sp>
-      <p:sp>
-        <p:nvSpPr>
-          <p:cNvPr id="11" name="TextBox 5">
-            <a:extLst>
-              <a:ext uri="{FF2B5EF4-FFF2-40B4-BE49-F238E27FC236}">
-                <a16:creationId xmlns:a16="http://schemas.microsoft.com/office/drawing/2014/main" id="{79B86A09-A6BE-F800-EAF1-D86EDF22C218}"/>
-              </a:ext>
-            </a:extLst>
-          </p:cNvPr>
-          <p:cNvSpPr txBox="1"/>
-          <p:nvPr/>
-        </p:nvSpPr>
-        <p:spPr>
-          <a:xfrm>
-            <a:off x="3200400" y="6446520"/>
-            <a:ext cx="6400800" cy="369332"/>
-          </a:xfrm>
-          <a:prstGeom prst="rect">
-            <a:avLst/>
-          </a:prstGeom>
-          <a:noFill/>
-        </p:spPr>
-        <p:txBody>
-          <a:bodyPr wrap="square">
-            <a:spAutoFit/>
-          </a:bodyPr>
-          <a:lstStyle/>
-          <a:p>
-            <a:pPr algn="ctr"/>
-            <a:r>
-              <a:rPr lang="en-US" altLang="zh-TW" sz="900" dirty="0">
-                <a:solidFill>
-                  <a:srgbClr val="808080"/>
-                </a:solidFill>
-              </a:rPr>
-              <a:t>Department of Information Management,</a:t>
-            </a:r>
-          </a:p>
-          <a:p>
-            <a:pPr algn="ctr"/>
-            <a:r>
-              <a:rPr sz="900" dirty="0">
-                <a:solidFill>
-                  <a:srgbClr val="808080"/>
-                </a:solidFill>
-              </a:rPr>
-              <a:t>National Central University, Taoyuan, Taiwan</a:t>
+              <a:t>15</a:t>
             </a:r>
           </a:p>
         </p:txBody>
@@ -6113,8 +6166,8 @@
 </p:sld>
 </file>
 
-<file path=ppt/slides/slide15.xml><?xml version="1.0" encoding="utf-8"?>
-<p:sld xmlns:a="http://schemas.openxmlformats.org/drawingml/2006/main" xmlns:r="http://schemas.openxmlformats.org/officeDocument/2006/relationships" xmlns:p="http://schemas.openxmlformats.org/presentationml/2006/main">
+<file path=ppt/slides/slide16.xml><?xml version="1.0" encoding="utf-8"?>
+<p:sld xmlns:a="http://schemas.openxmlformats.org/drawingml/2006/main" xmlns:p="http://schemas.openxmlformats.org/presentationml/2006/main" xmlns:r="http://schemas.openxmlformats.org/officeDocument/2006/relationships">
   <p:cSld>
     <p:spTree>
       <p:nvGrpSpPr>
@@ -6122,14 +6175,7 @@
         <p:cNvGrpSpPr/>
         <p:nvPr/>
       </p:nvGrpSpPr>
-      <p:grpSpPr>
-        <a:xfrm>
-          <a:off x="0" y="0"/>
-          <a:ext cx="0" cy="0"/>
-          <a:chOff x="0" y="0"/>
-          <a:chExt cx="0" cy="0"/>
-        </a:xfrm>
-      </p:grpSpPr>
+      <p:grpSpPr/>
       <p:sp>
         <p:nvSpPr>
           <p:cNvPr id="2" name="TextBox 1"/>
@@ -6204,7 +6250,6 @@
           <a:lstStyle/>
           <a:p>
             <a:pPr algn="ctr"/>
-            <a:endParaRPr/>
           </a:p>
         </p:txBody>
       </p:sp>
@@ -6442,6 +6487,51 @@
       </p:sp>
       <p:sp>
         <p:nvSpPr>
+          <p:cNvPr id="6" name="TextBox 5"/>
+          <p:cNvSpPr txBox="1"/>
+          <p:nvPr/>
+        </p:nvSpPr>
+        <p:spPr>
+          <a:xfrm>
+            <a:off x="3200400" y="6446520"/>
+            <a:ext cx="6400800" cy="457200"/>
+          </a:xfrm>
+          <a:prstGeom prst="rect">
+            <a:avLst/>
+          </a:prstGeom>
+          <a:noFill/>
+        </p:spPr>
+        <p:txBody>
+          <a:bodyPr wrap="square">
+            <a:spAutoFit/>
+          </a:bodyPr>
+          <a:lstStyle/>
+          <a:p>
+            <a:pPr algn="ctr"/>
+            <a:r>
+              <a:rPr sz="900">
+                <a:solidFill>
+                  <a:srgbClr val="808080"/>
+                </a:solidFill>
+              </a:rPr>
+              <a:t>Security and Artificial Intelligence Laboratory  (SAILY) Lab,</a:t>
+            </a:r>
+          </a:p>
+          <a:p>
+            <a:pPr algn="ctr"/>
+            <a:r>
+              <a:rPr sz="900">
+                <a:solidFill>
+                  <a:srgbClr val="808080"/>
+                </a:solidFill>
+              </a:rPr>
+              <a:t>National Central University, Taoyuan, Taiwan</a:t>
+            </a:r>
+          </a:p>
+        </p:txBody>
+      </p:sp>
+      <p:sp>
+        <p:nvSpPr>
           <p:cNvPr id="7" name="TextBox 6"/>
           <p:cNvSpPr txBox="1"/>
           <p:nvPr/>
@@ -6469,58 +6559,7 @@
                   <a:srgbClr val="808080"/>
                 </a:solidFill>
               </a:rPr>
-              <a:t>15</a:t>
-            </a:r>
-          </a:p>
-        </p:txBody>
-      </p:sp>
-      <p:sp>
-        <p:nvSpPr>
-          <p:cNvPr id="8" name="TextBox 5">
-            <a:extLst>
-              <a:ext uri="{FF2B5EF4-FFF2-40B4-BE49-F238E27FC236}">
-                <a16:creationId xmlns:a16="http://schemas.microsoft.com/office/drawing/2014/main" id="{D1016F82-FE2B-5DCB-BC74-A8D946372AC4}"/>
-              </a:ext>
-            </a:extLst>
-          </p:cNvPr>
-          <p:cNvSpPr txBox="1"/>
-          <p:nvPr/>
-        </p:nvSpPr>
-        <p:spPr>
-          <a:xfrm>
-            <a:off x="3200400" y="6446520"/>
-            <a:ext cx="6400800" cy="369332"/>
-          </a:xfrm>
-          <a:prstGeom prst="rect">
-            <a:avLst/>
-          </a:prstGeom>
-          <a:noFill/>
-        </p:spPr>
-        <p:txBody>
-          <a:bodyPr wrap="square">
-            <a:spAutoFit/>
-          </a:bodyPr>
-          <a:lstStyle/>
-          <a:p>
-            <a:pPr algn="ctr"/>
-            <a:r>
-              <a:rPr lang="en-US" altLang="zh-TW" sz="900" dirty="0">
-                <a:solidFill>
-                  <a:srgbClr val="808080"/>
-                </a:solidFill>
-              </a:rPr>
-              <a:t>Department of Information Management,</a:t>
-            </a:r>
-          </a:p>
-          <a:p>
-            <a:pPr algn="ctr"/>
-            <a:r>
-              <a:rPr sz="900" dirty="0">
-                <a:solidFill>
-                  <a:srgbClr val="808080"/>
-                </a:solidFill>
-              </a:rPr>
-              <a:t>National Central University, Taoyuan, Taiwan</a:t>
+              <a:t>16</a:t>
             </a:r>
           </a:p>
         </p:txBody>
@@ -6533,8 +6572,8 @@
 </p:sld>
 </file>
 
-<file path=ppt/slides/slide16.xml><?xml version="1.0" encoding="utf-8"?>
-<p:sld xmlns:a="http://schemas.openxmlformats.org/drawingml/2006/main" xmlns:r="http://schemas.openxmlformats.org/officeDocument/2006/relationships" xmlns:p="http://schemas.openxmlformats.org/presentationml/2006/main">
+<file path=ppt/slides/slide17.xml><?xml version="1.0" encoding="utf-8"?>
+<p:sld xmlns:a="http://schemas.openxmlformats.org/drawingml/2006/main" xmlns:p="http://schemas.openxmlformats.org/presentationml/2006/main" xmlns:r="http://schemas.openxmlformats.org/officeDocument/2006/relationships">
   <p:cSld>
     <p:spTree>
       <p:nvGrpSpPr>
@@ -6542,14 +6581,7 @@
         <p:cNvGrpSpPr/>
         <p:nvPr/>
       </p:nvGrpSpPr>
-      <p:grpSpPr>
-        <a:xfrm>
-          <a:off x="0" y="0"/>
-          <a:ext cx="0" cy="0"/>
-          <a:chOff x="0" y="0"/>
-          <a:chExt cx="0" cy="0"/>
-        </a:xfrm>
-      </p:grpSpPr>
+      <p:grpSpPr/>
       <p:sp>
         <p:nvSpPr>
           <p:cNvPr id="2" name="TextBox 1"/>
@@ -6624,7 +6656,6 @@
           <a:lstStyle/>
           <a:p>
             <a:pPr algn="ctr"/>
-            <a:endParaRPr/>
           </a:p>
         </p:txBody>
       </p:sp>
@@ -6694,7 +6725,7 @@
                 </a:solidFill>
                 <a:latin typeface="Times New Roman"/>
               </a:rPr>
-              <a:t>[3] Samuel et al. PersonaGym: Evaluating Persona Agents and LLMs. EMNLP 2025 Findings.</a:t>
+              <a:t>[3] Yuan et al. Self-Rewarding Language Models. arXiv:2401.10020 (v3, 2025), Meta + NYU.</a:t>
             </a:r>
           </a:p>
           <a:p>
@@ -6710,7 +6741,7 @@
                 </a:solidFill>
                 <a:latin typeface="Times New Roman"/>
               </a:rPr>
-              <a:t>[4] Rafailov et al. Direct Preference Optimization (DPO). NeurIPS 2023.</a:t>
+              <a:t>[4] Samuel et al. PersonaGym: Evaluating Persona Agents and LLMs. EMNLP 2025 Findings.</a:t>
             </a:r>
           </a:p>
           <a:p>
@@ -6726,7 +6757,7 @@
                 </a:solidFill>
                 <a:latin typeface="Times New Roman"/>
               </a:rPr>
-              <a:t>[5] Lee et al. RLAIF: Scaling Reinforcement Learning from Human Feedback with AI Feedback. arXiv 2023, Google DeepMind.</a:t>
+              <a:t>[5] Rafailov et al. Direct Preference Optimization (DPO). NeurIPS 2023.</a:t>
             </a:r>
           </a:p>
           <a:p>
@@ -6742,7 +6773,7 @@
                 </a:solidFill>
                 <a:latin typeface="Times New Roman"/>
               </a:rPr>
-              <a:t>[6] Williams et al. MORLAIF: Multi-Objective Reinforcement Learning from AI Feedback. arXiv:2406.07496, 2024.</a:t>
+              <a:t>[6] Lee et al. RLAIF: Scaling Reinforcement Learning from Human Feedback with AI Feedback. arXiv 2023, Google DeepMind.</a:t>
             </a:r>
           </a:p>
           <a:p>
@@ -6758,7 +6789,7 @@
                 </a:solidFill>
                 <a:latin typeface="Times New Roman"/>
               </a:rPr>
-              <a:t>[7] Yuan et al. Self-Rewarding Language Models. arXiv:2401.10020, 2024.</a:t>
+              <a:t>[7] Williams et al. MORLAIF: Multi-Objective Reinforcement Learning from AI Feedback. arXiv:2406.07496, 2024.</a:t>
             </a:r>
           </a:p>
           <a:p>
@@ -6878,6 +6909,51 @@
       </p:sp>
       <p:sp>
         <p:nvSpPr>
+          <p:cNvPr id="6" name="TextBox 5"/>
+          <p:cNvSpPr txBox="1"/>
+          <p:nvPr/>
+        </p:nvSpPr>
+        <p:spPr>
+          <a:xfrm>
+            <a:off x="3200400" y="6446520"/>
+            <a:ext cx="6400800" cy="457200"/>
+          </a:xfrm>
+          <a:prstGeom prst="rect">
+            <a:avLst/>
+          </a:prstGeom>
+          <a:noFill/>
+        </p:spPr>
+        <p:txBody>
+          <a:bodyPr wrap="square">
+            <a:spAutoFit/>
+          </a:bodyPr>
+          <a:lstStyle/>
+          <a:p>
+            <a:pPr algn="ctr"/>
+            <a:r>
+              <a:rPr sz="900">
+                <a:solidFill>
+                  <a:srgbClr val="808080"/>
+                </a:solidFill>
+              </a:rPr>
+              <a:t>Security and Artificial Intelligence Laboratory  (SAILY) Lab,</a:t>
+            </a:r>
+          </a:p>
+          <a:p>
+            <a:pPr algn="ctr"/>
+            <a:r>
+              <a:rPr sz="900">
+                <a:solidFill>
+                  <a:srgbClr val="808080"/>
+                </a:solidFill>
+              </a:rPr>
+              <a:t>National Central University, Taoyuan, Taiwan</a:t>
+            </a:r>
+          </a:p>
+        </p:txBody>
+      </p:sp>
+      <p:sp>
+        <p:nvSpPr>
           <p:cNvPr id="7" name="TextBox 6"/>
           <p:cNvSpPr txBox="1"/>
           <p:nvPr/>
@@ -6905,58 +6981,7 @@
                   <a:srgbClr val="808080"/>
                 </a:solidFill>
               </a:rPr>
-              <a:t>16</a:t>
-            </a:r>
-          </a:p>
-        </p:txBody>
-      </p:sp>
-      <p:sp>
-        <p:nvSpPr>
-          <p:cNvPr id="8" name="TextBox 5">
-            <a:extLst>
-              <a:ext uri="{FF2B5EF4-FFF2-40B4-BE49-F238E27FC236}">
-                <a16:creationId xmlns:a16="http://schemas.microsoft.com/office/drawing/2014/main" id="{186D2C95-B8E4-F430-251B-7AE4C1BC5FA2}"/>
-              </a:ext>
-            </a:extLst>
-          </p:cNvPr>
-          <p:cNvSpPr txBox="1"/>
-          <p:nvPr/>
-        </p:nvSpPr>
-        <p:spPr>
-          <a:xfrm>
-            <a:off x="3200400" y="6446520"/>
-            <a:ext cx="6400800" cy="369332"/>
-          </a:xfrm>
-          <a:prstGeom prst="rect">
-            <a:avLst/>
-          </a:prstGeom>
-          <a:noFill/>
-        </p:spPr>
-        <p:txBody>
-          <a:bodyPr wrap="square">
-            <a:spAutoFit/>
-          </a:bodyPr>
-          <a:lstStyle/>
-          <a:p>
-            <a:pPr algn="ctr"/>
-            <a:r>
-              <a:rPr lang="en-US" altLang="zh-TW" sz="900" dirty="0">
-                <a:solidFill>
-                  <a:srgbClr val="808080"/>
-                </a:solidFill>
-              </a:rPr>
-              <a:t>Department of Information Management,</a:t>
-            </a:r>
-          </a:p>
-          <a:p>
-            <a:pPr algn="ctr"/>
-            <a:r>
-              <a:rPr sz="900" dirty="0">
-                <a:solidFill>
-                  <a:srgbClr val="808080"/>
-                </a:solidFill>
-              </a:rPr>
-              <a:t>National Central University, Taoyuan, Taiwan</a:t>
+              <a:t>17</a:t>
             </a:r>
           </a:p>
         </p:txBody>
@@ -6970,7 +6995,7 @@
 </file>
 
 <file path=ppt/slides/slide2.xml><?xml version="1.0" encoding="utf-8"?>
-<p:sld xmlns:a="http://schemas.openxmlformats.org/drawingml/2006/main" xmlns:r="http://schemas.openxmlformats.org/officeDocument/2006/relationships" xmlns:p="http://schemas.openxmlformats.org/presentationml/2006/main">
+<p:sld xmlns:a="http://schemas.openxmlformats.org/drawingml/2006/main" xmlns:p="http://schemas.openxmlformats.org/presentationml/2006/main" xmlns:r="http://schemas.openxmlformats.org/officeDocument/2006/relationships">
   <p:cSld>
     <p:spTree>
       <p:nvGrpSpPr>
@@ -6978,14 +7003,7 @@
         <p:cNvGrpSpPr/>
         <p:nvPr/>
       </p:nvGrpSpPr>
-      <p:grpSpPr>
-        <a:xfrm>
-          <a:off x="0" y="0"/>
-          <a:ext cx="0" cy="0"/>
-          <a:chOff x="0" y="0"/>
-          <a:chExt cx="0" cy="0"/>
-        </a:xfrm>
-      </p:grpSpPr>
+      <p:grpSpPr/>
       <p:sp>
         <p:nvSpPr>
           <p:cNvPr id="2" name="TextBox 1"/>
@@ -7060,7 +7078,6 @@
           <a:lstStyle/>
           <a:p>
             <a:pPr algn="ctr"/>
-            <a:endParaRPr/>
           </a:p>
         </p:txBody>
       </p:sp>
@@ -7073,7 +7090,7 @@
         <p:spPr>
           <a:xfrm>
             <a:off x="548640" y="1280160"/>
-            <a:ext cx="10972800" cy="3154710"/>
+            <a:ext cx="10972800" cy="4937760"/>
           </a:xfrm>
           <a:prstGeom prst="rect">
             <a:avLst/>
@@ -7092,7 +7109,7 @@
               </a:spcAft>
             </a:pPr>
             <a:r>
-              <a:rPr sz="2200" dirty="0">
+              <a:rPr sz="2200">
                 <a:solidFill>
                   <a:srgbClr val="1F1F1F"/>
                 </a:solidFill>
@@ -7108,7 +7125,10 @@
               </a:spcAft>
             </a:pPr>
             <a:r>
-              <a:rPr sz="1800" dirty="0">
+              <a:rPr sz="1800">
+                <a:solidFill>
+                  <a:srgbClr val="C0C0C0"/>
+                </a:solidFill>
                 <a:latin typeface="Times New Roman"/>
               </a:rPr>
               <a:t>– Motivation</a:t>
@@ -7121,7 +7141,10 @@
               </a:spcAft>
             </a:pPr>
             <a:r>
-              <a:rPr sz="1800" dirty="0">
+              <a:rPr sz="1800">
+                <a:solidFill>
+                  <a:srgbClr val="C0C0C0"/>
+                </a:solidFill>
                 <a:latin typeface="Times New Roman"/>
               </a:rPr>
               <a:t>– Problem Description</a:t>
@@ -7134,7 +7157,10 @@
               </a:spcAft>
             </a:pPr>
             <a:r>
-              <a:rPr sz="1800" dirty="0">
+              <a:rPr sz="1800">
+                <a:solidFill>
+                  <a:srgbClr val="C0C0C0"/>
+                </a:solidFill>
                 <a:latin typeface="Times New Roman"/>
               </a:rPr>
               <a:t>– Goal</a:t>
@@ -7147,7 +7173,7 @@
               </a:spcAft>
             </a:pPr>
             <a:r>
-              <a:rPr sz="2200" dirty="0">
+              <a:rPr sz="2200">
                 <a:solidFill>
                   <a:srgbClr val="1F1F1F"/>
                 </a:solidFill>
@@ -7163,7 +7189,7 @@
               </a:spcAft>
             </a:pPr>
             <a:r>
-              <a:rPr sz="2200" dirty="0">
+              <a:rPr sz="2200">
                 <a:solidFill>
                   <a:srgbClr val="1F1F1F"/>
                 </a:solidFill>
@@ -7179,7 +7205,7 @@
               </a:spcAft>
             </a:pPr>
             <a:r>
-              <a:rPr sz="2200" dirty="0">
+              <a:rPr sz="2200">
                 <a:solidFill>
                   <a:srgbClr val="1F1F1F"/>
                 </a:solidFill>
@@ -7195,7 +7221,7 @@
               </a:spcAft>
             </a:pPr>
             <a:r>
-              <a:rPr sz="2200" dirty="0">
+              <a:rPr sz="2200">
                 <a:solidFill>
                   <a:srgbClr val="1F1F1F"/>
                 </a:solidFill>
@@ -7248,7 +7274,7 @@
         <p:spPr>
           <a:xfrm>
             <a:off x="3200400" y="6446520"/>
-            <a:ext cx="6400800" cy="369332"/>
+            <a:ext cx="6400800" cy="457200"/>
           </a:xfrm>
           <a:prstGeom prst="rect">
             <a:avLst/>
@@ -7263,18 +7289,18 @@
           <a:p>
             <a:pPr algn="ctr"/>
             <a:r>
-              <a:rPr lang="en-US" altLang="zh-TW" sz="900" dirty="0">
+              <a:rPr sz="900">
                 <a:solidFill>
                   <a:srgbClr val="808080"/>
                 </a:solidFill>
               </a:rPr>
-              <a:t>Department of Information Management,</a:t>
+              <a:t>Security and Artificial Intelligence Laboratory  (SAILY) Lab,</a:t>
             </a:r>
           </a:p>
           <a:p>
             <a:pPr algn="ctr"/>
             <a:r>
-              <a:rPr sz="900" dirty="0">
+              <a:rPr sz="900">
                 <a:solidFill>
                   <a:srgbClr val="808080"/>
                 </a:solidFill>
@@ -7327,7 +7353,7 @@
 </file>
 
 <file path=ppt/slides/slide3.xml><?xml version="1.0" encoding="utf-8"?>
-<p:sld xmlns:a="http://schemas.openxmlformats.org/drawingml/2006/main" xmlns:r="http://schemas.openxmlformats.org/officeDocument/2006/relationships" xmlns:p="http://schemas.openxmlformats.org/presentationml/2006/main">
+<p:sld xmlns:a="http://schemas.openxmlformats.org/drawingml/2006/main" xmlns:p="http://schemas.openxmlformats.org/presentationml/2006/main" xmlns:r="http://schemas.openxmlformats.org/officeDocument/2006/relationships">
   <p:cSld>
     <p:spTree>
       <p:nvGrpSpPr>
@@ -7335,14 +7361,7 @@
         <p:cNvGrpSpPr/>
         <p:nvPr/>
       </p:nvGrpSpPr>
-      <p:grpSpPr>
-        <a:xfrm>
-          <a:off x="0" y="0"/>
-          <a:ext cx="0" cy="0"/>
-          <a:chOff x="0" y="0"/>
-          <a:chExt cx="0" cy="0"/>
-        </a:xfrm>
-      </p:grpSpPr>
+      <p:grpSpPr/>
       <p:sp>
         <p:nvSpPr>
           <p:cNvPr id="2" name="TextBox 1"/>
@@ -7417,7 +7436,6 @@
           <a:lstStyle/>
           <a:p>
             <a:pPr algn="ctr"/>
-            <a:endParaRPr/>
           </a:p>
         </p:txBody>
       </p:sp>
@@ -7591,6 +7609,51 @@
       </p:sp>
       <p:sp>
         <p:nvSpPr>
+          <p:cNvPr id="6" name="TextBox 5"/>
+          <p:cNvSpPr txBox="1"/>
+          <p:nvPr/>
+        </p:nvSpPr>
+        <p:spPr>
+          <a:xfrm>
+            <a:off x="3200400" y="6446520"/>
+            <a:ext cx="6400800" cy="457200"/>
+          </a:xfrm>
+          <a:prstGeom prst="rect">
+            <a:avLst/>
+          </a:prstGeom>
+          <a:noFill/>
+        </p:spPr>
+        <p:txBody>
+          <a:bodyPr wrap="square">
+            <a:spAutoFit/>
+          </a:bodyPr>
+          <a:lstStyle/>
+          <a:p>
+            <a:pPr algn="ctr"/>
+            <a:r>
+              <a:rPr sz="900">
+                <a:solidFill>
+                  <a:srgbClr val="808080"/>
+                </a:solidFill>
+              </a:rPr>
+              <a:t>Security and Artificial Intelligence Laboratory  (SAILY) Lab,</a:t>
+            </a:r>
+          </a:p>
+          <a:p>
+            <a:pPr algn="ctr"/>
+            <a:r>
+              <a:rPr sz="900">
+                <a:solidFill>
+                  <a:srgbClr val="808080"/>
+                </a:solidFill>
+              </a:rPr>
+              <a:t>National Central University, Taoyuan, Taiwan</a:t>
+            </a:r>
+          </a:p>
+        </p:txBody>
+      </p:sp>
+      <p:sp>
+        <p:nvSpPr>
           <p:cNvPr id="7" name="TextBox 6"/>
           <p:cNvSpPr txBox="1"/>
           <p:nvPr/>
@@ -7619,57 +7682,6 @@
                 </a:solidFill>
               </a:rPr>
               <a:t>3</a:t>
-            </a:r>
-          </a:p>
-        </p:txBody>
-      </p:sp>
-      <p:sp>
-        <p:nvSpPr>
-          <p:cNvPr id="8" name="TextBox 5">
-            <a:extLst>
-              <a:ext uri="{FF2B5EF4-FFF2-40B4-BE49-F238E27FC236}">
-                <a16:creationId xmlns:a16="http://schemas.microsoft.com/office/drawing/2014/main" id="{56A6EC3C-0349-C170-AE21-107C09B838DE}"/>
-              </a:ext>
-            </a:extLst>
-          </p:cNvPr>
-          <p:cNvSpPr txBox="1"/>
-          <p:nvPr/>
-        </p:nvSpPr>
-        <p:spPr>
-          <a:xfrm>
-            <a:off x="3200400" y="6446520"/>
-            <a:ext cx="6400800" cy="369332"/>
-          </a:xfrm>
-          <a:prstGeom prst="rect">
-            <a:avLst/>
-          </a:prstGeom>
-          <a:noFill/>
-        </p:spPr>
-        <p:txBody>
-          <a:bodyPr wrap="square">
-            <a:spAutoFit/>
-          </a:bodyPr>
-          <a:lstStyle/>
-          <a:p>
-            <a:pPr algn="ctr"/>
-            <a:r>
-              <a:rPr lang="en-US" altLang="zh-TW" sz="900" dirty="0">
-                <a:solidFill>
-                  <a:srgbClr val="808080"/>
-                </a:solidFill>
-              </a:rPr>
-              <a:t>Department of Information Management,</a:t>
-            </a:r>
-          </a:p>
-          <a:p>
-            <a:pPr algn="ctr"/>
-            <a:r>
-              <a:rPr sz="900" dirty="0">
-                <a:solidFill>
-                  <a:srgbClr val="808080"/>
-                </a:solidFill>
-              </a:rPr>
-              <a:t>National Central University, Taoyuan, Taiwan</a:t>
             </a:r>
           </a:p>
         </p:txBody>
@@ -7683,7 +7695,7 @@
 </file>
 
 <file path=ppt/slides/slide4.xml><?xml version="1.0" encoding="utf-8"?>
-<p:sld xmlns:a="http://schemas.openxmlformats.org/drawingml/2006/main" xmlns:r="http://schemas.openxmlformats.org/officeDocument/2006/relationships" xmlns:p="http://schemas.openxmlformats.org/presentationml/2006/main">
+<p:sld xmlns:a="http://schemas.openxmlformats.org/drawingml/2006/main" xmlns:p="http://schemas.openxmlformats.org/presentationml/2006/main" xmlns:r="http://schemas.openxmlformats.org/officeDocument/2006/relationships">
   <p:cSld>
     <p:spTree>
       <p:nvGrpSpPr>
@@ -7691,14 +7703,7 @@
         <p:cNvGrpSpPr/>
         <p:nvPr/>
       </p:nvGrpSpPr>
-      <p:grpSpPr>
-        <a:xfrm>
-          <a:off x="0" y="0"/>
-          <a:ext cx="0" cy="0"/>
-          <a:chOff x="0" y="0"/>
-          <a:chExt cx="0" cy="0"/>
-        </a:xfrm>
-      </p:grpSpPr>
+      <p:grpSpPr/>
       <p:sp>
         <p:nvSpPr>
           <p:cNvPr id="2" name="TextBox 1"/>
@@ -7773,7 +7778,6 @@
           <a:lstStyle/>
           <a:p>
             <a:pPr algn="ctr"/>
-            <a:endParaRPr/>
           </a:p>
         </p:txBody>
       </p:sp>
@@ -7947,6 +7951,51 @@
       </p:sp>
       <p:sp>
         <p:nvSpPr>
+          <p:cNvPr id="6" name="TextBox 5"/>
+          <p:cNvSpPr txBox="1"/>
+          <p:nvPr/>
+        </p:nvSpPr>
+        <p:spPr>
+          <a:xfrm>
+            <a:off x="3200400" y="6446520"/>
+            <a:ext cx="6400800" cy="457200"/>
+          </a:xfrm>
+          <a:prstGeom prst="rect">
+            <a:avLst/>
+          </a:prstGeom>
+          <a:noFill/>
+        </p:spPr>
+        <p:txBody>
+          <a:bodyPr wrap="square">
+            <a:spAutoFit/>
+          </a:bodyPr>
+          <a:lstStyle/>
+          <a:p>
+            <a:pPr algn="ctr"/>
+            <a:r>
+              <a:rPr sz="900">
+                <a:solidFill>
+                  <a:srgbClr val="808080"/>
+                </a:solidFill>
+              </a:rPr>
+              <a:t>Security and Artificial Intelligence Laboratory  (SAILY) Lab,</a:t>
+            </a:r>
+          </a:p>
+          <a:p>
+            <a:pPr algn="ctr"/>
+            <a:r>
+              <a:rPr sz="900">
+                <a:solidFill>
+                  <a:srgbClr val="808080"/>
+                </a:solidFill>
+              </a:rPr>
+              <a:t>National Central University, Taoyuan, Taiwan</a:t>
+            </a:r>
+          </a:p>
+        </p:txBody>
+      </p:sp>
+      <p:sp>
+        <p:nvSpPr>
           <p:cNvPr id="7" name="TextBox 6"/>
           <p:cNvSpPr txBox="1"/>
           <p:nvPr/>
@@ -7975,57 +8024,6 @@
                 </a:solidFill>
               </a:rPr>
               <a:t>4</a:t>
-            </a:r>
-          </a:p>
-        </p:txBody>
-      </p:sp>
-      <p:sp>
-        <p:nvSpPr>
-          <p:cNvPr id="9" name="TextBox 5">
-            <a:extLst>
-              <a:ext uri="{FF2B5EF4-FFF2-40B4-BE49-F238E27FC236}">
-                <a16:creationId xmlns:a16="http://schemas.microsoft.com/office/drawing/2014/main" id="{5C3EB80C-B1E3-29CA-9889-44A29E7365A8}"/>
-              </a:ext>
-            </a:extLst>
-          </p:cNvPr>
-          <p:cNvSpPr txBox="1"/>
-          <p:nvPr/>
-        </p:nvSpPr>
-        <p:spPr>
-          <a:xfrm>
-            <a:off x="3200400" y="6446520"/>
-            <a:ext cx="6400800" cy="369332"/>
-          </a:xfrm>
-          <a:prstGeom prst="rect">
-            <a:avLst/>
-          </a:prstGeom>
-          <a:noFill/>
-        </p:spPr>
-        <p:txBody>
-          <a:bodyPr wrap="square">
-            <a:spAutoFit/>
-          </a:bodyPr>
-          <a:lstStyle/>
-          <a:p>
-            <a:pPr algn="ctr"/>
-            <a:r>
-              <a:rPr lang="en-US" altLang="zh-TW" sz="900" dirty="0">
-                <a:solidFill>
-                  <a:srgbClr val="808080"/>
-                </a:solidFill>
-              </a:rPr>
-              <a:t>Department of Information Management,</a:t>
-            </a:r>
-          </a:p>
-          <a:p>
-            <a:pPr algn="ctr"/>
-            <a:r>
-              <a:rPr sz="900" dirty="0">
-                <a:solidFill>
-                  <a:srgbClr val="808080"/>
-                </a:solidFill>
-              </a:rPr>
-              <a:t>National Central University, Taoyuan, Taiwan</a:t>
             </a:r>
           </a:p>
         </p:txBody>
@@ -8039,7 +8037,7 @@
 </file>
 
 <file path=ppt/slides/slide5.xml><?xml version="1.0" encoding="utf-8"?>
-<p:sld xmlns:a="http://schemas.openxmlformats.org/drawingml/2006/main" xmlns:r="http://schemas.openxmlformats.org/officeDocument/2006/relationships" xmlns:p="http://schemas.openxmlformats.org/presentationml/2006/main">
+<p:sld xmlns:a="http://schemas.openxmlformats.org/drawingml/2006/main" xmlns:p="http://schemas.openxmlformats.org/presentationml/2006/main" xmlns:r="http://schemas.openxmlformats.org/officeDocument/2006/relationships">
   <p:cSld>
     <p:spTree>
       <p:nvGrpSpPr>
@@ -8047,14 +8045,7 @@
         <p:cNvGrpSpPr/>
         <p:nvPr/>
       </p:nvGrpSpPr>
-      <p:grpSpPr>
-        <a:xfrm>
-          <a:off x="0" y="0"/>
-          <a:ext cx="0" cy="0"/>
-          <a:chOff x="0" y="0"/>
-          <a:chExt cx="0" cy="0"/>
-        </a:xfrm>
-      </p:grpSpPr>
+      <p:grpSpPr/>
       <p:sp>
         <p:nvSpPr>
           <p:cNvPr id="2" name="TextBox 1"/>
@@ -8129,7 +8120,6 @@
           <a:lstStyle/>
           <a:p>
             <a:pPr algn="ctr"/>
-            <a:endParaRPr/>
           </a:p>
         </p:txBody>
       </p:sp>
@@ -8161,7 +8151,7 @@
               </a:spcAft>
             </a:pPr>
             <a:r>
-              <a:rPr sz="1700">
+              <a:rPr sz="1600">
                 <a:solidFill>
                   <a:srgbClr val="1F1F1F"/>
                 </a:solidFill>
@@ -8177,7 +8167,7 @@
               </a:spcAft>
             </a:pPr>
             <a:r>
-              <a:rPr sz="1700">
+              <a:rPr sz="1600">
                 <a:solidFill>
                   <a:srgbClr val="1F1F1F"/>
                 </a:solidFill>
@@ -8193,13 +8183,13 @@
               </a:spcAft>
             </a:pPr>
             <a:r>
-              <a:rPr sz="1400">
+              <a:rPr sz="1300">
                 <a:solidFill>
                   <a:srgbClr val="404040"/>
                 </a:solidFill>
                 <a:latin typeface="Times New Roman"/>
               </a:rPr>
-              <a:t>– 12 segments × 8 personas = 96-cell reaction matrix per 2-minute video.</a:t>
+              <a:t>– Per video: 12 segments × 8 personas = 96-cell reaction matrix</a:t>
             </a:r>
           </a:p>
           <a:p>
@@ -8209,12 +8199,28 @@
               </a:spcAft>
             </a:pPr>
             <a:r>
-              <a:rPr sz="1400">
+              <a:rPr sz="1300">
                 <a:solidFill>
                   <a:srgbClr val="404040"/>
                 </a:solidFill>
                 <a:latin typeface="Times New Roman"/>
               </a:rPr>
+              <a:t>– (implemented via 8 per-persona LoRA adapters on a shared Llama-3B base — swapped at inference time).</a:t>
+            </a:r>
+          </a:p>
+          <a:p>
+            <a:pPr lvl="1">
+              <a:spcAft>
+                <a:spcPts val="600"/>
+              </a:spcAft>
+            </a:pPr>
+            <a:r>
+              <a:rPr sz="1300">
+                <a:solidFill>
+                  <a:srgbClr val="404040"/>
+                </a:solidFill>
+                <a:latin typeface="Times New Roman"/>
+              </a:rPr>
               <a:t>– Latency ≤ 15s on RTX 3090 (vs. ~120s for Claude API).</a:t>
             </a:r>
           </a:p>
@@ -8225,7 +8231,7 @@
               </a:spcAft>
             </a:pPr>
             <a:r>
-              <a:rPr sz="1400">
+              <a:rPr sz="1300">
                 <a:solidFill>
                   <a:srgbClr val="404040"/>
                 </a:solidFill>
@@ -8241,7 +8247,7 @@
               </a:spcAft>
             </a:pPr>
             <a:r>
-              <a:rPr sz="1400">
+              <a:rPr sz="1300">
                 <a:solidFill>
                   <a:srgbClr val="404040"/>
                 </a:solidFill>
@@ -8257,7 +8263,7 @@
               </a:spcAft>
             </a:pPr>
             <a:r>
-              <a:rPr sz="1400">
+              <a:rPr sz="1300">
                 <a:solidFill>
                   <a:srgbClr val="404040"/>
                 </a:solidFill>
@@ -8273,7 +8279,7 @@
               </a:spcAft>
             </a:pPr>
             <a:r>
-              <a:rPr sz="1700">
+              <a:rPr sz="1600">
                 <a:solidFill>
                   <a:srgbClr val="1F1F1F"/>
                 </a:solidFill>
@@ -8289,7 +8295,7 @@
               </a:spcAft>
             </a:pPr>
             <a:r>
-              <a:rPr sz="1400">
+              <a:rPr sz="1300">
                 <a:solidFill>
                   <a:srgbClr val="404040"/>
                 </a:solidFill>
@@ -8305,7 +8311,7 @@
               </a:spcAft>
             </a:pPr>
             <a:r>
-              <a:rPr sz="1400">
+              <a:rPr sz="1300">
                 <a:solidFill>
                   <a:srgbClr val="404040"/>
                 </a:solidFill>
@@ -8321,7 +8327,7 @@
               </a:spcAft>
             </a:pPr>
             <a:r>
-              <a:rPr sz="1400">
+              <a:rPr sz="1300">
                 <a:solidFill>
                   <a:srgbClr val="404040"/>
                 </a:solidFill>
@@ -8367,6 +8373,51 @@
       </p:sp>
       <p:sp>
         <p:nvSpPr>
+          <p:cNvPr id="6" name="TextBox 5"/>
+          <p:cNvSpPr txBox="1"/>
+          <p:nvPr/>
+        </p:nvSpPr>
+        <p:spPr>
+          <a:xfrm>
+            <a:off x="3200400" y="6446520"/>
+            <a:ext cx="6400800" cy="457200"/>
+          </a:xfrm>
+          <a:prstGeom prst="rect">
+            <a:avLst/>
+          </a:prstGeom>
+          <a:noFill/>
+        </p:spPr>
+        <p:txBody>
+          <a:bodyPr wrap="square">
+            <a:spAutoFit/>
+          </a:bodyPr>
+          <a:lstStyle/>
+          <a:p>
+            <a:pPr algn="ctr"/>
+            <a:r>
+              <a:rPr sz="900">
+                <a:solidFill>
+                  <a:srgbClr val="808080"/>
+                </a:solidFill>
+              </a:rPr>
+              <a:t>Security and Artificial Intelligence Laboratory  (SAILY) Lab,</a:t>
+            </a:r>
+          </a:p>
+          <a:p>
+            <a:pPr algn="ctr"/>
+            <a:r>
+              <a:rPr sz="900">
+                <a:solidFill>
+                  <a:srgbClr val="808080"/>
+                </a:solidFill>
+              </a:rPr>
+              <a:t>National Central University, Taoyuan, Taiwan</a:t>
+            </a:r>
+          </a:p>
+        </p:txBody>
+      </p:sp>
+      <p:sp>
+        <p:nvSpPr>
           <p:cNvPr id="7" name="TextBox 6"/>
           <p:cNvSpPr txBox="1"/>
           <p:nvPr/>
@@ -8395,57 +8446,6 @@
                 </a:solidFill>
               </a:rPr>
               <a:t>5</a:t>
-            </a:r>
-          </a:p>
-        </p:txBody>
-      </p:sp>
-      <p:sp>
-        <p:nvSpPr>
-          <p:cNvPr id="8" name="TextBox 5">
-            <a:extLst>
-              <a:ext uri="{FF2B5EF4-FFF2-40B4-BE49-F238E27FC236}">
-                <a16:creationId xmlns:a16="http://schemas.microsoft.com/office/drawing/2014/main" id="{F29683F7-2544-6766-FEC7-23C87DF31FEE}"/>
-              </a:ext>
-            </a:extLst>
-          </p:cNvPr>
-          <p:cNvSpPr txBox="1"/>
-          <p:nvPr/>
-        </p:nvSpPr>
-        <p:spPr>
-          <a:xfrm>
-            <a:off x="3200400" y="6446520"/>
-            <a:ext cx="6400800" cy="369332"/>
-          </a:xfrm>
-          <a:prstGeom prst="rect">
-            <a:avLst/>
-          </a:prstGeom>
-          <a:noFill/>
-        </p:spPr>
-        <p:txBody>
-          <a:bodyPr wrap="square">
-            <a:spAutoFit/>
-          </a:bodyPr>
-          <a:lstStyle/>
-          <a:p>
-            <a:pPr algn="ctr"/>
-            <a:r>
-              <a:rPr lang="en-US" altLang="zh-TW" sz="900" dirty="0">
-                <a:solidFill>
-                  <a:srgbClr val="808080"/>
-                </a:solidFill>
-              </a:rPr>
-              <a:t>Department of Information Management,</a:t>
-            </a:r>
-          </a:p>
-          <a:p>
-            <a:pPr algn="ctr"/>
-            <a:r>
-              <a:rPr sz="900" dirty="0">
-                <a:solidFill>
-                  <a:srgbClr val="808080"/>
-                </a:solidFill>
-              </a:rPr>
-              <a:t>National Central University, Taoyuan, Taiwan</a:t>
             </a:r>
           </a:p>
         </p:txBody>
@@ -8459,7 +8459,7 @@
 </file>
 
 <file path=ppt/slides/slide6.xml><?xml version="1.0" encoding="utf-8"?>
-<p:sld xmlns:a="http://schemas.openxmlformats.org/drawingml/2006/main" xmlns:r="http://schemas.openxmlformats.org/officeDocument/2006/relationships" xmlns:p="http://schemas.openxmlformats.org/presentationml/2006/main">
+<p:sld xmlns:a="http://schemas.openxmlformats.org/drawingml/2006/main" xmlns:p="http://schemas.openxmlformats.org/presentationml/2006/main" xmlns:r="http://schemas.openxmlformats.org/officeDocument/2006/relationships">
   <p:cSld>
     <p:spTree>
       <p:nvGrpSpPr>
@@ -8467,14 +8467,7 @@
         <p:cNvGrpSpPr/>
         <p:nvPr/>
       </p:nvGrpSpPr>
-      <p:grpSpPr>
-        <a:xfrm>
-          <a:off x="0" y="0"/>
-          <a:ext cx="0" cy="0"/>
-          <a:chOff x="0" y="0"/>
-          <a:chExt cx="0" cy="0"/>
-        </a:xfrm>
-      </p:grpSpPr>
+      <p:grpSpPr/>
       <p:sp>
         <p:nvSpPr>
           <p:cNvPr id="2" name="TextBox 1"/>
@@ -8549,7 +8542,6 @@
           <a:lstStyle/>
           <a:p>
             <a:pPr algn="ctr"/>
-            <a:endParaRPr/>
           </a:p>
         </p:txBody>
       </p:sp>
@@ -8741,6 +8733,51 @@
       </p:sp>
       <p:sp>
         <p:nvSpPr>
+          <p:cNvPr id="7" name="TextBox 6"/>
+          <p:cNvSpPr txBox="1"/>
+          <p:nvPr/>
+        </p:nvSpPr>
+        <p:spPr>
+          <a:xfrm>
+            <a:off x="3200400" y="6446520"/>
+            <a:ext cx="6400800" cy="457200"/>
+          </a:xfrm>
+          <a:prstGeom prst="rect">
+            <a:avLst/>
+          </a:prstGeom>
+          <a:noFill/>
+        </p:spPr>
+        <p:txBody>
+          <a:bodyPr wrap="square">
+            <a:spAutoFit/>
+          </a:bodyPr>
+          <a:lstStyle/>
+          <a:p>
+            <a:pPr algn="ctr"/>
+            <a:r>
+              <a:rPr sz="900">
+                <a:solidFill>
+                  <a:srgbClr val="808080"/>
+                </a:solidFill>
+              </a:rPr>
+              <a:t>Security and Artificial Intelligence Laboratory  (SAILY) Lab,</a:t>
+            </a:r>
+          </a:p>
+          <a:p>
+            <a:pPr algn="ctr"/>
+            <a:r>
+              <a:rPr sz="900">
+                <a:solidFill>
+                  <a:srgbClr val="808080"/>
+                </a:solidFill>
+              </a:rPr>
+              <a:t>National Central University, Taoyuan, Taiwan</a:t>
+            </a:r>
+          </a:p>
+        </p:txBody>
+      </p:sp>
+      <p:sp>
+        <p:nvSpPr>
           <p:cNvPr id="8" name="TextBox 7"/>
           <p:cNvSpPr txBox="1"/>
           <p:nvPr/>
@@ -8769,57 +8806,6 @@
                 </a:solidFill>
               </a:rPr>
               <a:t>6</a:t>
-            </a:r>
-          </a:p>
-        </p:txBody>
-      </p:sp>
-      <p:sp>
-        <p:nvSpPr>
-          <p:cNvPr id="9" name="TextBox 5">
-            <a:extLst>
-              <a:ext uri="{FF2B5EF4-FFF2-40B4-BE49-F238E27FC236}">
-                <a16:creationId xmlns:a16="http://schemas.microsoft.com/office/drawing/2014/main" id="{6A14E16A-FA39-A1D9-074D-4DD4D22CD53B}"/>
-              </a:ext>
-            </a:extLst>
-          </p:cNvPr>
-          <p:cNvSpPr txBox="1"/>
-          <p:nvPr/>
-        </p:nvSpPr>
-        <p:spPr>
-          <a:xfrm>
-            <a:off x="3200400" y="6446520"/>
-            <a:ext cx="6400800" cy="369332"/>
-          </a:xfrm>
-          <a:prstGeom prst="rect">
-            <a:avLst/>
-          </a:prstGeom>
-          <a:noFill/>
-        </p:spPr>
-        <p:txBody>
-          <a:bodyPr wrap="square">
-            <a:spAutoFit/>
-          </a:bodyPr>
-          <a:lstStyle/>
-          <a:p>
-            <a:pPr algn="ctr"/>
-            <a:r>
-              <a:rPr lang="en-US" altLang="zh-TW" sz="900" dirty="0">
-                <a:solidFill>
-                  <a:srgbClr val="808080"/>
-                </a:solidFill>
-              </a:rPr>
-              <a:t>Department of Information Management,</a:t>
-            </a:r>
-          </a:p>
-          <a:p>
-            <a:pPr algn="ctr"/>
-            <a:r>
-              <a:rPr sz="900" dirty="0">
-                <a:solidFill>
-                  <a:srgbClr val="808080"/>
-                </a:solidFill>
-              </a:rPr>
-              <a:t>National Central University, Taoyuan, Taiwan</a:t>
             </a:r>
           </a:p>
         </p:txBody>
@@ -8833,7 +8819,7 @@
 </file>
 
 <file path=ppt/slides/slide7.xml><?xml version="1.0" encoding="utf-8"?>
-<p:sld xmlns:a="http://schemas.openxmlformats.org/drawingml/2006/main" xmlns:r="http://schemas.openxmlformats.org/officeDocument/2006/relationships" xmlns:p="http://schemas.openxmlformats.org/presentationml/2006/main">
+<p:sld xmlns:a="http://schemas.openxmlformats.org/drawingml/2006/main" xmlns:p="http://schemas.openxmlformats.org/presentationml/2006/main" xmlns:r="http://schemas.openxmlformats.org/officeDocument/2006/relationships">
   <p:cSld>
     <p:spTree>
       <p:nvGrpSpPr>
@@ -8841,14 +8827,7 @@
         <p:cNvGrpSpPr/>
         <p:nvPr/>
       </p:nvGrpSpPr>
-      <p:grpSpPr>
-        <a:xfrm>
-          <a:off x="0" y="0"/>
-          <a:ext cx="0" cy="0"/>
-          <a:chOff x="0" y="0"/>
-          <a:chExt cx="0" cy="0"/>
-        </a:xfrm>
-      </p:grpSpPr>
+      <p:grpSpPr/>
       <p:sp>
         <p:nvSpPr>
           <p:cNvPr id="2" name="TextBox 1"/>
@@ -8923,7 +8902,6 @@
           <a:lstStyle/>
           <a:p>
             <a:pPr algn="ctr"/>
-            <a:endParaRPr/>
           </a:p>
         </p:txBody>
       </p:sp>
@@ -9115,6 +9093,51 @@
       </p:sp>
       <p:sp>
         <p:nvSpPr>
+          <p:cNvPr id="7" name="TextBox 6"/>
+          <p:cNvSpPr txBox="1"/>
+          <p:nvPr/>
+        </p:nvSpPr>
+        <p:spPr>
+          <a:xfrm>
+            <a:off x="3200400" y="6446520"/>
+            <a:ext cx="6400800" cy="457200"/>
+          </a:xfrm>
+          <a:prstGeom prst="rect">
+            <a:avLst/>
+          </a:prstGeom>
+          <a:noFill/>
+        </p:spPr>
+        <p:txBody>
+          <a:bodyPr wrap="square">
+            <a:spAutoFit/>
+          </a:bodyPr>
+          <a:lstStyle/>
+          <a:p>
+            <a:pPr algn="ctr"/>
+            <a:r>
+              <a:rPr sz="900">
+                <a:solidFill>
+                  <a:srgbClr val="808080"/>
+                </a:solidFill>
+              </a:rPr>
+              <a:t>Security and Artificial Intelligence Laboratory  (SAILY) Lab,</a:t>
+            </a:r>
+          </a:p>
+          <a:p>
+            <a:pPr algn="ctr"/>
+            <a:r>
+              <a:rPr sz="900">
+                <a:solidFill>
+                  <a:srgbClr val="808080"/>
+                </a:solidFill>
+              </a:rPr>
+              <a:t>National Central University, Taoyuan, Taiwan</a:t>
+            </a:r>
+          </a:p>
+        </p:txBody>
+      </p:sp>
+      <p:sp>
+        <p:nvSpPr>
           <p:cNvPr id="8" name="TextBox 7"/>
           <p:cNvSpPr txBox="1"/>
           <p:nvPr/>
@@ -9143,57 +9166,6 @@
                 </a:solidFill>
               </a:rPr>
               <a:t>7</a:t>
-            </a:r>
-          </a:p>
-        </p:txBody>
-      </p:sp>
-      <p:sp>
-        <p:nvSpPr>
-          <p:cNvPr id="9" name="TextBox 5">
-            <a:extLst>
-              <a:ext uri="{FF2B5EF4-FFF2-40B4-BE49-F238E27FC236}">
-                <a16:creationId xmlns:a16="http://schemas.microsoft.com/office/drawing/2014/main" id="{D8CFBFDC-E1B6-66F4-E423-5CC0A7A1C80C}"/>
-              </a:ext>
-            </a:extLst>
-          </p:cNvPr>
-          <p:cNvSpPr txBox="1"/>
-          <p:nvPr/>
-        </p:nvSpPr>
-        <p:spPr>
-          <a:xfrm>
-            <a:off x="3200400" y="6446520"/>
-            <a:ext cx="6400800" cy="369332"/>
-          </a:xfrm>
-          <a:prstGeom prst="rect">
-            <a:avLst/>
-          </a:prstGeom>
-          <a:noFill/>
-        </p:spPr>
-        <p:txBody>
-          <a:bodyPr wrap="square">
-            <a:spAutoFit/>
-          </a:bodyPr>
-          <a:lstStyle/>
-          <a:p>
-            <a:pPr algn="ctr"/>
-            <a:r>
-              <a:rPr lang="en-US" altLang="zh-TW" sz="900" dirty="0">
-                <a:solidFill>
-                  <a:srgbClr val="808080"/>
-                </a:solidFill>
-              </a:rPr>
-              <a:t>Department of Information Management,</a:t>
-            </a:r>
-          </a:p>
-          <a:p>
-            <a:pPr algn="ctr"/>
-            <a:r>
-              <a:rPr sz="900" dirty="0">
-                <a:solidFill>
-                  <a:srgbClr val="808080"/>
-                </a:solidFill>
-              </a:rPr>
-              <a:t>National Central University, Taoyuan, Taiwan</a:t>
             </a:r>
           </a:p>
         </p:txBody>
@@ -9207,7 +9179,7 @@
 </file>
 
 <file path=ppt/slides/slide8.xml><?xml version="1.0" encoding="utf-8"?>
-<p:sld xmlns:a="http://schemas.openxmlformats.org/drawingml/2006/main" xmlns:r="http://schemas.openxmlformats.org/officeDocument/2006/relationships" xmlns:p="http://schemas.openxmlformats.org/presentationml/2006/main">
+<p:sld xmlns:a="http://schemas.openxmlformats.org/drawingml/2006/main" xmlns:p="http://schemas.openxmlformats.org/presentationml/2006/main" xmlns:r="http://schemas.openxmlformats.org/officeDocument/2006/relationships">
   <p:cSld>
     <p:spTree>
       <p:nvGrpSpPr>
@@ -9215,14 +9187,7 @@
         <p:cNvGrpSpPr/>
         <p:nvPr/>
       </p:nvGrpSpPr>
-      <p:grpSpPr>
-        <a:xfrm>
-          <a:off x="0" y="0"/>
-          <a:ext cx="0" cy="0"/>
-          <a:chOff x="0" y="0"/>
-          <a:chExt cx="0" cy="0"/>
-        </a:xfrm>
-      </p:grpSpPr>
+      <p:grpSpPr/>
       <p:sp>
         <p:nvSpPr>
           <p:cNvPr id="2" name="TextBox 1"/>
@@ -9252,7 +9217,7 @@
                 </a:solidFill>
                 <a:latin typeface="Times New Roman"/>
               </a:rPr>
-              <a:t>Work Comparison</a:t>
+              <a:t>Related Work — RLAIH (Self-Rewarding LM)</a:t>
             </a:r>
           </a:p>
         </p:txBody>
@@ -9297,7 +9262,398 @@
           <a:lstStyle/>
           <a:p>
             <a:pPr algn="ctr"/>
-            <a:endParaRPr/>
+          </a:p>
+        </p:txBody>
+      </p:sp>
+      <p:sp>
+        <p:nvSpPr>
+          <p:cNvPr id="4" name="TextBox 3"/>
+          <p:cNvSpPr txBox="1"/>
+          <p:nvPr/>
+        </p:nvSpPr>
+        <p:spPr>
+          <a:xfrm>
+            <a:off x="548640" y="1097280"/>
+            <a:ext cx="10972800" cy="4937760"/>
+          </a:xfrm>
+          <a:prstGeom prst="rect">
+            <a:avLst/>
+          </a:prstGeom>
+          <a:noFill/>
+        </p:spPr>
+        <p:txBody>
+          <a:bodyPr wrap="square">
+            <a:spAutoFit/>
+          </a:bodyPr>
+          <a:lstStyle/>
+          <a:p>
+            <a:pPr>
+              <a:spcAft>
+                <a:spcPts val="600"/>
+              </a:spcAft>
+            </a:pPr>
+            <a:r>
+              <a:rPr sz="1500">
+                <a:solidFill>
+                  <a:srgbClr val="1F1F1F"/>
+                </a:solidFill>
+                <a:latin typeface="Times New Roman"/>
+              </a:rPr>
+              <a:t>• Title: Self-Rewarding Language Models</a:t>
+            </a:r>
+          </a:p>
+          <a:p>
+            <a:pPr>
+              <a:spcAft>
+                <a:spcPts val="600"/>
+              </a:spcAft>
+            </a:pPr>
+            <a:r>
+              <a:rPr sz="1500">
+                <a:solidFill>
+                  <a:srgbClr val="1F1F1F"/>
+                </a:solidFill>
+                <a:latin typeface="Times New Roman"/>
+              </a:rPr>
+              <a:t>• Problem: RLHF is bottlenecked by costly human preference data and a frozen reward model that cannot improve with the LLM.</a:t>
+            </a:r>
+          </a:p>
+          <a:p>
+            <a:pPr>
+              <a:spcAft>
+                <a:spcPts val="600"/>
+              </a:spcAft>
+            </a:pPr>
+            <a:r>
+              <a:rPr sz="1500">
+                <a:solidFill>
+                  <a:srgbClr val="1F1F1F"/>
+                </a:solidFill>
+                <a:latin typeface="Times New Roman"/>
+              </a:rPr>
+              <a:t>• Approach: an LLM both generates responses AND scores its own outputs via LLM-as-a-Judge → builds preference pairs → Iterative DPO (M1 → M2 → M3).</a:t>
+            </a:r>
+          </a:p>
+          <a:p>
+            <a:pPr lvl="1">
+              <a:spcAft>
+                <a:spcPts val="600"/>
+              </a:spcAft>
+            </a:pPr>
+            <a:r>
+              <a:rPr sz="1200">
+                <a:solidFill>
+                  <a:srgbClr val="404040"/>
+                </a:solidFill>
+                <a:latin typeface="Times New Roman"/>
+              </a:rPr>
+              <a:t>– Llama-2-70B Iter 3 reaches 20.44% win rate on AlpacaEval 2.0 — surpassing Claude 2, Gemini Pro, and GPT-4 0613.</a:t>
+            </a:r>
+          </a:p>
+          <a:p>
+            <a:pPr lvl="1">
+              <a:spcAft>
+                <a:spcPts val="600"/>
+              </a:spcAft>
+            </a:pPr>
+            <a:r>
+              <a:rPr sz="1200">
+                <a:solidFill>
+                  <a:srgbClr val="404040"/>
+                </a:solidFill>
+                <a:latin typeface="Times New Roman"/>
+              </a:rPr>
+              <a:t>– Reward-modeling pairwise accuracy improves across iterations: 65.1% → 78.7% → 80.4% → 81.7%.</a:t>
+            </a:r>
+          </a:p>
+          <a:p>
+            <a:pPr>
+              <a:spcAft>
+                <a:spcPts val="600"/>
+              </a:spcAft>
+            </a:pPr>
+            <a:r>
+              <a:rPr sz="1500">
+                <a:solidFill>
+                  <a:srgbClr val="C00000"/>
+                </a:solidFill>
+                <a:latin typeface="Times New Roman"/>
+              </a:rPr>
+              <a:t>• Limitation: single-aspect additive reward — no domain-specific dimensions; possible length / reward-hacking bias.</a:t>
+            </a:r>
+          </a:p>
+          <a:p>
+            <a:pPr lvl="1">
+              <a:spcAft>
+                <a:spcPts val="600"/>
+              </a:spcAft>
+            </a:pPr>
+            <a:r>
+              <a:rPr sz="1200">
+                <a:solidFill>
+                  <a:srgbClr val="C00000"/>
+                </a:solidFill>
+                <a:latin typeface="Times New Roman"/>
+              </a:rPr>
+              <a:t>– Generation length grows from 1092 → 2552 tokens across iterations (length bias risk).</a:t>
+            </a:r>
+          </a:p>
+          <a:p>
+            <a:pPr>
+              <a:spcAft>
+                <a:spcPts val="600"/>
+              </a:spcAft>
+            </a:pPr>
+            <a:r>
+              <a:rPr sz="1500">
+                <a:solidFill>
+                  <a:srgbClr val="1F1F1F"/>
+                </a:solidFill>
+                <a:latin typeface="Times New Roman"/>
+              </a:rPr>
+              <a:t>• SimLens extension: replace single reward with 6-aspect domain-specific reward (Persona Cons. + Linguistic + Segment Relevance + ...).</a:t>
+            </a:r>
+          </a:p>
+        </p:txBody>
+      </p:sp>
+      <p:sp>
+        <p:nvSpPr>
+          <p:cNvPr id="5" name="TextBox 4"/>
+          <p:cNvSpPr txBox="1"/>
+          <p:nvPr/>
+        </p:nvSpPr>
+        <p:spPr>
+          <a:xfrm>
+            <a:off x="365760" y="5989320"/>
+            <a:ext cx="11430000" cy="365760"/>
+          </a:xfrm>
+          <a:prstGeom prst="rect">
+            <a:avLst/>
+          </a:prstGeom>
+          <a:noFill/>
+        </p:spPr>
+        <p:txBody>
+          <a:bodyPr wrap="none">
+            <a:spAutoFit/>
+          </a:bodyPr>
+          <a:lstStyle/>
+          <a:p>
+            <a:r>
+              <a:rPr sz="1000">
+                <a:solidFill>
+                  <a:srgbClr val="808080"/>
+                </a:solidFill>
+                <a:latin typeface="Times New Roman"/>
+              </a:rPr>
+              <a:t>[3] Yuan et al. Self-Rewarding Language Models. arXiv:2401.10020 (v3, 2025), Meta + NYU.</a:t>
+            </a:r>
+          </a:p>
+        </p:txBody>
+      </p:sp>
+      <p:sp>
+        <p:nvSpPr>
+          <p:cNvPr id="6" name="TextBox 5"/>
+          <p:cNvSpPr txBox="1"/>
+          <p:nvPr/>
+        </p:nvSpPr>
+        <p:spPr>
+          <a:xfrm>
+            <a:off x="274320" y="6446520"/>
+            <a:ext cx="1828800" cy="365760"/>
+          </a:xfrm>
+          <a:prstGeom prst="rect">
+            <a:avLst/>
+          </a:prstGeom>
+          <a:noFill/>
+        </p:spPr>
+        <p:txBody>
+          <a:bodyPr wrap="none">
+            <a:spAutoFit/>
+          </a:bodyPr>
+          <a:lstStyle/>
+          <a:p>
+            <a:r>
+              <a:rPr sz="1000">
+                <a:solidFill>
+                  <a:srgbClr val="808080"/>
+                </a:solidFill>
+              </a:rPr>
+              <a:t>2026/4/27</a:t>
+            </a:r>
+          </a:p>
+        </p:txBody>
+      </p:sp>
+      <p:sp>
+        <p:nvSpPr>
+          <p:cNvPr id="7" name="TextBox 6"/>
+          <p:cNvSpPr txBox="1"/>
+          <p:nvPr/>
+        </p:nvSpPr>
+        <p:spPr>
+          <a:xfrm>
+            <a:off x="3200400" y="6446520"/>
+            <a:ext cx="6400800" cy="457200"/>
+          </a:xfrm>
+          <a:prstGeom prst="rect">
+            <a:avLst/>
+          </a:prstGeom>
+          <a:noFill/>
+        </p:spPr>
+        <p:txBody>
+          <a:bodyPr wrap="square">
+            <a:spAutoFit/>
+          </a:bodyPr>
+          <a:lstStyle/>
+          <a:p>
+            <a:pPr algn="ctr"/>
+            <a:r>
+              <a:rPr sz="900">
+                <a:solidFill>
+                  <a:srgbClr val="808080"/>
+                </a:solidFill>
+              </a:rPr>
+              <a:t>Security and Artificial Intelligence Laboratory  (SAILY) Lab,</a:t>
+            </a:r>
+          </a:p>
+          <a:p>
+            <a:pPr algn="ctr"/>
+            <a:r>
+              <a:rPr sz="900">
+                <a:solidFill>
+                  <a:srgbClr val="808080"/>
+                </a:solidFill>
+              </a:rPr>
+              <a:t>National Central University, Taoyuan, Taiwan</a:t>
+            </a:r>
+          </a:p>
+        </p:txBody>
+      </p:sp>
+      <p:sp>
+        <p:nvSpPr>
+          <p:cNvPr id="8" name="TextBox 7"/>
+          <p:cNvSpPr txBox="1"/>
+          <p:nvPr/>
+        </p:nvSpPr>
+        <p:spPr>
+          <a:xfrm>
+            <a:off x="11612880" y="6446520"/>
+            <a:ext cx="457200" cy="365760"/>
+          </a:xfrm>
+          <a:prstGeom prst="rect">
+            <a:avLst/>
+          </a:prstGeom>
+          <a:noFill/>
+        </p:spPr>
+        <p:txBody>
+          <a:bodyPr wrap="none">
+            <a:spAutoFit/>
+          </a:bodyPr>
+          <a:lstStyle/>
+          <a:p>
+            <a:pPr algn="r"/>
+            <a:r>
+              <a:rPr sz="1000">
+                <a:solidFill>
+                  <a:srgbClr val="808080"/>
+                </a:solidFill>
+              </a:rPr>
+              <a:t>8</a:t>
+            </a:r>
+          </a:p>
+        </p:txBody>
+      </p:sp>
+    </p:spTree>
+  </p:cSld>
+  <p:clrMapOvr>
+    <a:masterClrMapping/>
+  </p:clrMapOvr>
+</p:sld>
+</file>
+
+<file path=ppt/slides/slide9.xml><?xml version="1.0" encoding="utf-8"?>
+<p:sld xmlns:a="http://schemas.openxmlformats.org/drawingml/2006/main" xmlns:p="http://schemas.openxmlformats.org/presentationml/2006/main" xmlns:r="http://schemas.openxmlformats.org/officeDocument/2006/relationships">
+  <p:cSld>
+    <p:spTree>
+      <p:nvGrpSpPr>
+        <p:cNvPr id="1" name=""/>
+        <p:cNvGrpSpPr/>
+        <p:nvPr/>
+      </p:nvGrpSpPr>
+      <p:grpSpPr/>
+      <p:sp>
+        <p:nvSpPr>
+          <p:cNvPr id="2" name="TextBox 1"/>
+          <p:cNvSpPr txBox="1"/>
+          <p:nvPr/>
+        </p:nvSpPr>
+        <p:spPr>
+          <a:xfrm>
+            <a:off x="365760" y="228600"/>
+            <a:ext cx="11430000" cy="640080"/>
+          </a:xfrm>
+          <a:prstGeom prst="rect">
+            <a:avLst/>
+          </a:prstGeom>
+          <a:noFill/>
+        </p:spPr>
+        <p:txBody>
+          <a:bodyPr wrap="none">
+            <a:spAutoFit/>
+          </a:bodyPr>
+          <a:lstStyle/>
+          <a:p>
+            <a:r>
+              <a:rPr sz="3200" b="1">
+                <a:solidFill>
+                  <a:srgbClr val="1F1F1F"/>
+                </a:solidFill>
+                <a:latin typeface="Times New Roman"/>
+              </a:rPr>
+              <a:t>Work Comparison</a:t>
+            </a:r>
+          </a:p>
+        </p:txBody>
+      </p:sp>
+      <p:sp>
+        <p:nvSpPr>
+          <p:cNvPr id="3" name="Rectangle 2"/>
+          <p:cNvSpPr/>
+          <p:nvPr/>
+        </p:nvSpPr>
+        <p:spPr>
+          <a:xfrm>
+            <a:off x="365760" y="868680"/>
+            <a:ext cx="11430000" cy="25400"/>
+          </a:xfrm>
+          <a:prstGeom prst="rect">
+            <a:avLst/>
+          </a:prstGeom>
+          <a:solidFill>
+            <a:srgbClr val="8B1A1A"/>
+          </a:solidFill>
+          <a:ln>
+            <a:noFill/>
+          </a:ln>
+        </p:spPr>
+        <p:style>
+          <a:lnRef idx="1">
+            <a:schemeClr val="accent1"/>
+          </a:lnRef>
+          <a:fillRef idx="3">
+            <a:schemeClr val="accent1"/>
+          </a:fillRef>
+          <a:effectRef idx="2">
+            <a:schemeClr val="accent1"/>
+          </a:effectRef>
+          <a:fontRef idx="minor">
+            <a:schemeClr val="lt1"/>
+          </a:fontRef>
+        </p:style>
+        <p:txBody>
+          <a:bodyPr rtlCol="0" anchor="ctr"/>
+          <a:lstStyle/>
+          <a:p>
+            <a:pPr algn="ctr"/>
           </a:p>
         </p:txBody>
       </p:sp>
@@ -9354,41 +9710,11 @@
                 <a:tableStyleId>{5C22544A-7EE6-4342-B048-85BDC9FD1C3A}</a:tableStyleId>
               </a:tblPr>
               <a:tblGrid>
-                <a:gridCol w="2377440">
-                  <a:extLst>
-                    <a:ext uri="{9D8B030D-6E8A-4147-A177-3AD203B41FA5}">
-                      <a16:colId xmlns:a16="http://schemas.microsoft.com/office/drawing/2014/main" val="20000"/>
-                    </a:ext>
-                  </a:extLst>
-                </a:gridCol>
-                <a:gridCol w="2377440">
-                  <a:extLst>
-                    <a:ext uri="{9D8B030D-6E8A-4147-A177-3AD203B41FA5}">
-                      <a16:colId xmlns:a16="http://schemas.microsoft.com/office/drawing/2014/main" val="20001"/>
-                    </a:ext>
-                  </a:extLst>
-                </a:gridCol>
-                <a:gridCol w="2103120">
-                  <a:extLst>
-                    <a:ext uri="{9D8B030D-6E8A-4147-A177-3AD203B41FA5}">
-                      <a16:colId xmlns:a16="http://schemas.microsoft.com/office/drawing/2014/main" val="20002"/>
-                    </a:ext>
-                  </a:extLst>
-                </a:gridCol>
-                <a:gridCol w="2103120">
-                  <a:extLst>
-                    <a:ext uri="{9D8B030D-6E8A-4147-A177-3AD203B41FA5}">
-                      <a16:colId xmlns:a16="http://schemas.microsoft.com/office/drawing/2014/main" val="20003"/>
-                    </a:ext>
-                  </a:extLst>
-                </a:gridCol>
-                <a:gridCol w="2103120">
-                  <a:extLst>
-                    <a:ext uri="{9D8B030D-6E8A-4147-A177-3AD203B41FA5}">
-                      <a16:colId xmlns:a16="http://schemas.microsoft.com/office/drawing/2014/main" val="20004"/>
-                    </a:ext>
-                  </a:extLst>
-                </a:gridCol>
+                <a:gridCol w="2377440"/>
+                <a:gridCol w="2377440"/>
+                <a:gridCol w="2103120"/>
+                <a:gridCol w="2103120"/>
+                <a:gridCol w="2103120"/>
               </a:tblGrid>
               <a:tr h="685800">
                 <a:tc>
@@ -9506,11 +9832,6 @@
                     </a:solidFill>
                   </a:tcPr>
                 </a:tc>
-                <a:extLst>
-                  <a:ext uri="{0D108BD9-81ED-4DB2-BD59-A6C34878D82A}">
-                    <a16:rowId xmlns:a16="http://schemas.microsoft.com/office/drawing/2014/main" val="10000"/>
-                  </a:ext>
-                </a:extLst>
               </a:tr>
               <a:tr h="685800">
                 <a:tc>
@@ -9539,7 +9860,6 @@
                     <a:lstStyle/>
                     <a:p>
                       <a:pPr algn="ctr"/>
-                      <a:endParaRPr/>
                     </a:p>
                   </a:txBody>
                   <a:tcPr>
@@ -9574,7 +9894,6 @@
                     <a:lstStyle/>
                     <a:p>
                       <a:pPr algn="ctr"/>
-                      <a:endParaRPr/>
                     </a:p>
                   </a:txBody>
                   <a:tcPr>
@@ -9589,7 +9908,6 @@
                     <a:lstStyle/>
                     <a:p>
                       <a:pPr algn="ctr"/>
-                      <a:endParaRPr/>
                     </a:p>
                   </a:txBody>
                   <a:tcPr>
@@ -9598,11 +9916,6 @@
                     </a:solidFill>
                   </a:tcPr>
                 </a:tc>
-                <a:extLst>
-                  <a:ext uri="{0D108BD9-81ED-4DB2-BD59-A6C34878D82A}">
-                    <a16:rowId xmlns:a16="http://schemas.microsoft.com/office/drawing/2014/main" val="10001"/>
-                  </a:ext>
-                </a:extLst>
               </a:tr>
               <a:tr h="685800">
                 <a:tc>
@@ -9631,7 +9944,6 @@
                     <a:lstStyle/>
                     <a:p>
                       <a:pPr algn="ctr"/>
-                      <a:endParaRPr/>
                     </a:p>
                   </a:txBody>
                   <a:tcPr>
@@ -9666,7 +9978,6 @@
                     <a:lstStyle/>
                     <a:p>
                       <a:pPr algn="ctr"/>
-                      <a:endParaRPr/>
                     </a:p>
                   </a:txBody>
                   <a:tcPr>
@@ -9681,7 +9992,6 @@
                     <a:lstStyle/>
                     <a:p>
                       <a:pPr algn="ctr"/>
-                      <a:endParaRPr/>
                     </a:p>
                   </a:txBody>
                   <a:tcPr>
@@ -9690,11 +10000,6 @@
                     </a:solidFill>
                   </a:tcPr>
                 </a:tc>
-                <a:extLst>
-                  <a:ext uri="{0D108BD9-81ED-4DB2-BD59-A6C34878D82A}">
-                    <a16:rowId xmlns:a16="http://schemas.microsoft.com/office/drawing/2014/main" val="10002"/>
-                  </a:ext>
-                </a:extLst>
               </a:tr>
               <a:tr h="685800">
                 <a:tc>
@@ -9723,7 +10028,6 @@
                     <a:lstStyle/>
                     <a:p>
                       <a:pPr algn="ctr"/>
-                      <a:endParaRPr/>
                     </a:p>
                   </a:txBody>
                   <a:tcPr>
@@ -9758,7 +10062,6 @@
                     <a:lstStyle/>
                     <a:p>
                       <a:pPr algn="ctr"/>
-                      <a:endParaRPr/>
                     </a:p>
                   </a:txBody>
                   <a:tcPr>
@@ -9773,7 +10076,6 @@
                     <a:lstStyle/>
                     <a:p>
                       <a:pPr algn="ctr"/>
-                      <a:endParaRPr/>
                     </a:p>
                   </a:txBody>
                   <a:tcPr>
@@ -9782,11 +10084,6 @@
                     </a:solidFill>
                   </a:tcPr>
                 </a:tc>
-                <a:extLst>
-                  <a:ext uri="{0D108BD9-81ED-4DB2-BD59-A6C34878D82A}">
-                    <a16:rowId xmlns:a16="http://schemas.microsoft.com/office/drawing/2014/main" val="10003"/>
-                  </a:ext>
-                </a:extLst>
               </a:tr>
               <a:tr h="685800">
                 <a:tc>
@@ -9815,7 +10112,6 @@
                     <a:lstStyle/>
                     <a:p>
                       <a:pPr algn="ctr"/>
-                      <a:endParaRPr/>
                     </a:p>
                   </a:txBody>
                   <a:tcPr>
@@ -9830,7 +10126,6 @@
                     <a:lstStyle/>
                     <a:p>
                       <a:pPr algn="ctr"/>
-                      <a:endParaRPr/>
                     </a:p>
                   </a:txBody>
                   <a:tcPr>
@@ -9865,7 +10160,6 @@
                     <a:lstStyle/>
                     <a:p>
                       <a:pPr algn="ctr"/>
-                      <a:endParaRPr/>
                     </a:p>
                   </a:txBody>
                   <a:tcPr>
@@ -9874,11 +10168,6 @@
                     </a:solidFill>
                   </a:tcPr>
                 </a:tc>
-                <a:extLst>
-                  <a:ext uri="{0D108BD9-81ED-4DB2-BD59-A6C34878D82A}">
-                    <a16:rowId xmlns:a16="http://schemas.microsoft.com/office/drawing/2014/main" val="10004"/>
-                  </a:ext>
-                </a:extLst>
               </a:tr>
               <a:tr h="685800">
                 <a:tc>
@@ -9981,11 +10270,6 @@
                     </a:solidFill>
                   </a:tcPr>
                 </a:tc>
-                <a:extLst>
-                  <a:ext uri="{0D108BD9-81ED-4DB2-BD59-A6C34878D82A}">
-                    <a16:rowId xmlns:a16="http://schemas.microsoft.com/office/drawing/2014/main" val="10005"/>
-                  </a:ext>
-                </a:extLst>
               </a:tr>
             </a:tbl>
           </a:graphicData>
@@ -10060,6 +10344,51 @@
       </p:sp>
       <p:sp>
         <p:nvSpPr>
+          <p:cNvPr id="8" name="TextBox 7"/>
+          <p:cNvSpPr txBox="1"/>
+          <p:nvPr/>
+        </p:nvSpPr>
+        <p:spPr>
+          <a:xfrm>
+            <a:off x="3200400" y="6446520"/>
+            <a:ext cx="6400800" cy="457200"/>
+          </a:xfrm>
+          <a:prstGeom prst="rect">
+            <a:avLst/>
+          </a:prstGeom>
+          <a:noFill/>
+        </p:spPr>
+        <p:txBody>
+          <a:bodyPr wrap="square">
+            <a:spAutoFit/>
+          </a:bodyPr>
+          <a:lstStyle/>
+          <a:p>
+            <a:pPr algn="ctr"/>
+            <a:r>
+              <a:rPr sz="900">
+                <a:solidFill>
+                  <a:srgbClr val="808080"/>
+                </a:solidFill>
+              </a:rPr>
+              <a:t>Security and Artificial Intelligence Laboratory  (SAILY) Lab,</a:t>
+            </a:r>
+          </a:p>
+          <a:p>
+            <a:pPr algn="ctr"/>
+            <a:r>
+              <a:rPr sz="900">
+                <a:solidFill>
+                  <a:srgbClr val="808080"/>
+                </a:solidFill>
+              </a:rPr>
+              <a:t>National Central University, Taoyuan, Taiwan</a:t>
+            </a:r>
+          </a:p>
+        </p:txBody>
+      </p:sp>
+      <p:sp>
+        <p:nvSpPr>
           <p:cNvPr id="9" name="TextBox 8"/>
           <p:cNvSpPr txBox="1"/>
           <p:nvPr/>
@@ -10087,246 +10416,7 @@
                   <a:srgbClr val="808080"/>
                 </a:solidFill>
               </a:rPr>
-              <a:t>8</a:t>
-            </a:r>
-          </a:p>
-        </p:txBody>
-      </p:sp>
-      <p:sp>
-        <p:nvSpPr>
-          <p:cNvPr id="10" name="TextBox 5">
-            <a:extLst>
-              <a:ext uri="{FF2B5EF4-FFF2-40B4-BE49-F238E27FC236}">
-                <a16:creationId xmlns:a16="http://schemas.microsoft.com/office/drawing/2014/main" id="{5A4504B8-CE4D-6E06-725D-765E97D49152}"/>
-              </a:ext>
-            </a:extLst>
-          </p:cNvPr>
-          <p:cNvSpPr txBox="1"/>
-          <p:nvPr/>
-        </p:nvSpPr>
-        <p:spPr>
-          <a:xfrm>
-            <a:off x="3200400" y="6446520"/>
-            <a:ext cx="6400800" cy="369332"/>
-          </a:xfrm>
-          <a:prstGeom prst="rect">
-            <a:avLst/>
-          </a:prstGeom>
-          <a:noFill/>
-        </p:spPr>
-        <p:txBody>
-          <a:bodyPr wrap="square">
-            <a:spAutoFit/>
-          </a:bodyPr>
-          <a:lstStyle/>
-          <a:p>
-            <a:pPr algn="ctr"/>
-            <a:r>
-              <a:rPr lang="en-US" altLang="zh-TW" sz="900" dirty="0">
-                <a:solidFill>
-                  <a:srgbClr val="808080"/>
-                </a:solidFill>
-              </a:rPr>
-              <a:t>Department of Information Management,</a:t>
-            </a:r>
-          </a:p>
-          <a:p>
-            <a:pPr algn="ctr"/>
-            <a:r>
-              <a:rPr sz="900" dirty="0">
-                <a:solidFill>
-                  <a:srgbClr val="808080"/>
-                </a:solidFill>
-              </a:rPr>
-              <a:t>National Central University, Taoyuan, Taiwan</a:t>
-            </a:r>
-          </a:p>
-        </p:txBody>
-      </p:sp>
-    </p:spTree>
-  </p:cSld>
-  <p:clrMapOvr>
-    <a:masterClrMapping/>
-  </p:clrMapOvr>
-</p:sld>
-</file>
-
-<file path=ppt/slides/slide9.xml><?xml version="1.0" encoding="utf-8"?>
-<p:sld xmlns:a="http://schemas.openxmlformats.org/drawingml/2006/main" xmlns:r="http://schemas.openxmlformats.org/officeDocument/2006/relationships" xmlns:p="http://schemas.openxmlformats.org/presentationml/2006/main">
-  <p:cSld>
-    <p:spTree>
-      <p:nvGrpSpPr>
-        <p:cNvPr id="1" name=""/>
-        <p:cNvGrpSpPr/>
-        <p:nvPr/>
-      </p:nvGrpSpPr>
-      <p:grpSpPr>
-        <a:xfrm>
-          <a:off x="0" y="0"/>
-          <a:ext cx="0" cy="0"/>
-          <a:chOff x="0" y="0"/>
-          <a:chExt cx="0" cy="0"/>
-        </a:xfrm>
-      </p:grpSpPr>
-      <p:sp>
-        <p:nvSpPr>
-          <p:cNvPr id="2" name="TextBox 1"/>
-          <p:cNvSpPr txBox="1"/>
-          <p:nvPr/>
-        </p:nvSpPr>
-        <p:spPr>
-          <a:xfrm>
-            <a:off x="457200" y="2560320"/>
-            <a:ext cx="11247120" cy="1828800"/>
-          </a:xfrm>
-          <a:prstGeom prst="rect">
-            <a:avLst/>
-          </a:prstGeom>
-          <a:noFill/>
-        </p:spPr>
-        <p:txBody>
-          <a:bodyPr wrap="square">
-            <a:spAutoFit/>
-          </a:bodyPr>
-          <a:lstStyle/>
-          <a:p>
-            <a:pPr algn="ctr"/>
-            <a:r>
-              <a:rPr sz="3200" b="1">
-                <a:solidFill>
-                  <a:srgbClr val="1F1F1F"/>
-                </a:solidFill>
-                <a:latin typeface="Times New Roman"/>
-              </a:rPr>
-              <a:t>SimLens: Distillation + RLAIH for</a:t>
-            </a:r>
-            <a:br/>
-            <a:r>
-              <a:rPr sz="3200" b="1">
-                <a:solidFill>
-                  <a:srgbClr val="1F1F1F"/>
-                </a:solidFill>
-                <a:latin typeface="Times New Roman"/>
-              </a:rPr>
-              <a:t>Segment-Level Persona Reaction Generation</a:t>
-            </a:r>
-          </a:p>
-        </p:txBody>
-      </p:sp>
-      <p:sp>
-        <p:nvSpPr>
-          <p:cNvPr id="3" name="TextBox 2"/>
-          <p:cNvSpPr txBox="1"/>
-          <p:nvPr/>
-        </p:nvSpPr>
-        <p:spPr>
-          <a:xfrm>
-            <a:off x="274320" y="6446520"/>
-            <a:ext cx="1828800" cy="365760"/>
-          </a:xfrm>
-          <a:prstGeom prst="rect">
-            <a:avLst/>
-          </a:prstGeom>
-          <a:noFill/>
-        </p:spPr>
-        <p:txBody>
-          <a:bodyPr wrap="none">
-            <a:spAutoFit/>
-          </a:bodyPr>
-          <a:lstStyle/>
-          <a:p>
-            <a:r>
-              <a:rPr sz="1000">
-                <a:solidFill>
-                  <a:srgbClr val="808080"/>
-                </a:solidFill>
-              </a:rPr>
-              <a:t>2026/4/27</a:t>
-            </a:r>
-          </a:p>
-        </p:txBody>
-      </p:sp>
-      <p:sp>
-        <p:nvSpPr>
-          <p:cNvPr id="5" name="TextBox 4"/>
-          <p:cNvSpPr txBox="1"/>
-          <p:nvPr/>
-        </p:nvSpPr>
-        <p:spPr>
-          <a:xfrm>
-            <a:off x="11612880" y="6446520"/>
-            <a:ext cx="457200" cy="365760"/>
-          </a:xfrm>
-          <a:prstGeom prst="rect">
-            <a:avLst/>
-          </a:prstGeom>
-          <a:noFill/>
-        </p:spPr>
-        <p:txBody>
-          <a:bodyPr wrap="none">
-            <a:spAutoFit/>
-          </a:bodyPr>
-          <a:lstStyle/>
-          <a:p>
-            <a:pPr algn="r"/>
-            <a:r>
-              <a:rPr sz="1000">
-                <a:solidFill>
-                  <a:srgbClr val="808080"/>
-                </a:solidFill>
-              </a:rPr>
               <a:t>9</a:t>
-            </a:r>
-          </a:p>
-        </p:txBody>
-      </p:sp>
-      <p:sp>
-        <p:nvSpPr>
-          <p:cNvPr id="6" name="TextBox 5">
-            <a:extLst>
-              <a:ext uri="{FF2B5EF4-FFF2-40B4-BE49-F238E27FC236}">
-                <a16:creationId xmlns:a16="http://schemas.microsoft.com/office/drawing/2014/main" id="{8750AD1A-AF44-A520-4ED7-CC6F5C8C13FE}"/>
-              </a:ext>
-            </a:extLst>
-          </p:cNvPr>
-          <p:cNvSpPr txBox="1"/>
-          <p:nvPr/>
-        </p:nvSpPr>
-        <p:spPr>
-          <a:xfrm>
-            <a:off x="3200400" y="6446520"/>
-            <a:ext cx="6400800" cy="369332"/>
-          </a:xfrm>
-          <a:prstGeom prst="rect">
-            <a:avLst/>
-          </a:prstGeom>
-          <a:noFill/>
-        </p:spPr>
-        <p:txBody>
-          <a:bodyPr wrap="square">
-            <a:spAutoFit/>
-          </a:bodyPr>
-          <a:lstStyle/>
-          <a:p>
-            <a:pPr algn="ctr"/>
-            <a:r>
-              <a:rPr lang="en-US" altLang="zh-TW" sz="900" dirty="0">
-                <a:solidFill>
-                  <a:srgbClr val="808080"/>
-                </a:solidFill>
-              </a:rPr>
-              <a:t>Department of Information Management,</a:t>
-            </a:r>
-          </a:p>
-          <a:p>
-            <a:pPr algn="ctr"/>
-            <a:r>
-              <a:rPr sz="900" dirty="0">
-                <a:solidFill>
-                  <a:srgbClr val="808080"/>
-                </a:solidFill>
-              </a:rPr>
-              <a:t>National Central University, Taoyuan, Taiwan</a:t>
             </a:r>
           </a:p>
         </p:txBody>

--- a/SimLens_Proposal_2026-04-27.pptx
+++ b/SimLens_Proposal_2026-04-27.pptx
@@ -5,25 +5,25 @@
     <p:sldMasterId id="2147483648" r:id="rId1"/>
   </p:sldMasterIdLst>
   <p:sldIdLst>
-    <p:sldId id="256" r:id="rId7"/>
-    <p:sldId id="257" r:id="rId8"/>
-    <p:sldId id="258" r:id="rId9"/>
-    <p:sldId id="259" r:id="rId10"/>
-    <p:sldId id="260" r:id="rId11"/>
-    <p:sldId id="261" r:id="rId12"/>
-    <p:sldId id="262" r:id="rId13"/>
-    <p:sldId id="263" r:id="rId14"/>
-    <p:sldId id="264" r:id="rId15"/>
-    <p:sldId id="265" r:id="rId16"/>
-    <p:sldId id="266" r:id="rId17"/>
-    <p:sldId id="267" r:id="rId18"/>
-    <p:sldId id="268" r:id="rId19"/>
-    <p:sldId id="269" r:id="rId20"/>
-    <p:sldId id="270" r:id="rId21"/>
-    <p:sldId id="271" r:id="rId22"/>
-    <p:sldId id="272" r:id="rId23"/>
+    <p:sldId id="256" r:id="rId2"/>
+    <p:sldId id="257" r:id="rId3"/>
+    <p:sldId id="258" r:id="rId4"/>
+    <p:sldId id="259" r:id="rId5"/>
+    <p:sldId id="260" r:id="rId6"/>
+    <p:sldId id="261" r:id="rId7"/>
+    <p:sldId id="262" r:id="rId8"/>
+    <p:sldId id="263" r:id="rId9"/>
+    <p:sldId id="264" r:id="rId10"/>
+    <p:sldId id="265" r:id="rId11"/>
+    <p:sldId id="266" r:id="rId12"/>
+    <p:sldId id="267" r:id="rId13"/>
+    <p:sldId id="268" r:id="rId14"/>
+    <p:sldId id="269" r:id="rId15"/>
+    <p:sldId id="270" r:id="rId16"/>
+    <p:sldId id="271" r:id="rId17"/>
+    <p:sldId id="272" r:id="rId18"/>
   </p:sldIdLst>
-  <p:sldSz cx="12191695" cy="6858000" type="screen4x3"/>
+  <p:sldSz cx="12192000" cy="6858000"/>
   <p:notesSz cx="6858000" cy="9144000"/>
   <p:defaultTextStyle>
     <a:defPPr>
@@ -120,6 +120,22 @@
       </a:defRPr>
     </a:lvl9pPr>
   </p:defaultTextStyle>
+  <p:extLst>
+    <p:ext uri="{EFAFB233-063F-42B5-8137-9DF3F51BA10A}">
+      <p15:sldGuideLst xmlns:p15="http://schemas.microsoft.com/office/powerpoint/2012/main">
+        <p15:guide id="1" orient="horz" pos="2160">
+          <p15:clr>
+            <a:srgbClr val="A4A3A4"/>
+          </p15:clr>
+        </p15:guide>
+        <p15:guide id="2" pos="2880">
+          <p15:clr>
+            <a:srgbClr val="A4A3A4"/>
+          </p15:clr>
+        </p15:guide>
+      </p15:sldGuideLst>
+    </p:ext>
+  </p:extLst>
 </p:presentation>
 </file>
 
@@ -161,10 +177,9 @@
           <a:lstStyle/>
           <a:p>
             <a:r>
-              <a:rPr lang="en-US" smtClean="0"/>
+              <a:rPr lang="en-US"/>
               <a:t>Click to edit Master title style</a:t>
             </a:r>
-            <a:endParaRPr lang="en-US"/>
           </a:p>
         </p:txBody>
       </p:sp>
@@ -280,10 +295,9 @@
           </a:lstStyle>
           <a:p>
             <a:r>
-              <a:rPr lang="en-US" smtClean="0"/>
+              <a:rPr lang="en-US"/>
               <a:t>Click to edit Master subtitle style</a:t>
             </a:r>
-            <a:endParaRPr lang="en-US"/>
           </a:p>
         </p:txBody>
       </p:sp>
@@ -304,7 +318,7 @@
           <a:p>
             <a:fld id="{5BCAD085-E8A6-8845-BD4E-CB4CCA059FC4}" type="datetimeFigureOut">
               <a:rPr lang="en-US" smtClean="0"/>
-              <a:t>1/27/13</a:t>
+              <a:t>4/27/2026</a:t>
             </a:fld>
             <a:endParaRPr lang="en-US"/>
           </a:p>
@@ -398,10 +412,9 @@
           <a:lstStyle/>
           <a:p>
             <a:r>
-              <a:rPr lang="en-US" smtClean="0"/>
+              <a:rPr lang="en-US"/>
               <a:t>Click to edit Master title style</a:t>
             </a:r>
-            <a:endParaRPr lang="en-US"/>
           </a:p>
         </p:txBody>
       </p:sp>
@@ -422,38 +435,37 @@
           <a:p>
             <a:pPr lvl="0"/>
             <a:r>
-              <a:rPr lang="en-US" smtClean="0"/>
+              <a:rPr lang="en-US"/>
               <a:t>Click to edit Master text styles</a:t>
             </a:r>
           </a:p>
           <a:p>
             <a:pPr lvl="1"/>
             <a:r>
-              <a:rPr lang="en-US" smtClean="0"/>
+              <a:rPr lang="en-US"/>
               <a:t>Second level</a:t>
             </a:r>
           </a:p>
           <a:p>
             <a:pPr lvl="2"/>
             <a:r>
-              <a:rPr lang="en-US" smtClean="0"/>
+              <a:rPr lang="en-US"/>
               <a:t>Third level</a:t>
             </a:r>
           </a:p>
           <a:p>
             <a:pPr lvl="3"/>
             <a:r>
-              <a:rPr lang="en-US" smtClean="0"/>
+              <a:rPr lang="en-US"/>
               <a:t>Fourth level</a:t>
             </a:r>
           </a:p>
           <a:p>
             <a:pPr lvl="4"/>
             <a:r>
-              <a:rPr lang="en-US" smtClean="0"/>
+              <a:rPr lang="en-US"/>
               <a:t>Fifth level</a:t>
             </a:r>
-            <a:endParaRPr lang="en-US"/>
           </a:p>
         </p:txBody>
       </p:sp>
@@ -474,7 +486,7 @@
           <a:p>
             <a:fld id="{5BCAD085-E8A6-8845-BD4E-CB4CCA059FC4}" type="datetimeFigureOut">
               <a:rPr lang="en-US" smtClean="0"/>
-              <a:t>1/27/13</a:t>
+              <a:t>4/27/2026</a:t>
             </a:fld>
             <a:endParaRPr lang="en-US"/>
           </a:p>
@@ -573,10 +585,9 @@
           <a:lstStyle/>
           <a:p>
             <a:r>
-              <a:rPr lang="en-US" smtClean="0"/>
+              <a:rPr lang="en-US"/>
               <a:t>Click to edit Master title style</a:t>
             </a:r>
-            <a:endParaRPr lang="en-US"/>
           </a:p>
         </p:txBody>
       </p:sp>
@@ -602,38 +613,37 @@
           <a:p>
             <a:pPr lvl="0"/>
             <a:r>
-              <a:rPr lang="en-US" smtClean="0"/>
+              <a:rPr lang="en-US"/>
               <a:t>Click to edit Master text styles</a:t>
             </a:r>
           </a:p>
           <a:p>
             <a:pPr lvl="1"/>
             <a:r>
-              <a:rPr lang="en-US" smtClean="0"/>
+              <a:rPr lang="en-US"/>
               <a:t>Second level</a:t>
             </a:r>
           </a:p>
           <a:p>
             <a:pPr lvl="2"/>
             <a:r>
-              <a:rPr lang="en-US" smtClean="0"/>
+              <a:rPr lang="en-US"/>
               <a:t>Third level</a:t>
             </a:r>
           </a:p>
           <a:p>
             <a:pPr lvl="3"/>
             <a:r>
-              <a:rPr lang="en-US" smtClean="0"/>
+              <a:rPr lang="en-US"/>
               <a:t>Fourth level</a:t>
             </a:r>
           </a:p>
           <a:p>
             <a:pPr lvl="4"/>
             <a:r>
-              <a:rPr lang="en-US" smtClean="0"/>
+              <a:rPr lang="en-US"/>
               <a:t>Fifth level</a:t>
             </a:r>
-            <a:endParaRPr lang="en-US"/>
           </a:p>
         </p:txBody>
       </p:sp>
@@ -654,7 +664,7 @@
           <a:p>
             <a:fld id="{5BCAD085-E8A6-8845-BD4E-CB4CCA059FC4}" type="datetimeFigureOut">
               <a:rPr lang="en-US" smtClean="0"/>
-              <a:t>1/27/13</a:t>
+              <a:t>4/27/2026</a:t>
             </a:fld>
             <a:endParaRPr lang="en-US"/>
           </a:p>
@@ -748,10 +758,9 @@
           <a:lstStyle/>
           <a:p>
             <a:r>
-              <a:rPr lang="en-US" smtClean="0"/>
+              <a:rPr lang="en-US"/>
               <a:t>Click to edit Master title style</a:t>
             </a:r>
-            <a:endParaRPr lang="en-US"/>
           </a:p>
         </p:txBody>
       </p:sp>
@@ -772,38 +781,37 @@
           <a:p>
             <a:pPr lvl="0"/>
             <a:r>
-              <a:rPr lang="en-US" smtClean="0"/>
+              <a:rPr lang="en-US"/>
               <a:t>Click to edit Master text styles</a:t>
             </a:r>
           </a:p>
           <a:p>
             <a:pPr lvl="1"/>
             <a:r>
-              <a:rPr lang="en-US" smtClean="0"/>
+              <a:rPr lang="en-US"/>
               <a:t>Second level</a:t>
             </a:r>
           </a:p>
           <a:p>
             <a:pPr lvl="2"/>
             <a:r>
-              <a:rPr lang="en-US" smtClean="0"/>
+              <a:rPr lang="en-US"/>
               <a:t>Third level</a:t>
             </a:r>
           </a:p>
           <a:p>
             <a:pPr lvl="3"/>
             <a:r>
-              <a:rPr lang="en-US" smtClean="0"/>
+              <a:rPr lang="en-US"/>
               <a:t>Fourth level</a:t>
             </a:r>
           </a:p>
           <a:p>
             <a:pPr lvl="4"/>
             <a:r>
-              <a:rPr lang="en-US" smtClean="0"/>
+              <a:rPr lang="en-US"/>
               <a:t>Fifth level</a:t>
             </a:r>
-            <a:endParaRPr lang="en-US"/>
           </a:p>
         </p:txBody>
       </p:sp>
@@ -824,7 +832,7 @@
           <a:p>
             <a:fld id="{5BCAD085-E8A6-8845-BD4E-CB4CCA059FC4}" type="datetimeFigureOut">
               <a:rPr lang="en-US" smtClean="0"/>
-              <a:t>1/27/13</a:t>
+              <a:t>4/27/2026</a:t>
             </a:fld>
             <a:endParaRPr lang="en-US"/>
           </a:p>
@@ -927,10 +935,9 @@
           </a:lstStyle>
           <a:p>
             <a:r>
-              <a:rPr lang="en-US" smtClean="0"/>
+              <a:rPr lang="en-US"/>
               <a:t>Click to edit Master title style</a:t>
             </a:r>
-            <a:endParaRPr lang="en-US"/>
           </a:p>
         </p:txBody>
       </p:sp>
@@ -1047,7 +1054,7 @@
           <a:p>
             <a:pPr lvl="0"/>
             <a:r>
-              <a:rPr lang="en-US" smtClean="0"/>
+              <a:rPr lang="en-US"/>
               <a:t>Click to edit Master text styles</a:t>
             </a:r>
           </a:p>
@@ -1070,7 +1077,7 @@
           <a:p>
             <a:fld id="{5BCAD085-E8A6-8845-BD4E-CB4CCA059FC4}" type="datetimeFigureOut">
               <a:rPr lang="en-US" smtClean="0"/>
-              <a:t>1/27/13</a:t>
+              <a:t>4/27/2026</a:t>
             </a:fld>
             <a:endParaRPr lang="en-US"/>
           </a:p>
@@ -1164,10 +1171,9 @@
           <a:lstStyle/>
           <a:p>
             <a:r>
-              <a:rPr lang="en-US" smtClean="0"/>
+              <a:rPr lang="en-US"/>
               <a:t>Click to edit Master title style</a:t>
             </a:r>
-            <a:endParaRPr lang="en-US"/>
           </a:p>
         </p:txBody>
       </p:sp>
@@ -1221,38 +1227,37 @@
           <a:p>
             <a:pPr lvl="0"/>
             <a:r>
-              <a:rPr lang="en-US" smtClean="0"/>
+              <a:rPr lang="en-US"/>
               <a:t>Click to edit Master text styles</a:t>
             </a:r>
           </a:p>
           <a:p>
             <a:pPr lvl="1"/>
             <a:r>
-              <a:rPr lang="en-US" smtClean="0"/>
+              <a:rPr lang="en-US"/>
               <a:t>Second level</a:t>
             </a:r>
           </a:p>
           <a:p>
             <a:pPr lvl="2"/>
             <a:r>
-              <a:rPr lang="en-US" smtClean="0"/>
+              <a:rPr lang="en-US"/>
               <a:t>Third level</a:t>
             </a:r>
           </a:p>
           <a:p>
             <a:pPr lvl="3"/>
             <a:r>
-              <a:rPr lang="en-US" smtClean="0"/>
+              <a:rPr lang="en-US"/>
               <a:t>Fourth level</a:t>
             </a:r>
           </a:p>
           <a:p>
             <a:pPr lvl="4"/>
             <a:r>
-              <a:rPr lang="en-US" smtClean="0"/>
+              <a:rPr lang="en-US"/>
               <a:t>Fifth level</a:t>
             </a:r>
-            <a:endParaRPr lang="en-US"/>
           </a:p>
         </p:txBody>
       </p:sp>
@@ -1306,38 +1311,37 @@
           <a:p>
             <a:pPr lvl="0"/>
             <a:r>
-              <a:rPr lang="en-US" smtClean="0"/>
+              <a:rPr lang="en-US"/>
               <a:t>Click to edit Master text styles</a:t>
             </a:r>
           </a:p>
           <a:p>
             <a:pPr lvl="1"/>
             <a:r>
-              <a:rPr lang="en-US" smtClean="0"/>
+              <a:rPr lang="en-US"/>
               <a:t>Second level</a:t>
             </a:r>
           </a:p>
           <a:p>
             <a:pPr lvl="2"/>
             <a:r>
-              <a:rPr lang="en-US" smtClean="0"/>
+              <a:rPr lang="en-US"/>
               <a:t>Third level</a:t>
             </a:r>
           </a:p>
           <a:p>
             <a:pPr lvl="3"/>
             <a:r>
-              <a:rPr lang="en-US" smtClean="0"/>
+              <a:rPr lang="en-US"/>
               <a:t>Fourth level</a:t>
             </a:r>
           </a:p>
           <a:p>
             <a:pPr lvl="4"/>
             <a:r>
-              <a:rPr lang="en-US" smtClean="0"/>
+              <a:rPr lang="en-US"/>
               <a:t>Fifth level</a:t>
             </a:r>
-            <a:endParaRPr lang="en-US"/>
           </a:p>
         </p:txBody>
       </p:sp>
@@ -1358,7 +1362,7 @@
           <a:p>
             <a:fld id="{5BCAD085-E8A6-8845-BD4E-CB4CCA059FC4}" type="datetimeFigureOut">
               <a:rPr lang="en-US" smtClean="0"/>
-              <a:t>1/27/13</a:t>
+              <a:t>4/27/2026</a:t>
             </a:fld>
             <a:endParaRPr lang="en-US"/>
           </a:p>
@@ -1456,10 +1460,9 @@
           </a:lstStyle>
           <a:p>
             <a:r>
-              <a:rPr lang="en-US" smtClean="0"/>
+              <a:rPr lang="en-US"/>
               <a:t>Click to edit Master title style</a:t>
             </a:r>
-            <a:endParaRPr lang="en-US"/>
           </a:p>
         </p:txBody>
       </p:sp>
@@ -1522,7 +1525,7 @@
           <a:p>
             <a:pPr lvl="0"/>
             <a:r>
-              <a:rPr lang="en-US" smtClean="0"/>
+              <a:rPr lang="en-US"/>
               <a:t>Click to edit Master text styles</a:t>
             </a:r>
           </a:p>
@@ -1578,38 +1581,37 @@
           <a:p>
             <a:pPr lvl="0"/>
             <a:r>
-              <a:rPr lang="en-US" smtClean="0"/>
+              <a:rPr lang="en-US"/>
               <a:t>Click to edit Master text styles</a:t>
             </a:r>
           </a:p>
           <a:p>
             <a:pPr lvl="1"/>
             <a:r>
-              <a:rPr lang="en-US" smtClean="0"/>
+              <a:rPr lang="en-US"/>
               <a:t>Second level</a:t>
             </a:r>
           </a:p>
           <a:p>
             <a:pPr lvl="2"/>
             <a:r>
-              <a:rPr lang="en-US" smtClean="0"/>
+              <a:rPr lang="en-US"/>
               <a:t>Third level</a:t>
             </a:r>
           </a:p>
           <a:p>
             <a:pPr lvl="3"/>
             <a:r>
-              <a:rPr lang="en-US" smtClean="0"/>
+              <a:rPr lang="en-US"/>
               <a:t>Fourth level</a:t>
             </a:r>
           </a:p>
           <a:p>
             <a:pPr lvl="4"/>
             <a:r>
-              <a:rPr lang="en-US" smtClean="0"/>
+              <a:rPr lang="en-US"/>
               <a:t>Fifth level</a:t>
             </a:r>
-            <a:endParaRPr lang="en-US"/>
           </a:p>
         </p:txBody>
       </p:sp>
@@ -1672,7 +1674,7 @@
           <a:p>
             <a:pPr lvl="0"/>
             <a:r>
-              <a:rPr lang="en-US" smtClean="0"/>
+              <a:rPr lang="en-US"/>
               <a:t>Click to edit Master text styles</a:t>
             </a:r>
           </a:p>
@@ -1728,38 +1730,37 @@
           <a:p>
             <a:pPr lvl="0"/>
             <a:r>
-              <a:rPr lang="en-US" smtClean="0"/>
+              <a:rPr lang="en-US"/>
               <a:t>Click to edit Master text styles</a:t>
             </a:r>
           </a:p>
           <a:p>
             <a:pPr lvl="1"/>
             <a:r>
-              <a:rPr lang="en-US" smtClean="0"/>
+              <a:rPr lang="en-US"/>
               <a:t>Second level</a:t>
             </a:r>
           </a:p>
           <a:p>
             <a:pPr lvl="2"/>
             <a:r>
-              <a:rPr lang="en-US" smtClean="0"/>
+              <a:rPr lang="en-US"/>
               <a:t>Third level</a:t>
             </a:r>
           </a:p>
           <a:p>
             <a:pPr lvl="3"/>
             <a:r>
-              <a:rPr lang="en-US" smtClean="0"/>
+              <a:rPr lang="en-US"/>
               <a:t>Fourth level</a:t>
             </a:r>
           </a:p>
           <a:p>
             <a:pPr lvl="4"/>
             <a:r>
-              <a:rPr lang="en-US" smtClean="0"/>
+              <a:rPr lang="en-US"/>
               <a:t>Fifth level</a:t>
             </a:r>
-            <a:endParaRPr lang="en-US"/>
           </a:p>
         </p:txBody>
       </p:sp>
@@ -1780,7 +1781,7 @@
           <a:p>
             <a:fld id="{5BCAD085-E8A6-8845-BD4E-CB4CCA059FC4}" type="datetimeFigureOut">
               <a:rPr lang="en-US" smtClean="0"/>
-              <a:t>1/27/13</a:t>
+              <a:t>4/27/2026</a:t>
             </a:fld>
             <a:endParaRPr lang="en-US"/>
           </a:p>
@@ -1874,10 +1875,9 @@
           <a:lstStyle/>
           <a:p>
             <a:r>
-              <a:rPr lang="en-US" smtClean="0"/>
+              <a:rPr lang="en-US"/>
               <a:t>Click to edit Master title style</a:t>
             </a:r>
-            <a:endParaRPr lang="en-US"/>
           </a:p>
         </p:txBody>
       </p:sp>
@@ -1898,7 +1898,7 @@
           <a:p>
             <a:fld id="{5BCAD085-E8A6-8845-BD4E-CB4CCA059FC4}" type="datetimeFigureOut">
               <a:rPr lang="en-US" smtClean="0"/>
-              <a:t>1/27/13</a:t>
+              <a:t>4/27/2026</a:t>
             </a:fld>
             <a:endParaRPr lang="en-US"/>
           </a:p>
@@ -1993,7 +1993,7 @@
           <a:p>
             <a:fld id="{5BCAD085-E8A6-8845-BD4E-CB4CCA059FC4}" type="datetimeFigureOut">
               <a:rPr lang="en-US" smtClean="0"/>
-              <a:t>1/27/13</a:t>
+              <a:t>4/27/2026</a:t>
             </a:fld>
             <a:endParaRPr lang="en-US"/>
           </a:p>
@@ -2096,10 +2096,9 @@
           </a:lstStyle>
           <a:p>
             <a:r>
-              <a:rPr lang="en-US" smtClean="0"/>
+              <a:rPr lang="en-US"/>
               <a:t>Click to edit Master title style</a:t>
             </a:r>
-            <a:endParaRPr lang="en-US"/>
           </a:p>
         </p:txBody>
       </p:sp>
@@ -2153,38 +2152,37 @@
           <a:p>
             <a:pPr lvl="0"/>
             <a:r>
-              <a:rPr lang="en-US" smtClean="0"/>
+              <a:rPr lang="en-US"/>
               <a:t>Click to edit Master text styles</a:t>
             </a:r>
           </a:p>
           <a:p>
             <a:pPr lvl="1"/>
             <a:r>
-              <a:rPr lang="en-US" smtClean="0"/>
+              <a:rPr lang="en-US"/>
               <a:t>Second level</a:t>
             </a:r>
           </a:p>
           <a:p>
             <a:pPr lvl="2"/>
             <a:r>
-              <a:rPr lang="en-US" smtClean="0"/>
+              <a:rPr lang="en-US"/>
               <a:t>Third level</a:t>
             </a:r>
           </a:p>
           <a:p>
             <a:pPr lvl="3"/>
             <a:r>
-              <a:rPr lang="en-US" smtClean="0"/>
+              <a:rPr lang="en-US"/>
               <a:t>Fourth level</a:t>
             </a:r>
           </a:p>
           <a:p>
             <a:pPr lvl="4"/>
             <a:r>
-              <a:rPr lang="en-US" smtClean="0"/>
+              <a:rPr lang="en-US"/>
               <a:t>Fifth level</a:t>
             </a:r>
-            <a:endParaRPr lang="en-US"/>
           </a:p>
         </p:txBody>
       </p:sp>
@@ -2247,7 +2245,7 @@
           <a:p>
             <a:pPr lvl="0"/>
             <a:r>
-              <a:rPr lang="en-US" smtClean="0"/>
+              <a:rPr lang="en-US"/>
               <a:t>Click to edit Master text styles</a:t>
             </a:r>
           </a:p>
@@ -2270,7 +2268,7 @@
           <a:p>
             <a:fld id="{5BCAD085-E8A6-8845-BD4E-CB4CCA059FC4}" type="datetimeFigureOut">
               <a:rPr lang="en-US" smtClean="0"/>
-              <a:t>1/27/13</a:t>
+              <a:t>4/27/2026</a:t>
             </a:fld>
             <a:endParaRPr lang="en-US"/>
           </a:p>
@@ -2373,10 +2371,9 @@
           </a:lstStyle>
           <a:p>
             <a:r>
-              <a:rPr lang="en-US" smtClean="0"/>
+              <a:rPr lang="en-US"/>
               <a:t>Click to edit Master title style</a:t>
             </a:r>
-            <a:endParaRPr lang="en-US"/>
           </a:p>
         </p:txBody>
       </p:sp>
@@ -2500,7 +2497,7 @@
           <a:p>
             <a:pPr lvl="0"/>
             <a:r>
-              <a:rPr lang="en-US" smtClean="0"/>
+              <a:rPr lang="en-US"/>
               <a:t>Click to edit Master text styles</a:t>
             </a:r>
           </a:p>
@@ -2523,7 +2520,7 @@
           <a:p>
             <a:fld id="{5BCAD085-E8A6-8845-BD4E-CB4CCA059FC4}" type="datetimeFigureOut">
               <a:rPr lang="en-US" smtClean="0"/>
-              <a:t>1/27/13</a:t>
+              <a:t>4/27/2026</a:t>
             </a:fld>
             <a:endParaRPr lang="en-US"/>
           </a:p>
@@ -2632,10 +2629,9 @@
           <a:lstStyle/>
           <a:p>
             <a:r>
-              <a:rPr lang="en-US" smtClean="0"/>
+              <a:rPr lang="en-US"/>
               <a:t>Click to edit Master title style</a:t>
             </a:r>
-            <a:endParaRPr lang="en-US"/>
           </a:p>
         </p:txBody>
       </p:sp>
@@ -2666,38 +2662,37 @@
           <a:p>
             <a:pPr lvl="0"/>
             <a:r>
-              <a:rPr lang="en-US" smtClean="0"/>
+              <a:rPr lang="en-US"/>
               <a:t>Click to edit Master text styles</a:t>
             </a:r>
           </a:p>
           <a:p>
             <a:pPr lvl="1"/>
             <a:r>
-              <a:rPr lang="en-US" smtClean="0"/>
+              <a:rPr lang="en-US"/>
               <a:t>Second level</a:t>
             </a:r>
           </a:p>
           <a:p>
             <a:pPr lvl="2"/>
             <a:r>
-              <a:rPr lang="en-US" smtClean="0"/>
+              <a:rPr lang="en-US"/>
               <a:t>Third level</a:t>
             </a:r>
           </a:p>
           <a:p>
             <a:pPr lvl="3"/>
             <a:r>
-              <a:rPr lang="en-US" smtClean="0"/>
+              <a:rPr lang="en-US"/>
               <a:t>Fourth level</a:t>
             </a:r>
           </a:p>
           <a:p>
             <a:pPr lvl="4"/>
             <a:r>
-              <a:rPr lang="en-US" smtClean="0"/>
+              <a:rPr lang="en-US"/>
               <a:t>Fifth level</a:t>
             </a:r>
-            <a:endParaRPr lang="en-US"/>
           </a:p>
         </p:txBody>
       </p:sp>
@@ -2736,7 +2731,7 @@
           <a:p>
             <a:fld id="{5BCAD085-E8A6-8845-BD4E-CB4CCA059FC4}" type="datetimeFigureOut">
               <a:rPr lang="en-US" smtClean="0"/>
-              <a:t>1/27/13</a:t>
+              <a:t>4/27/2026</a:t>
             </a:fld>
             <a:endParaRPr lang="en-US"/>
           </a:p>
@@ -3095,7 +3090,7 @@
 </file>
 
 <file path=ppt/slides/slide1.xml><?xml version="1.0" encoding="utf-8"?>
-<p:sld xmlns:a="http://schemas.openxmlformats.org/drawingml/2006/main" xmlns:p="http://schemas.openxmlformats.org/presentationml/2006/main" xmlns:r="http://schemas.openxmlformats.org/officeDocument/2006/relationships">
+<p:sld xmlns:a="http://schemas.openxmlformats.org/drawingml/2006/main" xmlns:r="http://schemas.openxmlformats.org/officeDocument/2006/relationships" xmlns:p="http://schemas.openxmlformats.org/presentationml/2006/main">
   <p:cSld>
     <p:spTree>
       <p:nvGrpSpPr>
@@ -3103,7 +3098,14 @@
         <p:cNvGrpSpPr/>
         <p:nvPr/>
       </p:nvGrpSpPr>
-      <p:grpSpPr/>
+      <p:grpSpPr>
+        <a:xfrm>
+          <a:off x="0" y="0"/>
+          <a:ext cx="0" cy="0"/>
+          <a:chOff x="0" y="0"/>
+          <a:chExt cx="0" cy="0"/>
+        </a:xfrm>
+      </p:grpSpPr>
       <p:sp>
         <p:nvSpPr>
           <p:cNvPr id="2" name="TextBox 1"/>
@@ -3317,7 +3319,7 @@
 </file>
 
 <file path=ppt/slides/slide10.xml><?xml version="1.0" encoding="utf-8"?>
-<p:sld xmlns:a="http://schemas.openxmlformats.org/drawingml/2006/main" xmlns:p="http://schemas.openxmlformats.org/presentationml/2006/main" xmlns:r="http://schemas.openxmlformats.org/officeDocument/2006/relationships">
+<p:sld xmlns:a="http://schemas.openxmlformats.org/drawingml/2006/main" xmlns:r="http://schemas.openxmlformats.org/officeDocument/2006/relationships" xmlns:p="http://schemas.openxmlformats.org/presentationml/2006/main">
   <p:cSld>
     <p:spTree>
       <p:nvGrpSpPr>
@@ -3325,7 +3327,14 @@
         <p:cNvGrpSpPr/>
         <p:nvPr/>
       </p:nvGrpSpPr>
-      <p:grpSpPr/>
+      <p:grpSpPr>
+        <a:xfrm>
+          <a:off x="0" y="0"/>
+          <a:ext cx="0" cy="0"/>
+          <a:chOff x="0" y="0"/>
+          <a:chExt cx="0" cy="0"/>
+        </a:xfrm>
+      </p:grpSpPr>
       <p:sp>
         <p:nvSpPr>
           <p:cNvPr id="2" name="TextBox 1"/>
@@ -3492,7 +3501,7 @@
 </file>
 
 <file path=ppt/slides/slide11.xml><?xml version="1.0" encoding="utf-8"?>
-<p:sld xmlns:a="http://schemas.openxmlformats.org/drawingml/2006/main" xmlns:p="http://schemas.openxmlformats.org/presentationml/2006/main" xmlns:r="http://schemas.openxmlformats.org/officeDocument/2006/relationships">
+<p:sld xmlns:a="http://schemas.openxmlformats.org/drawingml/2006/main" xmlns:r="http://schemas.openxmlformats.org/officeDocument/2006/relationships" xmlns:p="http://schemas.openxmlformats.org/presentationml/2006/main">
   <p:cSld>
     <p:spTree>
       <p:nvGrpSpPr>
@@ -3500,7 +3509,14 @@
         <p:cNvGrpSpPr/>
         <p:nvPr/>
       </p:nvGrpSpPr>
-      <p:grpSpPr/>
+      <p:grpSpPr>
+        <a:xfrm>
+          <a:off x="0" y="0"/>
+          <a:ext cx="0" cy="0"/>
+          <a:chOff x="0" y="0"/>
+          <a:chExt cx="0" cy="0"/>
+        </a:xfrm>
+      </p:grpSpPr>
       <p:sp>
         <p:nvSpPr>
           <p:cNvPr id="2" name="TextBox 1"/>
@@ -3575,6 +3591,7 @@
           <a:lstStyle/>
           <a:p>
             <a:pPr algn="ctr"/>
+            <a:endParaRPr/>
           </a:p>
         </p:txBody>
       </p:sp>
@@ -3616,7 +3633,7 @@
           </a:fontRef>
         </p:style>
         <p:txBody>
-          <a:bodyPr rtlCol="0" anchor="ctr" wrap="square"/>
+          <a:bodyPr wrap="square" rtlCol="0" anchor="ctr"/>
           <a:lstStyle/>
           <a:p>
             <a:pPr algn="ctr"/>
@@ -3808,7 +3825,7 @@
 </file>
 
 <file path=ppt/slides/slide12.xml><?xml version="1.0" encoding="utf-8"?>
-<p:sld xmlns:a="http://schemas.openxmlformats.org/drawingml/2006/main" xmlns:p="http://schemas.openxmlformats.org/presentationml/2006/main" xmlns:r="http://schemas.openxmlformats.org/officeDocument/2006/relationships">
+<p:sld xmlns:a="http://schemas.openxmlformats.org/drawingml/2006/main" xmlns:r="http://schemas.openxmlformats.org/officeDocument/2006/relationships" xmlns:p="http://schemas.openxmlformats.org/presentationml/2006/main">
   <p:cSld>
     <p:spTree>
       <p:nvGrpSpPr>
@@ -3816,7 +3833,14 @@
         <p:cNvGrpSpPr/>
         <p:nvPr/>
       </p:nvGrpSpPr>
-      <p:grpSpPr/>
+      <p:grpSpPr>
+        <a:xfrm>
+          <a:off x="0" y="0"/>
+          <a:ext cx="0" cy="0"/>
+          <a:chOff x="0" y="0"/>
+          <a:chExt cx="0" cy="0"/>
+        </a:xfrm>
+      </p:grpSpPr>
       <p:sp>
         <p:nvSpPr>
           <p:cNvPr id="2" name="TextBox 1"/>
@@ -3891,6 +3915,7 @@
           <a:lstStyle/>
           <a:p>
             <a:pPr algn="ctr"/>
+            <a:endParaRPr/>
           </a:p>
         </p:txBody>
       </p:sp>
@@ -4214,7 +4239,7 @@
 </file>
 
 <file path=ppt/slides/slide13.xml><?xml version="1.0" encoding="utf-8"?>
-<p:sld xmlns:a="http://schemas.openxmlformats.org/drawingml/2006/main" xmlns:p="http://schemas.openxmlformats.org/presentationml/2006/main" xmlns:r="http://schemas.openxmlformats.org/officeDocument/2006/relationships">
+<p:sld xmlns:a="http://schemas.openxmlformats.org/drawingml/2006/main" xmlns:r="http://schemas.openxmlformats.org/officeDocument/2006/relationships" xmlns:p="http://schemas.openxmlformats.org/presentationml/2006/main">
   <p:cSld>
     <p:spTree>
       <p:nvGrpSpPr>
@@ -4222,7 +4247,14 @@
         <p:cNvGrpSpPr/>
         <p:nvPr/>
       </p:nvGrpSpPr>
-      <p:grpSpPr/>
+      <p:grpSpPr>
+        <a:xfrm>
+          <a:off x="0" y="0"/>
+          <a:ext cx="0" cy="0"/>
+          <a:chOff x="0" y="0"/>
+          <a:chExt cx="0" cy="0"/>
+        </a:xfrm>
+      </p:grpSpPr>
       <p:sp>
         <p:nvSpPr>
           <p:cNvPr id="2" name="TextBox 1"/>
@@ -4297,6 +4329,7 @@
           <a:lstStyle/>
           <a:p>
             <a:pPr algn="ctr"/>
+            <a:endParaRPr/>
           </a:p>
         </p:txBody>
       </p:sp>
@@ -4636,7 +4669,7 @@
 </file>
 
 <file path=ppt/slides/slide14.xml><?xml version="1.0" encoding="utf-8"?>
-<p:sld xmlns:a="http://schemas.openxmlformats.org/drawingml/2006/main" xmlns:p="http://schemas.openxmlformats.org/presentationml/2006/main" xmlns:r="http://schemas.openxmlformats.org/officeDocument/2006/relationships">
+<p:sld xmlns:a="http://schemas.openxmlformats.org/drawingml/2006/main" xmlns:r="http://schemas.openxmlformats.org/officeDocument/2006/relationships" xmlns:p="http://schemas.openxmlformats.org/presentationml/2006/main">
   <p:cSld>
     <p:spTree>
       <p:nvGrpSpPr>
@@ -4644,7 +4677,14 @@
         <p:cNvGrpSpPr/>
         <p:nvPr/>
       </p:nvGrpSpPr>
-      <p:grpSpPr/>
+      <p:grpSpPr>
+        <a:xfrm>
+          <a:off x="0" y="0"/>
+          <a:ext cx="0" cy="0"/>
+          <a:chOff x="0" y="0"/>
+          <a:chExt cx="0" cy="0"/>
+        </a:xfrm>
+      </p:grpSpPr>
       <p:sp>
         <p:nvSpPr>
           <p:cNvPr id="2" name="TextBox 1"/>
@@ -4719,6 +4759,7 @@
           <a:lstStyle/>
           <a:p>
             <a:pPr algn="ctr"/>
+            <a:endParaRPr/>
           </a:p>
         </p:txBody>
       </p:sp>
@@ -5042,7 +5083,7 @@
 </file>
 
 <file path=ppt/slides/slide15.xml><?xml version="1.0" encoding="utf-8"?>
-<p:sld xmlns:a="http://schemas.openxmlformats.org/drawingml/2006/main" xmlns:p="http://schemas.openxmlformats.org/presentationml/2006/main" xmlns:r="http://schemas.openxmlformats.org/officeDocument/2006/relationships">
+<p:sld xmlns:a="http://schemas.openxmlformats.org/drawingml/2006/main" xmlns:r="http://schemas.openxmlformats.org/officeDocument/2006/relationships" xmlns:p="http://schemas.openxmlformats.org/presentationml/2006/main">
   <p:cSld>
     <p:spTree>
       <p:nvGrpSpPr>
@@ -5050,7 +5091,14 @@
         <p:cNvGrpSpPr/>
         <p:nvPr/>
       </p:nvGrpSpPr>
-      <p:grpSpPr/>
+      <p:grpSpPr>
+        <a:xfrm>
+          <a:off x="0" y="0"/>
+          <a:ext cx="0" cy="0"/>
+          <a:chOff x="0" y="0"/>
+          <a:chExt cx="0" cy="0"/>
+        </a:xfrm>
+      </p:grpSpPr>
       <p:sp>
         <p:nvSpPr>
           <p:cNvPr id="2" name="TextBox 1"/>
@@ -5125,6 +5173,7 @@
           <a:lstStyle/>
           <a:p>
             <a:pPr algn="ctr"/>
+            <a:endParaRPr/>
           </a:p>
         </p:txBody>
       </p:sp>
@@ -5181,11 +5230,41 @@
                 <a:tableStyleId>{5C22544A-7EE6-4342-B048-85BDC9FD1C3A}</a:tableStyleId>
               </a:tblPr>
               <a:tblGrid>
-                <a:gridCol w="2468880"/>
-                <a:gridCol w="1371600"/>
-                <a:gridCol w="1280160"/>
-                <a:gridCol w="1371600"/>
-                <a:gridCol w="1280160"/>
+                <a:gridCol w="2468880">
+                  <a:extLst>
+                    <a:ext uri="{9D8B030D-6E8A-4147-A177-3AD203B41FA5}">
+                      <a16:colId xmlns:a16="http://schemas.microsoft.com/office/drawing/2014/main" val="20000"/>
+                    </a:ext>
+                  </a:extLst>
+                </a:gridCol>
+                <a:gridCol w="1371600">
+                  <a:extLst>
+                    <a:ext uri="{9D8B030D-6E8A-4147-A177-3AD203B41FA5}">
+                      <a16:colId xmlns:a16="http://schemas.microsoft.com/office/drawing/2014/main" val="20001"/>
+                    </a:ext>
+                  </a:extLst>
+                </a:gridCol>
+                <a:gridCol w="1280160">
+                  <a:extLst>
+                    <a:ext uri="{9D8B030D-6E8A-4147-A177-3AD203B41FA5}">
+                      <a16:colId xmlns:a16="http://schemas.microsoft.com/office/drawing/2014/main" val="20002"/>
+                    </a:ext>
+                  </a:extLst>
+                </a:gridCol>
+                <a:gridCol w="1371600">
+                  <a:extLst>
+                    <a:ext uri="{9D8B030D-6E8A-4147-A177-3AD203B41FA5}">
+                      <a16:colId xmlns:a16="http://schemas.microsoft.com/office/drawing/2014/main" val="20003"/>
+                    </a:ext>
+                  </a:extLst>
+                </a:gridCol>
+                <a:gridCol w="1280160">
+                  <a:extLst>
+                    <a:ext uri="{9D8B030D-6E8A-4147-A177-3AD203B41FA5}">
+                      <a16:colId xmlns:a16="http://schemas.microsoft.com/office/drawing/2014/main" val="20004"/>
+                    </a:ext>
+                  </a:extLst>
+                </a:gridCol>
               </a:tblGrid>
               <a:tr h="457200">
                 <a:tc>
@@ -5303,6 +5382,11 @@
                     </a:solidFill>
                   </a:tcPr>
                 </a:tc>
+                <a:extLst>
+                  <a:ext uri="{0D108BD9-81ED-4DB2-BD59-A6C34878D82A}">
+                    <a16:rowId xmlns:a16="http://schemas.microsoft.com/office/drawing/2014/main" val="10000"/>
+                  </a:ext>
+                </a:extLst>
               </a:tr>
               <a:tr h="457200">
                 <a:tc>
@@ -5405,6 +5489,11 @@
                     </a:solidFill>
                   </a:tcPr>
                 </a:tc>
+                <a:extLst>
+                  <a:ext uri="{0D108BD9-81ED-4DB2-BD59-A6C34878D82A}">
+                    <a16:rowId xmlns:a16="http://schemas.microsoft.com/office/drawing/2014/main" val="10001"/>
+                  </a:ext>
+                </a:extLst>
               </a:tr>
               <a:tr h="457200">
                 <a:tc>
@@ -5507,6 +5596,11 @@
                     </a:solidFill>
                   </a:tcPr>
                 </a:tc>
+                <a:extLst>
+                  <a:ext uri="{0D108BD9-81ED-4DB2-BD59-A6C34878D82A}">
+                    <a16:rowId xmlns:a16="http://schemas.microsoft.com/office/drawing/2014/main" val="10002"/>
+                  </a:ext>
+                </a:extLst>
               </a:tr>
               <a:tr h="457200">
                 <a:tc>
@@ -5609,6 +5703,11 @@
                     </a:solidFill>
                   </a:tcPr>
                 </a:tc>
+                <a:extLst>
+                  <a:ext uri="{0D108BD9-81ED-4DB2-BD59-A6C34878D82A}">
+                    <a16:rowId xmlns:a16="http://schemas.microsoft.com/office/drawing/2014/main" val="10003"/>
+                  </a:ext>
+                </a:extLst>
               </a:tr>
               <a:tr h="457200">
                 <a:tc>
@@ -5711,6 +5810,11 @@
                     </a:solidFill>
                   </a:tcPr>
                 </a:tc>
+                <a:extLst>
+                  <a:ext uri="{0D108BD9-81ED-4DB2-BD59-A6C34878D82A}">
+                    <a16:rowId xmlns:a16="http://schemas.microsoft.com/office/drawing/2014/main" val="10004"/>
+                  </a:ext>
+                </a:extLst>
               </a:tr>
               <a:tr h="457200">
                 <a:tc>
@@ -5813,6 +5917,11 @@
                     </a:solidFill>
                   </a:tcPr>
                 </a:tc>
+                <a:extLst>
+                  <a:ext uri="{0D108BD9-81ED-4DB2-BD59-A6C34878D82A}">
+                    <a16:rowId xmlns:a16="http://schemas.microsoft.com/office/drawing/2014/main" val="10005"/>
+                  </a:ext>
+                </a:extLst>
               </a:tr>
             </a:tbl>
           </a:graphicData>
@@ -6167,7 +6276,7 @@
 </file>
 
 <file path=ppt/slides/slide16.xml><?xml version="1.0" encoding="utf-8"?>
-<p:sld xmlns:a="http://schemas.openxmlformats.org/drawingml/2006/main" xmlns:p="http://schemas.openxmlformats.org/presentationml/2006/main" xmlns:r="http://schemas.openxmlformats.org/officeDocument/2006/relationships">
+<p:sld xmlns:a="http://schemas.openxmlformats.org/drawingml/2006/main" xmlns:r="http://schemas.openxmlformats.org/officeDocument/2006/relationships" xmlns:p="http://schemas.openxmlformats.org/presentationml/2006/main">
   <p:cSld>
     <p:spTree>
       <p:nvGrpSpPr>
@@ -6175,7 +6284,14 @@
         <p:cNvGrpSpPr/>
         <p:nvPr/>
       </p:nvGrpSpPr>
-      <p:grpSpPr/>
+      <p:grpSpPr>
+        <a:xfrm>
+          <a:off x="0" y="0"/>
+          <a:ext cx="0" cy="0"/>
+          <a:chOff x="0" y="0"/>
+          <a:chExt cx="0" cy="0"/>
+        </a:xfrm>
+      </p:grpSpPr>
       <p:sp>
         <p:nvSpPr>
           <p:cNvPr id="2" name="TextBox 1"/>
@@ -6250,6 +6366,7 @@
           <a:lstStyle/>
           <a:p>
             <a:pPr algn="ctr"/>
+            <a:endParaRPr/>
           </a:p>
         </p:txBody>
       </p:sp>
@@ -6573,7 +6690,7 @@
 </file>
 
 <file path=ppt/slides/slide17.xml><?xml version="1.0" encoding="utf-8"?>
-<p:sld xmlns:a="http://schemas.openxmlformats.org/drawingml/2006/main" xmlns:p="http://schemas.openxmlformats.org/presentationml/2006/main" xmlns:r="http://schemas.openxmlformats.org/officeDocument/2006/relationships">
+<p:sld xmlns:a="http://schemas.openxmlformats.org/drawingml/2006/main" xmlns:r="http://schemas.openxmlformats.org/officeDocument/2006/relationships" xmlns:p="http://schemas.openxmlformats.org/presentationml/2006/main">
   <p:cSld>
     <p:spTree>
       <p:nvGrpSpPr>
@@ -6581,7 +6698,14 @@
         <p:cNvGrpSpPr/>
         <p:nvPr/>
       </p:nvGrpSpPr>
-      <p:grpSpPr/>
+      <p:grpSpPr>
+        <a:xfrm>
+          <a:off x="0" y="0"/>
+          <a:ext cx="0" cy="0"/>
+          <a:chOff x="0" y="0"/>
+          <a:chExt cx="0" cy="0"/>
+        </a:xfrm>
+      </p:grpSpPr>
       <p:sp>
         <p:nvSpPr>
           <p:cNvPr id="2" name="TextBox 1"/>
@@ -6656,6 +6780,7 @@
           <a:lstStyle/>
           <a:p>
             <a:pPr algn="ctr"/>
+            <a:endParaRPr/>
           </a:p>
         </p:txBody>
       </p:sp>
@@ -6995,7 +7120,7 @@
 </file>
 
 <file path=ppt/slides/slide2.xml><?xml version="1.0" encoding="utf-8"?>
-<p:sld xmlns:a="http://schemas.openxmlformats.org/drawingml/2006/main" xmlns:p="http://schemas.openxmlformats.org/presentationml/2006/main" xmlns:r="http://schemas.openxmlformats.org/officeDocument/2006/relationships">
+<p:sld xmlns:a="http://schemas.openxmlformats.org/drawingml/2006/main" xmlns:r="http://schemas.openxmlformats.org/officeDocument/2006/relationships" xmlns:p="http://schemas.openxmlformats.org/presentationml/2006/main">
   <p:cSld>
     <p:spTree>
       <p:nvGrpSpPr>
@@ -7003,7 +7128,14 @@
         <p:cNvGrpSpPr/>
         <p:nvPr/>
       </p:nvGrpSpPr>
-      <p:grpSpPr/>
+      <p:grpSpPr>
+        <a:xfrm>
+          <a:off x="0" y="0"/>
+          <a:ext cx="0" cy="0"/>
+          <a:chOff x="0" y="0"/>
+          <a:chExt cx="0" cy="0"/>
+        </a:xfrm>
+      </p:grpSpPr>
       <p:sp>
         <p:nvSpPr>
           <p:cNvPr id="2" name="TextBox 1"/>
@@ -7078,6 +7210,7 @@
           <a:lstStyle/>
           <a:p>
             <a:pPr algn="ctr"/>
+            <a:endParaRPr/>
           </a:p>
         </p:txBody>
       </p:sp>
@@ -7353,7 +7486,7 @@
 </file>
 
 <file path=ppt/slides/slide3.xml><?xml version="1.0" encoding="utf-8"?>
-<p:sld xmlns:a="http://schemas.openxmlformats.org/drawingml/2006/main" xmlns:p="http://schemas.openxmlformats.org/presentationml/2006/main" xmlns:r="http://schemas.openxmlformats.org/officeDocument/2006/relationships">
+<p:sld xmlns:a="http://schemas.openxmlformats.org/drawingml/2006/main" xmlns:r="http://schemas.openxmlformats.org/officeDocument/2006/relationships" xmlns:p="http://schemas.openxmlformats.org/presentationml/2006/main">
   <p:cSld>
     <p:spTree>
       <p:nvGrpSpPr>
@@ -7361,7 +7494,14 @@
         <p:cNvGrpSpPr/>
         <p:nvPr/>
       </p:nvGrpSpPr>
-      <p:grpSpPr/>
+      <p:grpSpPr>
+        <a:xfrm>
+          <a:off x="0" y="0"/>
+          <a:ext cx="0" cy="0"/>
+          <a:chOff x="0" y="0"/>
+          <a:chExt cx="0" cy="0"/>
+        </a:xfrm>
+      </p:grpSpPr>
       <p:sp>
         <p:nvSpPr>
           <p:cNvPr id="2" name="TextBox 1"/>
@@ -7436,6 +7576,7 @@
           <a:lstStyle/>
           <a:p>
             <a:pPr algn="ctr"/>
+            <a:endParaRPr/>
           </a:p>
         </p:txBody>
       </p:sp>
@@ -7695,7 +7836,7 @@
 </file>
 
 <file path=ppt/slides/slide4.xml><?xml version="1.0" encoding="utf-8"?>
-<p:sld xmlns:a="http://schemas.openxmlformats.org/drawingml/2006/main" xmlns:p="http://schemas.openxmlformats.org/presentationml/2006/main" xmlns:r="http://schemas.openxmlformats.org/officeDocument/2006/relationships">
+<p:sld xmlns:a="http://schemas.openxmlformats.org/drawingml/2006/main" xmlns:r="http://schemas.openxmlformats.org/officeDocument/2006/relationships" xmlns:p="http://schemas.openxmlformats.org/presentationml/2006/main">
   <p:cSld>
     <p:spTree>
       <p:nvGrpSpPr>
@@ -7703,7 +7844,14 @@
         <p:cNvGrpSpPr/>
         <p:nvPr/>
       </p:nvGrpSpPr>
-      <p:grpSpPr/>
+      <p:grpSpPr>
+        <a:xfrm>
+          <a:off x="0" y="0"/>
+          <a:ext cx="0" cy="0"/>
+          <a:chOff x="0" y="0"/>
+          <a:chExt cx="0" cy="0"/>
+        </a:xfrm>
+      </p:grpSpPr>
       <p:sp>
         <p:nvSpPr>
           <p:cNvPr id="2" name="TextBox 1"/>
@@ -7778,6 +7926,7 @@
           <a:lstStyle/>
           <a:p>
             <a:pPr algn="ctr"/>
+            <a:endParaRPr/>
           </a:p>
         </p:txBody>
       </p:sp>
@@ -8037,7 +8186,7 @@
 </file>
 
 <file path=ppt/slides/slide5.xml><?xml version="1.0" encoding="utf-8"?>
-<p:sld xmlns:a="http://schemas.openxmlformats.org/drawingml/2006/main" xmlns:p="http://schemas.openxmlformats.org/presentationml/2006/main" xmlns:r="http://schemas.openxmlformats.org/officeDocument/2006/relationships">
+<p:sld xmlns:a="http://schemas.openxmlformats.org/drawingml/2006/main" xmlns:r="http://schemas.openxmlformats.org/officeDocument/2006/relationships" xmlns:p="http://schemas.openxmlformats.org/presentationml/2006/main">
   <p:cSld>
     <p:spTree>
       <p:nvGrpSpPr>
@@ -8045,7 +8194,14 @@
         <p:cNvGrpSpPr/>
         <p:nvPr/>
       </p:nvGrpSpPr>
-      <p:grpSpPr/>
+      <p:grpSpPr>
+        <a:xfrm>
+          <a:off x="0" y="0"/>
+          <a:ext cx="0" cy="0"/>
+          <a:chOff x="0" y="0"/>
+          <a:chExt cx="0" cy="0"/>
+        </a:xfrm>
+      </p:grpSpPr>
       <p:sp>
         <p:nvSpPr>
           <p:cNvPr id="2" name="TextBox 1"/>
@@ -8120,6 +8276,7 @@
           <a:lstStyle/>
           <a:p>
             <a:pPr algn="ctr"/>
+            <a:endParaRPr/>
           </a:p>
         </p:txBody>
       </p:sp>
@@ -8459,7 +8616,7 @@
 </file>
 
 <file path=ppt/slides/slide6.xml><?xml version="1.0" encoding="utf-8"?>
-<p:sld xmlns:a="http://schemas.openxmlformats.org/drawingml/2006/main" xmlns:p="http://schemas.openxmlformats.org/presentationml/2006/main" xmlns:r="http://schemas.openxmlformats.org/officeDocument/2006/relationships">
+<p:sld xmlns:a="http://schemas.openxmlformats.org/drawingml/2006/main" xmlns:r="http://schemas.openxmlformats.org/officeDocument/2006/relationships" xmlns:p="http://schemas.openxmlformats.org/presentationml/2006/main">
   <p:cSld>
     <p:spTree>
       <p:nvGrpSpPr>
@@ -8467,7 +8624,14 @@
         <p:cNvGrpSpPr/>
         <p:nvPr/>
       </p:nvGrpSpPr>
-      <p:grpSpPr/>
+      <p:grpSpPr>
+        <a:xfrm>
+          <a:off x="0" y="0"/>
+          <a:ext cx="0" cy="0"/>
+          <a:chOff x="0" y="0"/>
+          <a:chExt cx="0" cy="0"/>
+        </a:xfrm>
+      </p:grpSpPr>
       <p:sp>
         <p:nvSpPr>
           <p:cNvPr id="2" name="TextBox 1"/>
@@ -8542,6 +8706,7 @@
           <a:lstStyle/>
           <a:p>
             <a:pPr algn="ctr"/>
+            <a:endParaRPr/>
           </a:p>
         </p:txBody>
       </p:sp>
@@ -8819,7 +8984,7 @@
 </file>
 
 <file path=ppt/slides/slide7.xml><?xml version="1.0" encoding="utf-8"?>
-<p:sld xmlns:a="http://schemas.openxmlformats.org/drawingml/2006/main" xmlns:p="http://schemas.openxmlformats.org/presentationml/2006/main" xmlns:r="http://schemas.openxmlformats.org/officeDocument/2006/relationships">
+<p:sld xmlns:a="http://schemas.openxmlformats.org/drawingml/2006/main" xmlns:r="http://schemas.openxmlformats.org/officeDocument/2006/relationships" xmlns:p="http://schemas.openxmlformats.org/presentationml/2006/main">
   <p:cSld>
     <p:spTree>
       <p:nvGrpSpPr>
@@ -8827,7 +8992,14 @@
         <p:cNvGrpSpPr/>
         <p:nvPr/>
       </p:nvGrpSpPr>
-      <p:grpSpPr/>
+      <p:grpSpPr>
+        <a:xfrm>
+          <a:off x="0" y="0"/>
+          <a:ext cx="0" cy="0"/>
+          <a:chOff x="0" y="0"/>
+          <a:chExt cx="0" cy="0"/>
+        </a:xfrm>
+      </p:grpSpPr>
       <p:sp>
         <p:nvSpPr>
           <p:cNvPr id="2" name="TextBox 1"/>
@@ -8902,6 +9074,7 @@
           <a:lstStyle/>
           <a:p>
             <a:pPr algn="ctr"/>
+            <a:endParaRPr/>
           </a:p>
         </p:txBody>
       </p:sp>
@@ -9179,7 +9352,7 @@
 </file>
 
 <file path=ppt/slides/slide8.xml><?xml version="1.0" encoding="utf-8"?>
-<p:sld xmlns:a="http://schemas.openxmlformats.org/drawingml/2006/main" xmlns:p="http://schemas.openxmlformats.org/presentationml/2006/main" xmlns:r="http://schemas.openxmlformats.org/officeDocument/2006/relationships">
+<p:sld xmlns:a="http://schemas.openxmlformats.org/drawingml/2006/main" xmlns:r="http://schemas.openxmlformats.org/officeDocument/2006/relationships" xmlns:p="http://schemas.openxmlformats.org/presentationml/2006/main">
   <p:cSld>
     <p:spTree>
       <p:nvGrpSpPr>
@@ -9187,7 +9360,14 @@
         <p:cNvGrpSpPr/>
         <p:nvPr/>
       </p:nvGrpSpPr>
-      <p:grpSpPr/>
+      <p:grpSpPr>
+        <a:xfrm>
+          <a:off x="0" y="0"/>
+          <a:ext cx="0" cy="0"/>
+          <a:chOff x="0" y="0"/>
+          <a:chExt cx="0" cy="0"/>
+        </a:xfrm>
+      </p:grpSpPr>
       <p:sp>
         <p:nvSpPr>
           <p:cNvPr id="2" name="TextBox 1"/>
@@ -9262,6 +9442,7 @@
           <a:lstStyle/>
           <a:p>
             <a:pPr algn="ctr"/>
+            <a:endParaRPr/>
           </a:p>
         </p:txBody>
       </p:sp>
@@ -9571,7 +9752,7 @@
 </file>
 
 <file path=ppt/slides/slide9.xml><?xml version="1.0" encoding="utf-8"?>
-<p:sld xmlns:a="http://schemas.openxmlformats.org/drawingml/2006/main" xmlns:p="http://schemas.openxmlformats.org/presentationml/2006/main" xmlns:r="http://schemas.openxmlformats.org/officeDocument/2006/relationships">
+<p:sld xmlns:a="http://schemas.openxmlformats.org/drawingml/2006/main" xmlns:r="http://schemas.openxmlformats.org/officeDocument/2006/relationships" xmlns:p="http://schemas.openxmlformats.org/presentationml/2006/main">
   <p:cSld>
     <p:spTree>
       <p:nvGrpSpPr>
@@ -9579,7 +9760,14 @@
         <p:cNvGrpSpPr/>
         <p:nvPr/>
       </p:nvGrpSpPr>
-      <p:grpSpPr/>
+      <p:grpSpPr>
+        <a:xfrm>
+          <a:off x="0" y="0"/>
+          <a:ext cx="0" cy="0"/>
+          <a:chOff x="0" y="0"/>
+          <a:chExt cx="0" cy="0"/>
+        </a:xfrm>
+      </p:grpSpPr>
       <p:sp>
         <p:nvSpPr>
           <p:cNvPr id="2" name="TextBox 1"/>
@@ -9654,6 +9842,7 @@
           <a:lstStyle/>
           <a:p>
             <a:pPr algn="ctr"/>
+            <a:endParaRPr/>
           </a:p>
         </p:txBody>
       </p:sp>
@@ -9710,11 +9899,41 @@
                 <a:tableStyleId>{5C22544A-7EE6-4342-B048-85BDC9FD1C3A}</a:tableStyleId>
               </a:tblPr>
               <a:tblGrid>
-                <a:gridCol w="2377440"/>
-                <a:gridCol w="2377440"/>
-                <a:gridCol w="2103120"/>
-                <a:gridCol w="2103120"/>
-                <a:gridCol w="2103120"/>
+                <a:gridCol w="2377440">
+                  <a:extLst>
+                    <a:ext uri="{9D8B030D-6E8A-4147-A177-3AD203B41FA5}">
+                      <a16:colId xmlns:a16="http://schemas.microsoft.com/office/drawing/2014/main" val="20000"/>
+                    </a:ext>
+                  </a:extLst>
+                </a:gridCol>
+                <a:gridCol w="2377440">
+                  <a:extLst>
+                    <a:ext uri="{9D8B030D-6E8A-4147-A177-3AD203B41FA5}">
+                      <a16:colId xmlns:a16="http://schemas.microsoft.com/office/drawing/2014/main" val="20001"/>
+                    </a:ext>
+                  </a:extLst>
+                </a:gridCol>
+                <a:gridCol w="2103120">
+                  <a:extLst>
+                    <a:ext uri="{9D8B030D-6E8A-4147-A177-3AD203B41FA5}">
+                      <a16:colId xmlns:a16="http://schemas.microsoft.com/office/drawing/2014/main" val="20002"/>
+                    </a:ext>
+                  </a:extLst>
+                </a:gridCol>
+                <a:gridCol w="2103120">
+                  <a:extLst>
+                    <a:ext uri="{9D8B030D-6E8A-4147-A177-3AD203B41FA5}">
+                      <a16:colId xmlns:a16="http://schemas.microsoft.com/office/drawing/2014/main" val="20003"/>
+                    </a:ext>
+                  </a:extLst>
+                </a:gridCol>
+                <a:gridCol w="2103120">
+                  <a:extLst>
+                    <a:ext uri="{9D8B030D-6E8A-4147-A177-3AD203B41FA5}">
+                      <a16:colId xmlns:a16="http://schemas.microsoft.com/office/drawing/2014/main" val="20004"/>
+                    </a:ext>
+                  </a:extLst>
+                </a:gridCol>
               </a:tblGrid>
               <a:tr h="685800">
                 <a:tc>
@@ -9832,6 +10051,11 @@
                     </a:solidFill>
                   </a:tcPr>
                 </a:tc>
+                <a:extLst>
+                  <a:ext uri="{0D108BD9-81ED-4DB2-BD59-A6C34878D82A}">
+                    <a16:rowId xmlns:a16="http://schemas.microsoft.com/office/drawing/2014/main" val="10000"/>
+                  </a:ext>
+                </a:extLst>
               </a:tr>
               <a:tr h="685800">
                 <a:tc>
@@ -9860,6 +10084,7 @@
                     <a:lstStyle/>
                     <a:p>
                       <a:pPr algn="ctr"/>
+                      <a:endParaRPr/>
                     </a:p>
                   </a:txBody>
                   <a:tcPr>
@@ -9894,6 +10119,7 @@
                     <a:lstStyle/>
                     <a:p>
                       <a:pPr algn="ctr"/>
+                      <a:endParaRPr/>
                     </a:p>
                   </a:txBody>
                   <a:tcPr>
@@ -9908,6 +10134,7 @@
                     <a:lstStyle/>
                     <a:p>
                       <a:pPr algn="ctr"/>
+                      <a:endParaRPr/>
                     </a:p>
                   </a:txBody>
                   <a:tcPr>
@@ -9916,6 +10143,11 @@
                     </a:solidFill>
                   </a:tcPr>
                 </a:tc>
+                <a:extLst>
+                  <a:ext uri="{0D108BD9-81ED-4DB2-BD59-A6C34878D82A}">
+                    <a16:rowId xmlns:a16="http://schemas.microsoft.com/office/drawing/2014/main" val="10001"/>
+                  </a:ext>
+                </a:extLst>
               </a:tr>
               <a:tr h="685800">
                 <a:tc>
@@ -9944,6 +10176,7 @@
                     <a:lstStyle/>
                     <a:p>
                       <a:pPr algn="ctr"/>
+                      <a:endParaRPr/>
                     </a:p>
                   </a:txBody>
                   <a:tcPr>
@@ -9978,6 +10211,7 @@
                     <a:lstStyle/>
                     <a:p>
                       <a:pPr algn="ctr"/>
+                      <a:endParaRPr/>
                     </a:p>
                   </a:txBody>
                   <a:tcPr>
@@ -9992,6 +10226,7 @@
                     <a:lstStyle/>
                     <a:p>
                       <a:pPr algn="ctr"/>
+                      <a:endParaRPr/>
                     </a:p>
                   </a:txBody>
                   <a:tcPr>
@@ -10000,6 +10235,11 @@
                     </a:solidFill>
                   </a:tcPr>
                 </a:tc>
+                <a:extLst>
+                  <a:ext uri="{0D108BD9-81ED-4DB2-BD59-A6C34878D82A}">
+                    <a16:rowId xmlns:a16="http://schemas.microsoft.com/office/drawing/2014/main" val="10002"/>
+                  </a:ext>
+                </a:extLst>
               </a:tr>
               <a:tr h="685800">
                 <a:tc>
@@ -10028,6 +10268,7 @@
                     <a:lstStyle/>
                     <a:p>
                       <a:pPr algn="ctr"/>
+                      <a:endParaRPr/>
                     </a:p>
                   </a:txBody>
                   <a:tcPr>
@@ -10062,6 +10303,7 @@
                     <a:lstStyle/>
                     <a:p>
                       <a:pPr algn="ctr"/>
+                      <a:endParaRPr/>
                     </a:p>
                   </a:txBody>
                   <a:tcPr>
@@ -10076,6 +10318,7 @@
                     <a:lstStyle/>
                     <a:p>
                       <a:pPr algn="ctr"/>
+                      <a:endParaRPr/>
                     </a:p>
                   </a:txBody>
                   <a:tcPr>
@@ -10084,6 +10327,11 @@
                     </a:solidFill>
                   </a:tcPr>
                 </a:tc>
+                <a:extLst>
+                  <a:ext uri="{0D108BD9-81ED-4DB2-BD59-A6C34878D82A}">
+                    <a16:rowId xmlns:a16="http://schemas.microsoft.com/office/drawing/2014/main" val="10003"/>
+                  </a:ext>
+                </a:extLst>
               </a:tr>
               <a:tr h="685800">
                 <a:tc>
@@ -10112,6 +10360,7 @@
                     <a:lstStyle/>
                     <a:p>
                       <a:pPr algn="ctr"/>
+                      <a:endParaRPr/>
                     </a:p>
                   </a:txBody>
                   <a:tcPr>
@@ -10126,6 +10375,7 @@
                     <a:lstStyle/>
                     <a:p>
                       <a:pPr algn="ctr"/>
+                      <a:endParaRPr/>
                     </a:p>
                   </a:txBody>
                   <a:tcPr>
@@ -10160,6 +10410,7 @@
                     <a:lstStyle/>
                     <a:p>
                       <a:pPr algn="ctr"/>
+                      <a:endParaRPr/>
                     </a:p>
                   </a:txBody>
                   <a:tcPr>
@@ -10168,6 +10419,11 @@
                     </a:solidFill>
                   </a:tcPr>
                 </a:tc>
+                <a:extLst>
+                  <a:ext uri="{0D108BD9-81ED-4DB2-BD59-A6C34878D82A}">
+                    <a16:rowId xmlns:a16="http://schemas.microsoft.com/office/drawing/2014/main" val="10004"/>
+                  </a:ext>
+                </a:extLst>
               </a:tr>
               <a:tr h="685800">
                 <a:tc>
@@ -10270,6 +10526,11 @@
                     </a:solidFill>
                   </a:tcPr>
                 </a:tc>
+                <a:extLst>
+                  <a:ext uri="{0D108BD9-81ED-4DB2-BD59-A6C34878D82A}">
+                    <a16:rowId xmlns:a16="http://schemas.microsoft.com/office/drawing/2014/main" val="10005"/>
+                  </a:ext>
+                </a:extLst>
               </a:tr>
             </a:tbl>
           </a:graphicData>

--- a/SimLens_Proposal_2026-04-27.pptx
+++ b/SimLens_Proposal_2026-04-27.pptx
@@ -318,7 +318,7 @@
           <a:p>
             <a:fld id="{5BCAD085-E8A6-8845-BD4E-CB4CCA059FC4}" type="datetimeFigureOut">
               <a:rPr lang="en-US" smtClean="0"/>
-              <a:t>4/27/2026</a:t>
+              <a:t>4/28/2026</a:t>
             </a:fld>
             <a:endParaRPr lang="en-US"/>
           </a:p>
@@ -486,7 +486,7 @@
           <a:p>
             <a:fld id="{5BCAD085-E8A6-8845-BD4E-CB4CCA059FC4}" type="datetimeFigureOut">
               <a:rPr lang="en-US" smtClean="0"/>
-              <a:t>4/27/2026</a:t>
+              <a:t>4/28/2026</a:t>
             </a:fld>
             <a:endParaRPr lang="en-US"/>
           </a:p>
@@ -664,7 +664,7 @@
           <a:p>
             <a:fld id="{5BCAD085-E8A6-8845-BD4E-CB4CCA059FC4}" type="datetimeFigureOut">
               <a:rPr lang="en-US" smtClean="0"/>
-              <a:t>4/27/2026</a:t>
+              <a:t>4/28/2026</a:t>
             </a:fld>
             <a:endParaRPr lang="en-US"/>
           </a:p>
@@ -832,7 +832,7 @@
           <a:p>
             <a:fld id="{5BCAD085-E8A6-8845-BD4E-CB4CCA059FC4}" type="datetimeFigureOut">
               <a:rPr lang="en-US" smtClean="0"/>
-              <a:t>4/27/2026</a:t>
+              <a:t>4/28/2026</a:t>
             </a:fld>
             <a:endParaRPr lang="en-US"/>
           </a:p>
@@ -1077,7 +1077,7 @@
           <a:p>
             <a:fld id="{5BCAD085-E8A6-8845-BD4E-CB4CCA059FC4}" type="datetimeFigureOut">
               <a:rPr lang="en-US" smtClean="0"/>
-              <a:t>4/27/2026</a:t>
+              <a:t>4/28/2026</a:t>
             </a:fld>
             <a:endParaRPr lang="en-US"/>
           </a:p>
@@ -1362,7 +1362,7 @@
           <a:p>
             <a:fld id="{5BCAD085-E8A6-8845-BD4E-CB4CCA059FC4}" type="datetimeFigureOut">
               <a:rPr lang="en-US" smtClean="0"/>
-              <a:t>4/27/2026</a:t>
+              <a:t>4/28/2026</a:t>
             </a:fld>
             <a:endParaRPr lang="en-US"/>
           </a:p>
@@ -1781,7 +1781,7 @@
           <a:p>
             <a:fld id="{5BCAD085-E8A6-8845-BD4E-CB4CCA059FC4}" type="datetimeFigureOut">
               <a:rPr lang="en-US" smtClean="0"/>
-              <a:t>4/27/2026</a:t>
+              <a:t>4/28/2026</a:t>
             </a:fld>
             <a:endParaRPr lang="en-US"/>
           </a:p>
@@ -1898,7 +1898,7 @@
           <a:p>
             <a:fld id="{5BCAD085-E8A6-8845-BD4E-CB4CCA059FC4}" type="datetimeFigureOut">
               <a:rPr lang="en-US" smtClean="0"/>
-              <a:t>4/27/2026</a:t>
+              <a:t>4/28/2026</a:t>
             </a:fld>
             <a:endParaRPr lang="en-US"/>
           </a:p>
@@ -1993,7 +1993,7 @@
           <a:p>
             <a:fld id="{5BCAD085-E8A6-8845-BD4E-CB4CCA059FC4}" type="datetimeFigureOut">
               <a:rPr lang="en-US" smtClean="0"/>
-              <a:t>4/27/2026</a:t>
+              <a:t>4/28/2026</a:t>
             </a:fld>
             <a:endParaRPr lang="en-US"/>
           </a:p>
@@ -2268,7 +2268,7 @@
           <a:p>
             <a:fld id="{5BCAD085-E8A6-8845-BD4E-CB4CCA059FC4}" type="datetimeFigureOut">
               <a:rPr lang="en-US" smtClean="0"/>
-              <a:t>4/27/2026</a:t>
+              <a:t>4/28/2026</a:t>
             </a:fld>
             <a:endParaRPr lang="en-US"/>
           </a:p>
@@ -2520,7 +2520,7 @@
           <a:p>
             <a:fld id="{5BCAD085-E8A6-8845-BD4E-CB4CCA059FC4}" type="datetimeFigureOut">
               <a:rPr lang="en-US" smtClean="0"/>
-              <a:t>4/27/2026</a:t>
+              <a:t>4/28/2026</a:t>
             </a:fld>
             <a:endParaRPr lang="en-US"/>
           </a:p>
@@ -2731,7 +2731,7 @@
           <a:p>
             <a:fld id="{5BCAD085-E8A6-8845-BD4E-CB4CCA059FC4}" type="datetimeFigureOut">
               <a:rPr lang="en-US" smtClean="0"/>
-              <a:t>4/27/2026</a:t>
+              <a:t>4/28/2026</a:t>
             </a:fld>
             <a:endParaRPr lang="en-US"/>
           </a:p>
@@ -3159,8 +3159,8 @@
         </p:nvSpPr>
         <p:spPr>
           <a:xfrm>
-            <a:off x="457200" y="4206240"/>
-            <a:ext cx="11247120" cy="1097280"/>
+            <a:off x="4185146" y="4206240"/>
+            <a:ext cx="3791231" cy="800219"/>
           </a:xfrm>
           <a:prstGeom prst="rect">
             <a:avLst/>
@@ -3175,26 +3175,50 @@
           <a:p>
             <a:pPr algn="ctr"/>
             <a:r>
-              <a:rPr sz="2400">
+              <a:rPr sz="2400" dirty="0" err="1">
                 <a:solidFill>
                   <a:srgbClr val="1F1F1F"/>
                 </a:solidFill>
                 <a:latin typeface="Times New Roman"/>
               </a:rPr>
-              <a:t>傅聖祐 (Sheng-You Fu)</a:t>
+              <a:t>傅聖祐</a:t>
+            </a:r>
+            <a:r>
+              <a:rPr sz="2400" dirty="0">
+                <a:solidFill>
+                  <a:srgbClr val="1F1F1F"/>
+                </a:solidFill>
+                <a:latin typeface="Times New Roman"/>
+              </a:rPr>
+              <a:t> (Sheng-You Fu)</a:t>
             </a:r>
           </a:p>
           <a:p>
             <a:pPr algn="ctr"/>
             <a:r>
-              <a:rPr sz="2200">
+              <a:rPr sz="2200" dirty="0">
                 <a:solidFill>
                   <a:srgbClr val="1F1F1F"/>
                 </a:solidFill>
                 <a:latin typeface="Times New Roman"/>
               </a:rPr>
-              <a:t>Advisor: Prof. Chia-Yu Lin</a:t>
-            </a:r>
+              <a:t>Advisor: Prof.</a:t>
+            </a:r>
+            <a:r>
+              <a:rPr lang="en-US" sz="2200" dirty="0">
+                <a:solidFill>
+                  <a:srgbClr val="1F1F1F"/>
+                </a:solidFill>
+                <a:latin typeface="Times New Roman"/>
+              </a:rPr>
+              <a:t> Chen, Yen-Liang</a:t>
+            </a:r>
+            <a:endParaRPr sz="2200" dirty="0">
+              <a:solidFill>
+                <a:srgbClr val="1F1F1F"/>
+              </a:solidFill>
+              <a:latin typeface="Times New Roman"/>
+            </a:endParaRPr>
           </a:p>
         </p:txBody>
       </p:sp>
@@ -4033,7 +4057,7 @@
                 </a:solidFill>
                 <a:latin typeface="Times New Roman"/>
               </a:rPr>
-              <a:t>– Output: a 10–50 word comment OR exactly "None" — explicitly modeling no-reaction behavior.</a:t>
+              <a:t>– Output: a 10–50 word comment OR exactly "None" — explicitly modeling no-reaction behavior [4].</a:t>
             </a:r>
           </a:p>
           <a:p>
@@ -4049,7 +4073,7 @@
                 </a:solidFill>
                 <a:latin typeface="Times New Roman"/>
               </a:rPr>
-              <a:t>– Total: 9,600 cells → ~4,800 comments + ~4,800 None labels (cost ≈ $115).</a:t>
+              <a:t>– Total: ~9,600 cells (estimated, varies with video length) → ~4,800 comments + ~4,800 None labels (cost ≈ $115).</a:t>
             </a:r>
           </a:p>
           <a:p>
@@ -4065,7 +4089,7 @@
                 </a:solidFill>
                 <a:latin typeface="Times New Roman"/>
               </a:rPr>
-              <a:t>• SFT training: 8 independent LoRA adapters (rank=8) on a shared 4-bit GPTQ Llama-3.2-3B base — one adapter per persona.</a:t>
+              <a:t>• SFT training: 8 independent LoRA adapters (rank=8) on a shared 4-bit GPTQ Llama-3.2-3B base — one adapter per persona [3].</a:t>
             </a:r>
           </a:p>
           <a:p>
@@ -4113,7 +4137,7 @@
                 </a:solidFill>
                 <a:latin typeface="Times New Roman"/>
               </a:rPr>
-              <a:t>• Novelty: training on "None" labels — teaches the model when a persona stays silent.</a:t>
+              <a:t>• Novelty: extending platform-level "ignore" action [4] to persona-internal abstention — when a viewer stays silent on a segment.</a:t>
             </a:r>
           </a:p>
         </p:txBody>
@@ -4126,8 +4150,8 @@
         </p:nvSpPr>
         <p:spPr>
           <a:xfrm>
-            <a:off x="274320" y="6446520"/>
-            <a:ext cx="1828800" cy="365760"/>
+            <a:off x="365760" y="5989320"/>
+            <a:ext cx="11430000" cy="365760"/>
           </a:xfrm>
           <a:prstGeom prst="rect">
             <a:avLst/>
@@ -4141,12 +4165,13 @@
           <a:lstStyle/>
           <a:p>
             <a:r>
-              <a:rPr sz="1000">
+              <a:rPr sz="900">
                 <a:solidFill>
                   <a:srgbClr val="808080"/>
                 </a:solidFill>
-              </a:rPr>
-              <a:t>2026/4/27</a:t>
+                <a:latin typeface="Times New Roman"/>
+              </a:rPr>
+              <a:t>[3] Yu et al. Neeko: Dynamic LoRA for Multi-Character Role-Playing. EMNLP 2024.    [4] Action-Guided Engagement, arXiv:2502.12073, 2025.</a:t>
             </a:r>
           </a:p>
         </p:txBody>
@@ -4159,8 +4184,8 @@
         </p:nvSpPr>
         <p:spPr>
           <a:xfrm>
-            <a:off x="3200400" y="6446520"/>
-            <a:ext cx="6400800" cy="457200"/>
+            <a:off x="274320" y="6446520"/>
+            <a:ext cx="1828800" cy="365760"/>
           </a:xfrm>
           <a:prstGeom prst="rect">
             <a:avLst/>
@@ -4168,6 +4193,39 @@
           <a:noFill/>
         </p:spPr>
         <p:txBody>
+          <a:bodyPr wrap="none">
+            <a:spAutoFit/>
+          </a:bodyPr>
+          <a:lstStyle/>
+          <a:p>
+            <a:r>
+              <a:rPr sz="1000">
+                <a:solidFill>
+                  <a:srgbClr val="808080"/>
+                </a:solidFill>
+              </a:rPr>
+              <a:t>2026/4/27</a:t>
+            </a:r>
+          </a:p>
+        </p:txBody>
+      </p:sp>
+      <p:sp>
+        <p:nvSpPr>
+          <p:cNvPr id="7" name="TextBox 6"/>
+          <p:cNvSpPr txBox="1"/>
+          <p:nvPr/>
+        </p:nvSpPr>
+        <p:spPr>
+          <a:xfrm>
+            <a:off x="3200400" y="6446520"/>
+            <a:ext cx="6400800" cy="457200"/>
+          </a:xfrm>
+          <a:prstGeom prst="rect">
+            <a:avLst/>
+          </a:prstGeom>
+          <a:noFill/>
+        </p:spPr>
+        <p:txBody>
           <a:bodyPr wrap="square">
             <a:spAutoFit/>
           </a:bodyPr>
@@ -4198,7 +4256,7 @@
       </p:sp>
       <p:sp>
         <p:nvSpPr>
-          <p:cNvPr id="7" name="TextBox 6"/>
+          <p:cNvPr id="8" name="TextBox 7"/>
           <p:cNvSpPr txBox="1"/>
           <p:nvPr/>
         </p:nvSpPr>
@@ -4797,7 +4855,7 @@
                 </a:solidFill>
                 <a:latin typeface="Times New Roman"/>
               </a:rPr>
-              <a:t>• Data: 100 YouTube short-form videos (~2 min each), 5 categories × 20 videos.</a:t>
+              <a:t>• Data: 100 YouTube short-form videos (30s–3min, avg ~2min), 5 categories × 20 videos.</a:t>
             </a:r>
           </a:p>
           <a:p>
@@ -4829,7 +4887,7 @@
                 </a:solidFill>
                 <a:latin typeface="Times New Roman"/>
               </a:rPr>
-              <a:t>– 9,600 (video × segment × persona) cells; 85/10/5 train/val/test split.</a:t>
+              <a:t>– ~9,600 (video × segment × persona) cells (varies with video length); 85/10/5 train/val/test split.</a:t>
             </a:r>
           </a:p>
           <a:p>
@@ -4941,7 +4999,7 @@
                 </a:solidFill>
                 <a:latin typeface="Times New Roman"/>
               </a:rPr>
-              <a:t>– Segment-localization quiz: given a generated comment, identify which of 12 segments it belongs to.</a:t>
+              <a:t>– Segment-localization quiz: given a generated comment, identify which of N segments it belongs to.</a:t>
             </a:r>
           </a:p>
           <a:p>
@@ -6468,7 +6526,7 @@
                 </a:solidFill>
                 <a:latin typeface="Times New Roman"/>
               </a:rPr>
-              <a:t>– C1 (System): first end-to-end pipeline producing a 12 × 8 reaction matrix per 2-min video, runnable on 24GB GPU.</a:t>
+              <a:t>– C1 (System): first end-to-end pipeline producing an N × 8 reaction matrix (avg ~96 cells) for short-form videos, runnable on 24GB GPU.</a:t>
             </a:r>
           </a:p>
           <a:p>
@@ -6850,7 +6908,7 @@
                 </a:solidFill>
                 <a:latin typeface="Times New Roman"/>
               </a:rPr>
-              <a:t>[3] Yuan et al. Self-Rewarding Language Models. arXiv:2401.10020 (v3, 2025), Meta + NYU.</a:t>
+              <a:t>[3] Yu et al. Neeko: Leveraging Dynamic LoRA for Efficient Multi-Character Role-Playing Agent. EMNLP 2024 Main.</a:t>
             </a:r>
           </a:p>
           <a:p>
@@ -6866,7 +6924,7 @@
                 </a:solidFill>
                 <a:latin typeface="Times New Roman"/>
               </a:rPr>
-              <a:t>[4] Samuel et al. PersonaGym: Evaluating Persona Agents and LLMs. EMNLP 2025 Findings.</a:t>
+              <a:t>[4] Anonymous. Can LLMs Simulate Social Media Engagement? A Study on Action-Guided Response Generation. arXiv:2502.12073, 2025.</a:t>
             </a:r>
           </a:p>
           <a:p>
@@ -6882,7 +6940,7 @@
                 </a:solidFill>
                 <a:latin typeface="Times New Roman"/>
               </a:rPr>
-              <a:t>[5] Rafailov et al. Direct Preference Optimization (DPO). NeurIPS 2023.</a:t>
+              <a:t>[5] Yuan et al. Self-Rewarding Language Models. arXiv:2401.10020 (v3, 2025), Meta + NYU.</a:t>
             </a:r>
           </a:p>
           <a:p>
@@ -6898,7 +6956,7 @@
                 </a:solidFill>
                 <a:latin typeface="Times New Roman"/>
               </a:rPr>
-              <a:t>[6] Lee et al. RLAIF: Scaling Reinforcement Learning from Human Feedback with AI Feedback. arXiv 2023, Google DeepMind.</a:t>
+              <a:t>[6] Samuel et al. PersonaGym: Evaluating Persona Agents and LLMs. EMNLP 2025 Findings.</a:t>
             </a:r>
           </a:p>
           <a:p>
@@ -6914,7 +6972,7 @@
                 </a:solidFill>
                 <a:latin typeface="Times New Roman"/>
               </a:rPr>
-              <a:t>[7] Williams et al. MORLAIF: Multi-Objective Reinforcement Learning from AI Feedback. arXiv:2406.07496, 2024.</a:t>
+              <a:t>[7] Rafailov et al. Direct Preference Optimization (DPO). NeurIPS 2023.</a:t>
             </a:r>
           </a:p>
           <a:p>
@@ -6930,7 +6988,7 @@
                 </a:solidFill>
                 <a:latin typeface="Times New Roman"/>
               </a:rPr>
-              <a:t>[8] Hu et al. LoRA: Low-Rank Adaptation of Large Language Models. ICLR 2022.</a:t>
+              <a:t>[8] Lee et al. RLAIF: Scaling Reinforcement Learning from Human Feedback with AI Feedback. arXiv:2309.00267, 2023, Google DeepMind.</a:t>
             </a:r>
           </a:p>
           <a:p>
@@ -6946,7 +7004,7 @@
                 </a:solidFill>
                 <a:latin typeface="Times New Roman"/>
               </a:rPr>
-              <a:t>[9] Liu et al. LLaVA-NeXT: Improved Reasoning, OCR, and World Knowledge, 2024.</a:t>
+              <a:t>[9] Williams et al. MORLAIF: Multi-Objective Reinforcement Learning from AI Feedback. arXiv:2406.07496, 2024.</a:t>
             </a:r>
           </a:p>
           <a:p>
@@ -6962,7 +7020,7 @@
                 </a:solidFill>
                 <a:latin typeface="Times New Roman"/>
               </a:rPr>
-              <a:t>[10] Radford et al. Robust Speech Recognition via Large-Scale Weak Supervision (Whisper). 2022.</a:t>
+              <a:t>[10] Hu et al. LoRA: Low-Rank Adaptation of Large Language Models. ICLR 2022.</a:t>
             </a:r>
           </a:p>
           <a:p>
@@ -6978,7 +7036,7 @@
                 </a:solidFill>
                 <a:latin typeface="Times New Roman"/>
               </a:rPr>
-              <a:t>[11] Meta AI. Llama 3.2 Release Notes, 2024.</a:t>
+              <a:t>[11] Liu et al. LLaVA-NeXT: Improved Reasoning, OCR, and World Knowledge, 2024.</a:t>
             </a:r>
           </a:p>
           <a:p>
@@ -6994,7 +7052,39 @@
                 </a:solidFill>
                 <a:latin typeface="Times New Roman"/>
               </a:rPr>
-              <a:t>[12] Lambert et al. Tülu 3: Pushing the Frontier of Open Language Model Post-Training, 2024.</a:t>
+              <a:t>[12] Radford et al. Robust Speech Recognition via Large-Scale Weak Supervision (Whisper), 2022.</a:t>
+            </a:r>
+          </a:p>
+          <a:p>
+            <a:pPr>
+              <a:spcAft>
+                <a:spcPts val="400"/>
+              </a:spcAft>
+            </a:pPr>
+            <a:r>
+              <a:rPr sz="1300">
+                <a:solidFill>
+                  <a:srgbClr val="1F1F1F"/>
+                </a:solidFill>
+                <a:latin typeface="Times New Roman"/>
+              </a:rPr>
+              <a:t>[13] Meta AI. Llama 3.2 Release Notes, 2024.</a:t>
+            </a:r>
+          </a:p>
+          <a:p>
+            <a:pPr>
+              <a:spcAft>
+                <a:spcPts val="400"/>
+              </a:spcAft>
+            </a:pPr>
+            <a:r>
+              <a:rPr sz="1300">
+                <a:solidFill>
+                  <a:srgbClr val="1F1F1F"/>
+                </a:solidFill>
+                <a:latin typeface="Times New Roman"/>
+              </a:rPr>
+              <a:t>[14] Lambert et al. Tülu 3: Pushing the Frontier of Open Language Model Post-Training, 2024.</a:t>
             </a:r>
           </a:p>
         </p:txBody>
@@ -7980,7 +8070,7 @@
                 </a:solidFill>
                 <a:latin typeface="Times New Roman"/>
               </a:rPr>
-              <a:t>– generate persona-specific reactions for each segment of a 2-minute video?</a:t>
+              <a:t>– generate persona-specific reactions for each segment of a short-form video (30s–3min)?</a:t>
             </a:r>
           </a:p>
           <a:p>
@@ -8346,7 +8436,7 @@
                 </a:solidFill>
                 <a:latin typeface="Times New Roman"/>
               </a:rPr>
-              <a:t>– Per video: 12 segments × 8 personas = 96-cell reaction matrix</a:t>
+              <a:t>– Per video: N segments × 8 personas reaction matrix (avg ~96 cells; N = ⌈duration/10s⌉, typically 3–18)</a:t>
             </a:r>
           </a:p>
           <a:p>
@@ -8718,7 +8808,7 @@
         </p:nvSpPr>
         <p:spPr>
           <a:xfrm>
-            <a:off x="548640" y="1188720"/>
+            <a:off x="548640" y="1182542"/>
             <a:ext cx="10972800" cy="4937760"/>
           </a:xfrm>
           <a:prstGeom prst="rect">
@@ -9626,7 +9716,7 @@
                 </a:solidFill>
                 <a:latin typeface="Times New Roman"/>
               </a:rPr>
-              <a:t>[3] Yuan et al. Self-Rewarding Language Models. arXiv:2401.10020 (v3, 2025), Meta + NYU.</a:t>
+              <a:t>[5] Yuan et al. Self-Rewarding Language Models. arXiv:2401.10020 (v3, 2025), Meta + NYU.</a:t>
             </a:r>
           </a:p>
         </p:txBody>
